--- a/slides/sesion-01.pptx
+++ b/slides/sesion-01.pptx
@@ -16,6 +16,11 @@
     <p:sldId id="264" r:id="rId15"/>
     <p:sldId id="265" r:id="rId16"/>
     <p:sldId id="266" r:id="rId17"/>
+    <p:sldId id="267" r:id="rId18"/>
+    <p:sldId id="268" r:id="rId19"/>
+    <p:sldId id="269" r:id="rId20"/>
+    <p:sldId id="270" r:id="rId21"/>
+    <p:sldId id="271" r:id="rId22"/>
   </p:sldIdLst>
   <p:sldSz cx="12191695" cy="6858000" type="screen4x3"/>
   <p:notesSz cx="6858000" cy="9144000"/>
@@ -3385,7 +3390,7 @@
             <a:r>
               <a:rPr sz="1500" b="0">
                 <a:solidFill>
-                  <a:srgbClr val="8A7C70"/>
+                  <a:srgbClr val="6F645B"/>
                 </a:solidFill>
                 <a:latin typeface="Calibri"/>
               </a:rPr>
@@ -3422,14 +3427,180 @@
       <p:grpSpPr/>
       <p:sp>
         <p:nvSpPr>
-          <p:cNvPr id="2" name="Rounded Rectangle 1"/>
+          <p:cNvPr id="2" name="Rectangle 1"/>
           <p:cNvSpPr/>
           <p:nvPr/>
         </p:nvSpPr>
         <p:spPr>
           <a:xfrm>
-            <a:off x="640080" y="640080"/>
-            <a:ext cx="10908792" cy="5577840"/>
+            <a:off x="0" y="0"/>
+            <a:ext cx="12191695" cy="146304"/>
+          </a:xfrm>
+          <a:prstGeom prst="rect">
+            <a:avLst/>
+          </a:prstGeom>
+          <a:solidFill>
+            <a:srgbClr val="4F772D"/>
+          </a:solidFill>
+          <a:ln>
+            <a:noFill/>
+          </a:ln>
+          <a:effectLst/>
+        </p:spPr>
+        <p:style>
+          <a:lnRef idx="1">
+            <a:schemeClr val="accent1"/>
+          </a:lnRef>
+          <a:fillRef idx="3">
+            <a:schemeClr val="accent1"/>
+          </a:fillRef>
+          <a:effectRef idx="2">
+            <a:schemeClr val="accent1"/>
+          </a:effectRef>
+          <a:fontRef idx="minor">
+            <a:schemeClr val="lt1"/>
+          </a:fontRef>
+        </p:style>
+        <p:txBody>
+          <a:bodyPr rtlCol="0" anchor="ctr"/>
+          <a:lstStyle/>
+          <a:p>
+            <a:pPr algn="ctr"/>
+          </a:p>
+        </p:txBody>
+      </p:sp>
+      <p:sp>
+        <p:nvSpPr>
+          <p:cNvPr id="3" name="TextBox 2"/>
+          <p:cNvSpPr txBox="1"/>
+          <p:nvPr/>
+        </p:nvSpPr>
+        <p:spPr>
+          <a:xfrm>
+            <a:off x="822960" y="457200"/>
+            <a:ext cx="10515600" cy="457200"/>
+          </a:xfrm>
+          <a:prstGeom prst="rect">
+            <a:avLst/>
+          </a:prstGeom>
+          <a:noFill/>
+        </p:spPr>
+        <p:txBody>
+          <a:bodyPr wrap="square" anchor="t">
+            <a:spAutoFit/>
+          </a:bodyPr>
+          <a:lstStyle/>
+          <a:p>
+            <a:pPr algn="l">
+              <a:spcAft>
+                <a:spcPts val="600"/>
+              </a:spcAft>
+            </a:pPr>
+            <a:r>
+              <a:rPr sz="1800" b="1">
+                <a:solidFill>
+                  <a:srgbClr val="C84B31"/>
+                </a:solidFill>
+                <a:latin typeface="Calibri"/>
+              </a:rPr>
+              <a:t>PARA DISEÑO</a:t>
+            </a:r>
+          </a:p>
+        </p:txBody>
+      </p:sp>
+      <p:sp>
+        <p:nvSpPr>
+          <p:cNvPr id="4" name="TextBox 3"/>
+          <p:cNvSpPr txBox="1"/>
+          <p:nvPr/>
+        </p:nvSpPr>
+        <p:spPr>
+          <a:xfrm>
+            <a:off x="822960" y="914400"/>
+            <a:ext cx="10607040" cy="1005840"/>
+          </a:xfrm>
+          <a:prstGeom prst="rect">
+            <a:avLst/>
+          </a:prstGeom>
+          <a:noFill/>
+        </p:spPr>
+        <p:txBody>
+          <a:bodyPr wrap="square" anchor="t">
+            <a:spAutoFit/>
+          </a:bodyPr>
+          <a:lstStyle/>
+          <a:p>
+            <a:pPr algn="l">
+              <a:spcAft>
+                <a:spcPts val="600"/>
+              </a:spcAft>
+            </a:pPr>
+            <a:r>
+              <a:rPr sz="3800" b="1">
+                <a:solidFill>
+                  <a:srgbClr val="6D2E46"/>
+                </a:solidFill>
+                <a:latin typeface="Calibri"/>
+              </a:rPr>
+              <a:t>¿Cómo hace la IA todo esto?</a:t>
+            </a:r>
+          </a:p>
+        </p:txBody>
+      </p:sp>
+      <p:sp>
+        <p:nvSpPr>
+          <p:cNvPr id="5" name="Rectangle 4"/>
+          <p:cNvSpPr/>
+          <p:nvPr/>
+        </p:nvSpPr>
+        <p:spPr>
+          <a:xfrm>
+            <a:off x="868680" y="1783080"/>
+            <a:ext cx="1554480" cy="64008"/>
+          </a:xfrm>
+          <a:prstGeom prst="rect">
+            <a:avLst/>
+          </a:prstGeom>
+          <a:solidFill>
+            <a:srgbClr val="E3B23C"/>
+          </a:solidFill>
+          <a:ln>
+            <a:noFill/>
+          </a:ln>
+          <a:effectLst/>
+        </p:spPr>
+        <p:style>
+          <a:lnRef idx="1">
+            <a:schemeClr val="accent1"/>
+          </a:lnRef>
+          <a:fillRef idx="3">
+            <a:schemeClr val="accent1"/>
+          </a:fillRef>
+          <a:effectRef idx="2">
+            <a:schemeClr val="accent1"/>
+          </a:effectRef>
+          <a:fontRef idx="minor">
+            <a:schemeClr val="lt1"/>
+          </a:fontRef>
+        </p:style>
+        <p:txBody>
+          <a:bodyPr rtlCol="0" anchor="ctr"/>
+          <a:lstStyle/>
+          <a:p>
+            <a:pPr algn="ctr"/>
+          </a:p>
+        </p:txBody>
+      </p:sp>
+      <p:sp>
+        <p:nvSpPr>
+          <p:cNvPr id="6" name="Rounded Rectangle 5"/>
+          <p:cNvSpPr/>
+          <p:nvPr/>
+        </p:nvSpPr>
+        <p:spPr>
+          <a:xfrm>
+            <a:off x="822960" y="3017520"/>
+            <a:ext cx="3200400" cy="1920240"/>
           </a:xfrm>
           <a:prstGeom prst="roundRect">
             <a:avLst/>
@@ -3468,16 +3639,115 @@
       </p:sp>
       <p:sp>
         <p:nvSpPr>
-          <p:cNvPr id="3" name="Rectangle 2"/>
+          <p:cNvPr id="7" name="Rectangle 6"/>
           <p:cNvSpPr/>
           <p:nvPr/>
         </p:nvSpPr>
         <p:spPr>
           <a:xfrm>
-            <a:off x="640080" y="640080"/>
-            <a:ext cx="201168" cy="5577840"/>
-          </a:xfrm>
-          <a:prstGeom prst="rect">
+            <a:off x="822960" y="3017520"/>
+            <a:ext cx="3200400" cy="128016"/>
+          </a:xfrm>
+          <a:prstGeom prst="rect">
+            <a:avLst/>
+          </a:prstGeom>
+          <a:solidFill>
+            <a:srgbClr val="6D2E46"/>
+          </a:solidFill>
+          <a:ln>
+            <a:noFill/>
+          </a:ln>
+          <a:effectLst/>
+        </p:spPr>
+        <p:style>
+          <a:lnRef idx="1">
+            <a:schemeClr val="accent1"/>
+          </a:lnRef>
+          <a:fillRef idx="3">
+            <a:schemeClr val="accent1"/>
+          </a:fillRef>
+          <a:effectRef idx="2">
+            <a:schemeClr val="accent1"/>
+          </a:effectRef>
+          <a:fontRef idx="minor">
+            <a:schemeClr val="lt1"/>
+          </a:fontRef>
+        </p:style>
+        <p:txBody>
+          <a:bodyPr rtlCol="0" anchor="ctr"/>
+          <a:lstStyle/>
+          <a:p>
+            <a:pPr algn="ctr"/>
+          </a:p>
+        </p:txBody>
+      </p:sp>
+      <p:sp>
+        <p:nvSpPr>
+          <p:cNvPr id="8" name="TextBox 7"/>
+          <p:cNvSpPr txBox="1"/>
+          <p:nvPr/>
+        </p:nvSpPr>
+        <p:spPr>
+          <a:xfrm>
+            <a:off x="960120" y="3474720"/>
+            <a:ext cx="2926080" cy="1280160"/>
+          </a:xfrm>
+          <a:prstGeom prst="rect">
+            <a:avLst/>
+          </a:prstGeom>
+          <a:noFill/>
+        </p:spPr>
+        <p:txBody>
+          <a:bodyPr wrap="square" anchor="ctr">
+            <a:spAutoFit/>
+          </a:bodyPr>
+          <a:lstStyle/>
+          <a:p>
+            <a:pPr algn="ctr">
+              <a:spcAft>
+                <a:spcPts val="600"/>
+              </a:spcAft>
+            </a:pPr>
+            <a:r>
+              <a:rPr sz="1900" b="1">
+                <a:solidFill>
+                  <a:srgbClr val="6D2E46"/>
+                </a:solidFill>
+                <a:latin typeface="Calibri"/>
+              </a:rPr>
+              <a:t>Prompt en español</a:t>
+            </a:r>
+          </a:p>
+          <a:p>
+            <a:pPr algn="ctr">
+              <a:spcAft>
+                <a:spcPts val="600"/>
+              </a:spcAft>
+            </a:pPr>
+            <a:r>
+              <a:rPr sz="1400" b="0">
+                <a:solidFill>
+                  <a:srgbClr val="6F645B"/>
+                </a:solidFill>
+                <a:latin typeface="Calibri"/>
+              </a:rPr>
+              <a:t>tu instrucción</a:t>
+            </a:r>
+          </a:p>
+        </p:txBody>
+      </p:sp>
+      <p:sp>
+        <p:nvSpPr>
+          <p:cNvPr id="9" name="Right Arrow 8"/>
+          <p:cNvSpPr/>
+          <p:nvPr/>
+        </p:nvSpPr>
+        <p:spPr>
+          <a:xfrm>
+            <a:off x="4078224" y="3776472"/>
+            <a:ext cx="393192" cy="402336"/>
+          </a:xfrm>
+          <a:prstGeom prst="rightArrow">
             <a:avLst/>
           </a:prstGeom>
           <a:solidFill>
@@ -3512,14 +3782,348 @@
       </p:sp>
       <p:sp>
         <p:nvSpPr>
-          <p:cNvPr id="4" name="TextBox 3"/>
+          <p:cNvPr id="10" name="Rounded Rectangle 9"/>
+          <p:cNvSpPr/>
+          <p:nvPr/>
+        </p:nvSpPr>
+        <p:spPr>
+          <a:xfrm>
+            <a:off x="4526280" y="3017520"/>
+            <a:ext cx="3200400" cy="1920240"/>
+          </a:xfrm>
+          <a:prstGeom prst="roundRect">
+            <a:avLst/>
+          </a:prstGeom>
+          <a:solidFill>
+            <a:srgbClr val="FFFFFF"/>
+          </a:solidFill>
+          <a:ln w="15240">
+            <a:solidFill>
+              <a:srgbClr val="EADDC8"/>
+            </a:solidFill>
+          </a:ln>
+          <a:effectLst/>
+        </p:spPr>
+        <p:style>
+          <a:lnRef idx="1">
+            <a:schemeClr val="accent1"/>
+          </a:lnRef>
+          <a:fillRef idx="3">
+            <a:schemeClr val="accent1"/>
+          </a:fillRef>
+          <a:effectRef idx="2">
+            <a:schemeClr val="accent1"/>
+          </a:effectRef>
+          <a:fontRef idx="minor">
+            <a:schemeClr val="lt1"/>
+          </a:fontRef>
+        </p:style>
+        <p:txBody>
+          <a:bodyPr rtlCol="0" anchor="ctr"/>
+          <a:lstStyle/>
+          <a:p>
+            <a:pPr algn="ctr"/>
+          </a:p>
+        </p:txBody>
+      </p:sp>
+      <p:sp>
+        <p:nvSpPr>
+          <p:cNvPr id="11" name="Rectangle 10"/>
+          <p:cNvSpPr/>
+          <p:nvPr/>
+        </p:nvSpPr>
+        <p:spPr>
+          <a:xfrm>
+            <a:off x="4526280" y="3017520"/>
+            <a:ext cx="3200400" cy="128016"/>
+          </a:xfrm>
+          <a:prstGeom prst="rect">
+            <a:avLst/>
+          </a:prstGeom>
+          <a:solidFill>
+            <a:srgbClr val="C84B31"/>
+          </a:solidFill>
+          <a:ln>
+            <a:noFill/>
+          </a:ln>
+          <a:effectLst/>
+        </p:spPr>
+        <p:style>
+          <a:lnRef idx="1">
+            <a:schemeClr val="accent1"/>
+          </a:lnRef>
+          <a:fillRef idx="3">
+            <a:schemeClr val="accent1"/>
+          </a:fillRef>
+          <a:effectRef idx="2">
+            <a:schemeClr val="accent1"/>
+          </a:effectRef>
+          <a:fontRef idx="minor">
+            <a:schemeClr val="lt1"/>
+          </a:fontRef>
+        </p:style>
+        <p:txBody>
+          <a:bodyPr rtlCol="0" anchor="ctr"/>
+          <a:lstStyle/>
+          <a:p>
+            <a:pPr algn="ctr"/>
+          </a:p>
+        </p:txBody>
+      </p:sp>
+      <p:sp>
+        <p:nvSpPr>
+          <p:cNvPr id="12" name="TextBox 11"/>
           <p:cNvSpPr txBox="1"/>
           <p:nvPr/>
         </p:nvSpPr>
         <p:spPr>
           <a:xfrm>
-            <a:off x="1051560" y="960120"/>
-            <a:ext cx="10058400" cy="457200"/>
+            <a:off x="4663440" y="3474720"/>
+            <a:ext cx="2926080" cy="1280160"/>
+          </a:xfrm>
+          <a:prstGeom prst="rect">
+            <a:avLst/>
+          </a:prstGeom>
+          <a:noFill/>
+        </p:spPr>
+        <p:txBody>
+          <a:bodyPr wrap="square" anchor="ctr">
+            <a:spAutoFit/>
+          </a:bodyPr>
+          <a:lstStyle/>
+          <a:p>
+            <a:pPr algn="ctr">
+              <a:spcAft>
+                <a:spcPts val="600"/>
+              </a:spcAft>
+            </a:pPr>
+            <a:r>
+              <a:rPr sz="1900" b="1">
+                <a:solidFill>
+                  <a:srgbClr val="6D2E46"/>
+                </a:solidFill>
+                <a:latin typeface="Calibri"/>
+              </a:rPr>
+              <a:t>La IA escribe el código</a:t>
+            </a:r>
+          </a:p>
+          <a:p>
+            <a:pPr algn="ctr">
+              <a:spcAft>
+                <a:spcPts val="600"/>
+              </a:spcAft>
+            </a:pPr>
+            <a:r>
+              <a:rPr sz="1400" b="0">
+                <a:solidFill>
+                  <a:srgbClr val="6F645B"/>
+                </a:solidFill>
+                <a:latin typeface="Calibri"/>
+              </a:rPr>
+              <a:t>interfaz + lógica + datos</a:t>
+            </a:r>
+          </a:p>
+        </p:txBody>
+      </p:sp>
+      <p:sp>
+        <p:nvSpPr>
+          <p:cNvPr id="13" name="Right Arrow 12"/>
+          <p:cNvSpPr/>
+          <p:nvPr/>
+        </p:nvSpPr>
+        <p:spPr>
+          <a:xfrm>
+            <a:off x="7781544" y="3776472"/>
+            <a:ext cx="393192" cy="402336"/>
+          </a:xfrm>
+          <a:prstGeom prst="rightArrow">
+            <a:avLst/>
+          </a:prstGeom>
+          <a:solidFill>
+            <a:srgbClr val="E3B23C"/>
+          </a:solidFill>
+          <a:ln>
+            <a:noFill/>
+          </a:ln>
+          <a:effectLst/>
+        </p:spPr>
+        <p:style>
+          <a:lnRef idx="1">
+            <a:schemeClr val="accent1"/>
+          </a:lnRef>
+          <a:fillRef idx="3">
+            <a:schemeClr val="accent1"/>
+          </a:fillRef>
+          <a:effectRef idx="2">
+            <a:schemeClr val="accent1"/>
+          </a:effectRef>
+          <a:fontRef idx="minor">
+            <a:schemeClr val="lt1"/>
+          </a:fontRef>
+        </p:style>
+        <p:txBody>
+          <a:bodyPr rtlCol="0" anchor="ctr"/>
+          <a:lstStyle/>
+          <a:p>
+            <a:pPr algn="ctr"/>
+          </a:p>
+        </p:txBody>
+      </p:sp>
+      <p:sp>
+        <p:nvSpPr>
+          <p:cNvPr id="14" name="Rounded Rectangle 13"/>
+          <p:cNvSpPr/>
+          <p:nvPr/>
+        </p:nvSpPr>
+        <p:spPr>
+          <a:xfrm>
+            <a:off x="8229600" y="3017520"/>
+            <a:ext cx="3200400" cy="1920240"/>
+          </a:xfrm>
+          <a:prstGeom prst="roundRect">
+            <a:avLst/>
+          </a:prstGeom>
+          <a:solidFill>
+            <a:srgbClr val="FFFFFF"/>
+          </a:solidFill>
+          <a:ln w="15240">
+            <a:solidFill>
+              <a:srgbClr val="EADDC8"/>
+            </a:solidFill>
+          </a:ln>
+          <a:effectLst/>
+        </p:spPr>
+        <p:style>
+          <a:lnRef idx="1">
+            <a:schemeClr val="accent1"/>
+          </a:lnRef>
+          <a:fillRef idx="3">
+            <a:schemeClr val="accent1"/>
+          </a:fillRef>
+          <a:effectRef idx="2">
+            <a:schemeClr val="accent1"/>
+          </a:effectRef>
+          <a:fontRef idx="minor">
+            <a:schemeClr val="lt1"/>
+          </a:fontRef>
+        </p:style>
+        <p:txBody>
+          <a:bodyPr rtlCol="0" anchor="ctr"/>
+          <a:lstStyle/>
+          <a:p>
+            <a:pPr algn="ctr"/>
+          </a:p>
+        </p:txBody>
+      </p:sp>
+      <p:sp>
+        <p:nvSpPr>
+          <p:cNvPr id="15" name="Rectangle 14"/>
+          <p:cNvSpPr/>
+          <p:nvPr/>
+        </p:nvSpPr>
+        <p:spPr>
+          <a:xfrm>
+            <a:off x="8229600" y="3017520"/>
+            <a:ext cx="3200400" cy="128016"/>
+          </a:xfrm>
+          <a:prstGeom prst="rect">
+            <a:avLst/>
+          </a:prstGeom>
+          <a:solidFill>
+            <a:srgbClr val="4F772D"/>
+          </a:solidFill>
+          <a:ln>
+            <a:noFill/>
+          </a:ln>
+          <a:effectLst/>
+        </p:spPr>
+        <p:style>
+          <a:lnRef idx="1">
+            <a:schemeClr val="accent1"/>
+          </a:lnRef>
+          <a:fillRef idx="3">
+            <a:schemeClr val="accent1"/>
+          </a:fillRef>
+          <a:effectRef idx="2">
+            <a:schemeClr val="accent1"/>
+          </a:effectRef>
+          <a:fontRef idx="minor">
+            <a:schemeClr val="lt1"/>
+          </a:fontRef>
+        </p:style>
+        <p:txBody>
+          <a:bodyPr rtlCol="0" anchor="ctr"/>
+          <a:lstStyle/>
+          <a:p>
+            <a:pPr algn="ctr"/>
+          </a:p>
+        </p:txBody>
+      </p:sp>
+      <p:sp>
+        <p:nvSpPr>
+          <p:cNvPr id="16" name="TextBox 15"/>
+          <p:cNvSpPr txBox="1"/>
+          <p:nvPr/>
+        </p:nvSpPr>
+        <p:spPr>
+          <a:xfrm>
+            <a:off x="8366760" y="3474720"/>
+            <a:ext cx="2926080" cy="1280160"/>
+          </a:xfrm>
+          <a:prstGeom prst="rect">
+            <a:avLst/>
+          </a:prstGeom>
+          <a:noFill/>
+        </p:spPr>
+        <p:txBody>
+          <a:bodyPr wrap="square" anchor="ctr">
+            <a:spAutoFit/>
+          </a:bodyPr>
+          <a:lstStyle/>
+          <a:p>
+            <a:pPr algn="ctr">
+              <a:spcAft>
+                <a:spcPts val="600"/>
+              </a:spcAft>
+            </a:pPr>
+            <a:r>
+              <a:rPr sz="1900" b="1">
+                <a:solidFill>
+                  <a:srgbClr val="6D2E46"/>
+                </a:solidFill>
+                <a:latin typeface="Calibri"/>
+              </a:rPr>
+              <a:t>Vista previa</a:t>
+            </a:r>
+          </a:p>
+          <a:p>
+            <a:pPr algn="ctr">
+              <a:spcAft>
+                <a:spcPts val="600"/>
+              </a:spcAft>
+            </a:pPr>
+            <a:r>
+              <a:rPr sz="1400" b="0">
+                <a:solidFill>
+                  <a:srgbClr val="6F645B"/>
+                </a:solidFill>
+                <a:latin typeface="Calibri"/>
+              </a:rPr>
+              <a:t>la app corriendo</a:t>
+            </a:r>
+          </a:p>
+        </p:txBody>
+      </p:sp>
+      <p:sp>
+        <p:nvSpPr>
+          <p:cNvPr id="17" name="TextBox 16"/>
+          <p:cNvSpPr txBox="1"/>
+          <p:nvPr/>
+        </p:nvSpPr>
+        <p:spPr>
+          <a:xfrm>
+            <a:off x="868680" y="5394960"/>
+            <a:ext cx="10424160" cy="731520"/>
           </a:xfrm>
           <a:prstGeom prst="rect">
             <a:avLst/>
@@ -3538,155 +4142,13 @@
               </a:spcAft>
             </a:pPr>
             <a:r>
-              <a:rPr sz="2000" b="1">
-                <a:solidFill>
-                  <a:srgbClr val="C84B31"/>
-                </a:solidFill>
-                <a:latin typeface="Calibri"/>
-              </a:rPr>
-              <a:t>LABORATORIO DE HOY</a:t>
-            </a:r>
-          </a:p>
-        </p:txBody>
-      </p:sp>
-      <p:sp>
-        <p:nvSpPr>
-          <p:cNvPr id="5" name="TextBox 4"/>
-          <p:cNvSpPr txBox="1"/>
-          <p:nvPr/>
-        </p:nvSpPr>
-        <p:spPr>
-          <a:xfrm>
-            <a:off x="1051560" y="1463040"/>
-            <a:ext cx="10058400" cy="914400"/>
-          </a:xfrm>
-          <a:prstGeom prst="rect">
-            <a:avLst/>
-          </a:prstGeom>
-          <a:noFill/>
-        </p:spPr>
-        <p:txBody>
-          <a:bodyPr wrap="square" anchor="t">
-            <a:spAutoFit/>
-          </a:bodyPr>
-          <a:lstStyle/>
-          <a:p>
-            <a:pPr algn="l">
-              <a:spcAft>
-                <a:spcPts val="600"/>
-              </a:spcAft>
-            </a:pPr>
-            <a:r>
-              <a:rPr sz="3400" b="1">
-                <a:solidFill>
-                  <a:srgbClr val="6D2E46"/>
-                </a:solidFill>
-                <a:latin typeface="Calibri"/>
-              </a:rPr>
-              <a:t>Laboratorio 1 — Tu primera app en AI Studio</a:t>
-            </a:r>
-          </a:p>
-        </p:txBody>
-      </p:sp>
-      <p:sp>
-        <p:nvSpPr>
-          <p:cNvPr id="6" name="TextBox 5"/>
-          <p:cNvSpPr txBox="1"/>
-          <p:nvPr/>
-        </p:nvSpPr>
-        <p:spPr>
-          <a:xfrm>
-            <a:off x="1097280" y="2606040"/>
-            <a:ext cx="9875520" cy="3383280"/>
-          </a:xfrm>
-          <a:prstGeom prst="rect">
-            <a:avLst/>
-          </a:prstGeom>
-          <a:noFill/>
-        </p:spPr>
-        <p:txBody>
-          <a:bodyPr wrap="square">
-            <a:spAutoFit/>
-          </a:bodyPr>
-          <a:lstStyle/>
-          <a:p>
-            <a:pPr>
-              <a:spcAft>
-                <a:spcPts val="1500"/>
-              </a:spcAft>
-            </a:pPr>
-            <a:r>
-              <a:rPr sz="2300">
+              <a:rPr sz="1700" b="0">
                 <a:solidFill>
                   <a:srgbClr val="2B2B2B"/>
                 </a:solidFill>
                 <a:latin typeface="Calibri"/>
               </a:rPr>
-              <a:t>•  Crea una app nueva en AI Studio (modo Build)</a:t>
-            </a:r>
-          </a:p>
-          <a:p>
-            <a:pPr>
-              <a:spcAft>
-                <a:spcPts val="1500"/>
-              </a:spcAft>
-            </a:pPr>
-            <a:r>
-              <a:rPr sz="2300">
-                <a:solidFill>
-                  <a:srgbClr val="2B2B2B"/>
-                </a:solidFill>
-                <a:latin typeface="Calibri"/>
-              </a:rPr>
-              <a:t>•  Pega el prompt inicial de "Ruta del Café"</a:t>
-            </a:r>
-          </a:p>
-          <a:p>
-            <a:pPr>
-              <a:spcAft>
-                <a:spcPts val="1500"/>
-              </a:spcAft>
-            </a:pPr>
-            <a:r>
-              <a:rPr sz="2300">
-                <a:solidFill>
-                  <a:srgbClr val="2B2B2B"/>
-                </a:solidFill>
-                <a:latin typeface="Calibri"/>
-              </a:rPr>
-              <a:t>•  Verifica el encabezado y las tarjetas de cafeterías</a:t>
-            </a:r>
-          </a:p>
-          <a:p>
-            <a:pPr>
-              <a:spcAft>
-                <a:spcPts val="1500"/>
-              </a:spcAft>
-            </a:pPr>
-            <a:r>
-              <a:rPr sz="2300">
-                <a:solidFill>
-                  <a:srgbClr val="2B2B2B"/>
-                </a:solidFill>
-                <a:latin typeface="Calibri"/>
-              </a:rPr>
-              <a:t>•  Crea un checkpoint y aplica el refinamiento de colores</a:t>
-            </a:r>
-          </a:p>
-          <a:p>
-            <a:pPr>
-              <a:spcAft>
-                <a:spcPts val="1500"/>
-              </a:spcAft>
-            </a:pPr>
-            <a:r>
-              <a:rPr sz="2300">
-                <a:solidFill>
-                  <a:srgbClr val="2B2B2B"/>
-                </a:solidFill>
-                <a:latin typeface="Calibri"/>
-              </a:rPr>
-              <a:t>•  Usa View diff para ver el cambio</a:t>
+              <a:t>Tú diriges con criterio de diseño; la IA es como un desarrollador junior muy rápido: ella escribe el código, tú decides qué se construye y cómo se ve.</a:t>
             </a:r>
           </a:p>
         </p:txBody>
@@ -3732,6 +4194,3262 @@
             <a:avLst/>
           </a:prstGeom>
           <a:solidFill>
+            <a:srgbClr val="4F772D"/>
+          </a:solidFill>
+          <a:ln>
+            <a:noFill/>
+          </a:ln>
+          <a:effectLst/>
+        </p:spPr>
+        <p:style>
+          <a:lnRef idx="1">
+            <a:schemeClr val="accent1"/>
+          </a:lnRef>
+          <a:fillRef idx="3">
+            <a:schemeClr val="accent1"/>
+          </a:fillRef>
+          <a:effectRef idx="2">
+            <a:schemeClr val="accent1"/>
+          </a:effectRef>
+          <a:fontRef idx="minor">
+            <a:schemeClr val="lt1"/>
+          </a:fontRef>
+        </p:style>
+        <p:txBody>
+          <a:bodyPr rtlCol="0" anchor="ctr"/>
+          <a:lstStyle/>
+          <a:p>
+            <a:pPr algn="ctr"/>
+          </a:p>
+        </p:txBody>
+      </p:sp>
+      <p:sp>
+        <p:nvSpPr>
+          <p:cNvPr id="3" name="TextBox 2"/>
+          <p:cNvSpPr txBox="1"/>
+          <p:nvPr/>
+        </p:nvSpPr>
+        <p:spPr>
+          <a:xfrm>
+            <a:off x="822960" y="457200"/>
+            <a:ext cx="10515600" cy="457200"/>
+          </a:xfrm>
+          <a:prstGeom prst="rect">
+            <a:avLst/>
+          </a:prstGeom>
+          <a:noFill/>
+        </p:spPr>
+        <p:txBody>
+          <a:bodyPr wrap="square" anchor="t">
+            <a:spAutoFit/>
+          </a:bodyPr>
+          <a:lstStyle/>
+          <a:p>
+            <a:pPr algn="l">
+              <a:spcAft>
+                <a:spcPts val="600"/>
+              </a:spcAft>
+            </a:pPr>
+            <a:r>
+              <a:rPr sz="1800" b="1">
+                <a:solidFill>
+                  <a:srgbClr val="C84B31"/>
+                </a:solidFill>
+                <a:latin typeface="Calibri"/>
+              </a:rPr>
+              <a:t>FLUJO DE TRABAJO</a:t>
+            </a:r>
+          </a:p>
+        </p:txBody>
+      </p:sp>
+      <p:sp>
+        <p:nvSpPr>
+          <p:cNvPr id="4" name="TextBox 3"/>
+          <p:cNvSpPr txBox="1"/>
+          <p:nvPr/>
+        </p:nvSpPr>
+        <p:spPr>
+          <a:xfrm>
+            <a:off x="822960" y="914400"/>
+            <a:ext cx="10607040" cy="1005840"/>
+          </a:xfrm>
+          <a:prstGeom prst="rect">
+            <a:avLst/>
+          </a:prstGeom>
+          <a:noFill/>
+        </p:spPr>
+        <p:txBody>
+          <a:bodyPr wrap="square" anchor="t">
+            <a:spAutoFit/>
+          </a:bodyPr>
+          <a:lstStyle/>
+          <a:p>
+            <a:pPr algn="l">
+              <a:spcAft>
+                <a:spcPts val="600"/>
+              </a:spcAft>
+            </a:pPr>
+            <a:r>
+              <a:rPr sz="3800" b="1">
+                <a:solidFill>
+                  <a:srgbClr val="6D2E46"/>
+                </a:solidFill>
+                <a:latin typeface="Calibri"/>
+              </a:rPr>
+              <a:t>Cómo se dirige a la IA</a:t>
+            </a:r>
+          </a:p>
+        </p:txBody>
+      </p:sp>
+      <p:sp>
+        <p:nvSpPr>
+          <p:cNvPr id="5" name="Rectangle 4"/>
+          <p:cNvSpPr/>
+          <p:nvPr/>
+        </p:nvSpPr>
+        <p:spPr>
+          <a:xfrm>
+            <a:off x="868680" y="1783080"/>
+            <a:ext cx="1554480" cy="64008"/>
+          </a:xfrm>
+          <a:prstGeom prst="rect">
+            <a:avLst/>
+          </a:prstGeom>
+          <a:solidFill>
+            <a:srgbClr val="E3B23C"/>
+          </a:solidFill>
+          <a:ln>
+            <a:noFill/>
+          </a:ln>
+          <a:effectLst/>
+        </p:spPr>
+        <p:style>
+          <a:lnRef idx="1">
+            <a:schemeClr val="accent1"/>
+          </a:lnRef>
+          <a:fillRef idx="3">
+            <a:schemeClr val="accent1"/>
+          </a:fillRef>
+          <a:effectRef idx="2">
+            <a:schemeClr val="accent1"/>
+          </a:effectRef>
+          <a:fontRef idx="minor">
+            <a:schemeClr val="lt1"/>
+          </a:fontRef>
+        </p:style>
+        <p:txBody>
+          <a:bodyPr rtlCol="0" anchor="ctr"/>
+          <a:lstStyle/>
+          <a:p>
+            <a:pPr algn="ctr"/>
+          </a:p>
+        </p:txBody>
+      </p:sp>
+      <p:sp>
+        <p:nvSpPr>
+          <p:cNvPr id="6" name="Rounded Rectangle 5"/>
+          <p:cNvSpPr/>
+          <p:nvPr/>
+        </p:nvSpPr>
+        <p:spPr>
+          <a:xfrm>
+            <a:off x="822960" y="3017520"/>
+            <a:ext cx="2274570" cy="1920240"/>
+          </a:xfrm>
+          <a:prstGeom prst="roundRect">
+            <a:avLst/>
+          </a:prstGeom>
+          <a:solidFill>
+            <a:srgbClr val="FFFFFF"/>
+          </a:solidFill>
+          <a:ln w="15240">
+            <a:solidFill>
+              <a:srgbClr val="EADDC8"/>
+            </a:solidFill>
+          </a:ln>
+          <a:effectLst/>
+        </p:spPr>
+        <p:style>
+          <a:lnRef idx="1">
+            <a:schemeClr val="accent1"/>
+          </a:lnRef>
+          <a:fillRef idx="3">
+            <a:schemeClr val="accent1"/>
+          </a:fillRef>
+          <a:effectRef idx="2">
+            <a:schemeClr val="accent1"/>
+          </a:effectRef>
+          <a:fontRef idx="minor">
+            <a:schemeClr val="lt1"/>
+          </a:fontRef>
+        </p:style>
+        <p:txBody>
+          <a:bodyPr rtlCol="0" anchor="ctr"/>
+          <a:lstStyle/>
+          <a:p>
+            <a:pPr algn="ctr"/>
+          </a:p>
+        </p:txBody>
+      </p:sp>
+      <p:sp>
+        <p:nvSpPr>
+          <p:cNvPr id="7" name="Rectangle 6"/>
+          <p:cNvSpPr/>
+          <p:nvPr/>
+        </p:nvSpPr>
+        <p:spPr>
+          <a:xfrm>
+            <a:off x="822960" y="3017520"/>
+            <a:ext cx="2274570" cy="128016"/>
+          </a:xfrm>
+          <a:prstGeom prst="rect">
+            <a:avLst/>
+          </a:prstGeom>
+          <a:solidFill>
+            <a:srgbClr val="6D2E46"/>
+          </a:solidFill>
+          <a:ln>
+            <a:noFill/>
+          </a:ln>
+          <a:effectLst/>
+        </p:spPr>
+        <p:style>
+          <a:lnRef idx="1">
+            <a:schemeClr val="accent1"/>
+          </a:lnRef>
+          <a:fillRef idx="3">
+            <a:schemeClr val="accent1"/>
+          </a:fillRef>
+          <a:effectRef idx="2">
+            <a:schemeClr val="accent1"/>
+          </a:effectRef>
+          <a:fontRef idx="minor">
+            <a:schemeClr val="lt1"/>
+          </a:fontRef>
+        </p:style>
+        <p:txBody>
+          <a:bodyPr rtlCol="0" anchor="ctr"/>
+          <a:lstStyle/>
+          <a:p>
+            <a:pPr algn="ctr"/>
+          </a:p>
+        </p:txBody>
+      </p:sp>
+      <p:sp>
+        <p:nvSpPr>
+          <p:cNvPr id="8" name="TextBox 7"/>
+          <p:cNvSpPr txBox="1"/>
+          <p:nvPr/>
+        </p:nvSpPr>
+        <p:spPr>
+          <a:xfrm>
+            <a:off x="960120" y="3474720"/>
+            <a:ext cx="2000250" cy="1280160"/>
+          </a:xfrm>
+          <a:prstGeom prst="rect">
+            <a:avLst/>
+          </a:prstGeom>
+          <a:noFill/>
+        </p:spPr>
+        <p:txBody>
+          <a:bodyPr wrap="square" anchor="ctr">
+            <a:spAutoFit/>
+          </a:bodyPr>
+          <a:lstStyle/>
+          <a:p>
+            <a:pPr algn="ctr">
+              <a:spcAft>
+                <a:spcPts val="600"/>
+              </a:spcAft>
+            </a:pPr>
+            <a:r>
+              <a:rPr sz="1900" b="1">
+                <a:solidFill>
+                  <a:srgbClr val="6D2E46"/>
+                </a:solidFill>
+                <a:latin typeface="Calibri"/>
+              </a:rPr>
+              <a:t>Prompt inicial</a:t>
+            </a:r>
+          </a:p>
+          <a:p>
+            <a:pPr algn="ctr">
+              <a:spcAft>
+                <a:spcPts val="600"/>
+              </a:spcAft>
+            </a:pPr>
+            <a:r>
+              <a:rPr sz="1400" b="0">
+                <a:solidFill>
+                  <a:srgbClr val="6F645B"/>
+                </a:solidFill>
+                <a:latin typeface="Calibri"/>
+              </a:rPr>
+              <a:t>detallado</a:t>
+            </a:r>
+          </a:p>
+        </p:txBody>
+      </p:sp>
+      <p:sp>
+        <p:nvSpPr>
+          <p:cNvPr id="9" name="Right Arrow 8"/>
+          <p:cNvSpPr/>
+          <p:nvPr/>
+        </p:nvSpPr>
+        <p:spPr>
+          <a:xfrm>
+            <a:off x="3152394" y="3776472"/>
+            <a:ext cx="393192" cy="402336"/>
+          </a:xfrm>
+          <a:prstGeom prst="rightArrow">
+            <a:avLst/>
+          </a:prstGeom>
+          <a:solidFill>
+            <a:srgbClr val="E3B23C"/>
+          </a:solidFill>
+          <a:ln>
+            <a:noFill/>
+          </a:ln>
+          <a:effectLst/>
+        </p:spPr>
+        <p:style>
+          <a:lnRef idx="1">
+            <a:schemeClr val="accent1"/>
+          </a:lnRef>
+          <a:fillRef idx="3">
+            <a:schemeClr val="accent1"/>
+          </a:fillRef>
+          <a:effectRef idx="2">
+            <a:schemeClr val="accent1"/>
+          </a:effectRef>
+          <a:fontRef idx="minor">
+            <a:schemeClr val="lt1"/>
+          </a:fontRef>
+        </p:style>
+        <p:txBody>
+          <a:bodyPr rtlCol="0" anchor="ctr"/>
+          <a:lstStyle/>
+          <a:p>
+            <a:pPr algn="ctr"/>
+          </a:p>
+        </p:txBody>
+      </p:sp>
+      <p:sp>
+        <p:nvSpPr>
+          <p:cNvPr id="10" name="Rounded Rectangle 9"/>
+          <p:cNvSpPr/>
+          <p:nvPr/>
+        </p:nvSpPr>
+        <p:spPr>
+          <a:xfrm>
+            <a:off x="3600450" y="3017520"/>
+            <a:ext cx="2274570" cy="1920240"/>
+          </a:xfrm>
+          <a:prstGeom prst="roundRect">
+            <a:avLst/>
+          </a:prstGeom>
+          <a:solidFill>
+            <a:srgbClr val="FFFFFF"/>
+          </a:solidFill>
+          <a:ln w="15240">
+            <a:solidFill>
+              <a:srgbClr val="EADDC8"/>
+            </a:solidFill>
+          </a:ln>
+          <a:effectLst/>
+        </p:spPr>
+        <p:style>
+          <a:lnRef idx="1">
+            <a:schemeClr val="accent1"/>
+          </a:lnRef>
+          <a:fillRef idx="3">
+            <a:schemeClr val="accent1"/>
+          </a:fillRef>
+          <a:effectRef idx="2">
+            <a:schemeClr val="accent1"/>
+          </a:effectRef>
+          <a:fontRef idx="minor">
+            <a:schemeClr val="lt1"/>
+          </a:fontRef>
+        </p:style>
+        <p:txBody>
+          <a:bodyPr rtlCol="0" anchor="ctr"/>
+          <a:lstStyle/>
+          <a:p>
+            <a:pPr algn="ctr"/>
+          </a:p>
+        </p:txBody>
+      </p:sp>
+      <p:sp>
+        <p:nvSpPr>
+          <p:cNvPr id="11" name="Rectangle 10"/>
+          <p:cNvSpPr/>
+          <p:nvPr/>
+        </p:nvSpPr>
+        <p:spPr>
+          <a:xfrm>
+            <a:off x="3600450" y="3017520"/>
+            <a:ext cx="2274570" cy="128016"/>
+          </a:xfrm>
+          <a:prstGeom prst="rect">
+            <a:avLst/>
+          </a:prstGeom>
+          <a:solidFill>
+            <a:srgbClr val="C84B31"/>
+          </a:solidFill>
+          <a:ln>
+            <a:noFill/>
+          </a:ln>
+          <a:effectLst/>
+        </p:spPr>
+        <p:style>
+          <a:lnRef idx="1">
+            <a:schemeClr val="accent1"/>
+          </a:lnRef>
+          <a:fillRef idx="3">
+            <a:schemeClr val="accent1"/>
+          </a:fillRef>
+          <a:effectRef idx="2">
+            <a:schemeClr val="accent1"/>
+          </a:effectRef>
+          <a:fontRef idx="minor">
+            <a:schemeClr val="lt1"/>
+          </a:fontRef>
+        </p:style>
+        <p:txBody>
+          <a:bodyPr rtlCol="0" anchor="ctr"/>
+          <a:lstStyle/>
+          <a:p>
+            <a:pPr algn="ctr"/>
+          </a:p>
+        </p:txBody>
+      </p:sp>
+      <p:sp>
+        <p:nvSpPr>
+          <p:cNvPr id="12" name="TextBox 11"/>
+          <p:cNvSpPr txBox="1"/>
+          <p:nvPr/>
+        </p:nvSpPr>
+        <p:spPr>
+          <a:xfrm>
+            <a:off x="3737610" y="3474720"/>
+            <a:ext cx="2000250" cy="1280160"/>
+          </a:xfrm>
+          <a:prstGeom prst="rect">
+            <a:avLst/>
+          </a:prstGeom>
+          <a:noFill/>
+        </p:spPr>
+        <p:txBody>
+          <a:bodyPr wrap="square" anchor="ctr">
+            <a:spAutoFit/>
+          </a:bodyPr>
+          <a:lstStyle/>
+          <a:p>
+            <a:pPr algn="ctr">
+              <a:spcAft>
+                <a:spcPts val="600"/>
+              </a:spcAft>
+            </a:pPr>
+            <a:r>
+              <a:rPr sz="1900" b="1">
+                <a:solidFill>
+                  <a:srgbClr val="6D2E46"/>
+                </a:solidFill>
+                <a:latin typeface="Calibri"/>
+              </a:rPr>
+              <a:t>Vista previa</a:t>
+            </a:r>
+          </a:p>
+          <a:p>
+            <a:pPr algn="ctr">
+              <a:spcAft>
+                <a:spcPts val="600"/>
+              </a:spcAft>
+            </a:pPr>
+            <a:r>
+              <a:rPr sz="1400" b="0">
+                <a:solidFill>
+                  <a:srgbClr val="6F645B"/>
+                </a:solidFill>
+                <a:latin typeface="Calibri"/>
+              </a:rPr>
+              <a:t>revisar</a:t>
+            </a:r>
+          </a:p>
+        </p:txBody>
+      </p:sp>
+      <p:sp>
+        <p:nvSpPr>
+          <p:cNvPr id="13" name="Right Arrow 12"/>
+          <p:cNvSpPr/>
+          <p:nvPr/>
+        </p:nvSpPr>
+        <p:spPr>
+          <a:xfrm>
+            <a:off x="5929884" y="3776472"/>
+            <a:ext cx="393192" cy="402336"/>
+          </a:xfrm>
+          <a:prstGeom prst="rightArrow">
+            <a:avLst/>
+          </a:prstGeom>
+          <a:solidFill>
+            <a:srgbClr val="E3B23C"/>
+          </a:solidFill>
+          <a:ln>
+            <a:noFill/>
+          </a:ln>
+          <a:effectLst/>
+        </p:spPr>
+        <p:style>
+          <a:lnRef idx="1">
+            <a:schemeClr val="accent1"/>
+          </a:lnRef>
+          <a:fillRef idx="3">
+            <a:schemeClr val="accent1"/>
+          </a:fillRef>
+          <a:effectRef idx="2">
+            <a:schemeClr val="accent1"/>
+          </a:effectRef>
+          <a:fontRef idx="minor">
+            <a:schemeClr val="lt1"/>
+          </a:fontRef>
+        </p:style>
+        <p:txBody>
+          <a:bodyPr rtlCol="0" anchor="ctr"/>
+          <a:lstStyle/>
+          <a:p>
+            <a:pPr algn="ctr"/>
+          </a:p>
+        </p:txBody>
+      </p:sp>
+      <p:sp>
+        <p:nvSpPr>
+          <p:cNvPr id="14" name="Rounded Rectangle 13"/>
+          <p:cNvSpPr/>
+          <p:nvPr/>
+        </p:nvSpPr>
+        <p:spPr>
+          <a:xfrm>
+            <a:off x="6377940" y="3017520"/>
+            <a:ext cx="2274570" cy="1920240"/>
+          </a:xfrm>
+          <a:prstGeom prst="roundRect">
+            <a:avLst/>
+          </a:prstGeom>
+          <a:solidFill>
+            <a:srgbClr val="FFFFFF"/>
+          </a:solidFill>
+          <a:ln w="15240">
+            <a:solidFill>
+              <a:srgbClr val="EADDC8"/>
+            </a:solidFill>
+          </a:ln>
+          <a:effectLst/>
+        </p:spPr>
+        <p:style>
+          <a:lnRef idx="1">
+            <a:schemeClr val="accent1"/>
+          </a:lnRef>
+          <a:fillRef idx="3">
+            <a:schemeClr val="accent1"/>
+          </a:fillRef>
+          <a:effectRef idx="2">
+            <a:schemeClr val="accent1"/>
+          </a:effectRef>
+          <a:fontRef idx="minor">
+            <a:schemeClr val="lt1"/>
+          </a:fontRef>
+        </p:style>
+        <p:txBody>
+          <a:bodyPr rtlCol="0" anchor="ctr"/>
+          <a:lstStyle/>
+          <a:p>
+            <a:pPr algn="ctr"/>
+          </a:p>
+        </p:txBody>
+      </p:sp>
+      <p:sp>
+        <p:nvSpPr>
+          <p:cNvPr id="15" name="Rectangle 14"/>
+          <p:cNvSpPr/>
+          <p:nvPr/>
+        </p:nvSpPr>
+        <p:spPr>
+          <a:xfrm>
+            <a:off x="6377940" y="3017520"/>
+            <a:ext cx="2274570" cy="128016"/>
+          </a:xfrm>
+          <a:prstGeom prst="rect">
+            <a:avLst/>
+          </a:prstGeom>
+          <a:solidFill>
+            <a:srgbClr val="4F772D"/>
+          </a:solidFill>
+          <a:ln>
+            <a:noFill/>
+          </a:ln>
+          <a:effectLst/>
+        </p:spPr>
+        <p:style>
+          <a:lnRef idx="1">
+            <a:schemeClr val="accent1"/>
+          </a:lnRef>
+          <a:fillRef idx="3">
+            <a:schemeClr val="accent1"/>
+          </a:fillRef>
+          <a:effectRef idx="2">
+            <a:schemeClr val="accent1"/>
+          </a:effectRef>
+          <a:fontRef idx="minor">
+            <a:schemeClr val="lt1"/>
+          </a:fontRef>
+        </p:style>
+        <p:txBody>
+          <a:bodyPr rtlCol="0" anchor="ctr"/>
+          <a:lstStyle/>
+          <a:p>
+            <a:pPr algn="ctr"/>
+          </a:p>
+        </p:txBody>
+      </p:sp>
+      <p:sp>
+        <p:nvSpPr>
+          <p:cNvPr id="16" name="TextBox 15"/>
+          <p:cNvSpPr txBox="1"/>
+          <p:nvPr/>
+        </p:nvSpPr>
+        <p:spPr>
+          <a:xfrm>
+            <a:off x="6515100" y="3474720"/>
+            <a:ext cx="2000250" cy="1280160"/>
+          </a:xfrm>
+          <a:prstGeom prst="rect">
+            <a:avLst/>
+          </a:prstGeom>
+          <a:noFill/>
+        </p:spPr>
+        <p:txBody>
+          <a:bodyPr wrap="square" anchor="ctr">
+            <a:spAutoFit/>
+          </a:bodyPr>
+          <a:lstStyle/>
+          <a:p>
+            <a:pPr algn="ctr">
+              <a:spcAft>
+                <a:spcPts val="600"/>
+              </a:spcAft>
+            </a:pPr>
+            <a:r>
+              <a:rPr sz="1900" b="1">
+                <a:solidFill>
+                  <a:srgbClr val="6D2E46"/>
+                </a:solidFill>
+                <a:latin typeface="Calibri"/>
+              </a:rPr>
+              <a:t>Refinar</a:t>
+            </a:r>
+          </a:p>
+          <a:p>
+            <a:pPr algn="ctr">
+              <a:spcAft>
+                <a:spcPts val="600"/>
+              </a:spcAft>
+            </a:pPr>
+            <a:r>
+              <a:rPr sz="1400" b="0">
+                <a:solidFill>
+                  <a:srgbClr val="6F645B"/>
+                </a:solidFill>
+                <a:latin typeface="Calibri"/>
+              </a:rPr>
+              <a:t>un cambio</a:t>
+            </a:r>
+          </a:p>
+        </p:txBody>
+      </p:sp>
+      <p:sp>
+        <p:nvSpPr>
+          <p:cNvPr id="17" name="Right Arrow 16"/>
+          <p:cNvSpPr/>
+          <p:nvPr/>
+        </p:nvSpPr>
+        <p:spPr>
+          <a:xfrm>
+            <a:off x="8707374" y="3776472"/>
+            <a:ext cx="393192" cy="402336"/>
+          </a:xfrm>
+          <a:prstGeom prst="rightArrow">
+            <a:avLst/>
+          </a:prstGeom>
+          <a:solidFill>
+            <a:srgbClr val="E3B23C"/>
+          </a:solidFill>
+          <a:ln>
+            <a:noFill/>
+          </a:ln>
+          <a:effectLst/>
+        </p:spPr>
+        <p:style>
+          <a:lnRef idx="1">
+            <a:schemeClr val="accent1"/>
+          </a:lnRef>
+          <a:fillRef idx="3">
+            <a:schemeClr val="accent1"/>
+          </a:fillRef>
+          <a:effectRef idx="2">
+            <a:schemeClr val="accent1"/>
+          </a:effectRef>
+          <a:fontRef idx="minor">
+            <a:schemeClr val="lt1"/>
+          </a:fontRef>
+        </p:style>
+        <p:txBody>
+          <a:bodyPr rtlCol="0" anchor="ctr"/>
+          <a:lstStyle/>
+          <a:p>
+            <a:pPr algn="ctr"/>
+          </a:p>
+        </p:txBody>
+      </p:sp>
+      <p:sp>
+        <p:nvSpPr>
+          <p:cNvPr id="18" name="Rounded Rectangle 17"/>
+          <p:cNvSpPr/>
+          <p:nvPr/>
+        </p:nvSpPr>
+        <p:spPr>
+          <a:xfrm>
+            <a:off x="9155430" y="3017520"/>
+            <a:ext cx="2274570" cy="1920240"/>
+          </a:xfrm>
+          <a:prstGeom prst="roundRect">
+            <a:avLst/>
+          </a:prstGeom>
+          <a:solidFill>
+            <a:srgbClr val="FFFFFF"/>
+          </a:solidFill>
+          <a:ln w="15240">
+            <a:solidFill>
+              <a:srgbClr val="EADDC8"/>
+            </a:solidFill>
+          </a:ln>
+          <a:effectLst/>
+        </p:spPr>
+        <p:style>
+          <a:lnRef idx="1">
+            <a:schemeClr val="accent1"/>
+          </a:lnRef>
+          <a:fillRef idx="3">
+            <a:schemeClr val="accent1"/>
+          </a:fillRef>
+          <a:effectRef idx="2">
+            <a:schemeClr val="accent1"/>
+          </a:effectRef>
+          <a:fontRef idx="minor">
+            <a:schemeClr val="lt1"/>
+          </a:fontRef>
+        </p:style>
+        <p:txBody>
+          <a:bodyPr rtlCol="0" anchor="ctr"/>
+          <a:lstStyle/>
+          <a:p>
+            <a:pPr algn="ctr"/>
+          </a:p>
+        </p:txBody>
+      </p:sp>
+      <p:sp>
+        <p:nvSpPr>
+          <p:cNvPr id="19" name="Rectangle 18"/>
+          <p:cNvSpPr/>
+          <p:nvPr/>
+        </p:nvSpPr>
+        <p:spPr>
+          <a:xfrm>
+            <a:off x="9155430" y="3017520"/>
+            <a:ext cx="2274570" cy="128016"/>
+          </a:xfrm>
+          <a:prstGeom prst="rect">
+            <a:avLst/>
+          </a:prstGeom>
+          <a:solidFill>
+            <a:srgbClr val="3A6B7E"/>
+          </a:solidFill>
+          <a:ln>
+            <a:noFill/>
+          </a:ln>
+          <a:effectLst/>
+        </p:spPr>
+        <p:style>
+          <a:lnRef idx="1">
+            <a:schemeClr val="accent1"/>
+          </a:lnRef>
+          <a:fillRef idx="3">
+            <a:schemeClr val="accent1"/>
+          </a:fillRef>
+          <a:effectRef idx="2">
+            <a:schemeClr val="accent1"/>
+          </a:effectRef>
+          <a:fontRef idx="minor">
+            <a:schemeClr val="lt1"/>
+          </a:fontRef>
+        </p:style>
+        <p:txBody>
+          <a:bodyPr rtlCol="0" anchor="ctr"/>
+          <a:lstStyle/>
+          <a:p>
+            <a:pPr algn="ctr"/>
+          </a:p>
+        </p:txBody>
+      </p:sp>
+      <p:sp>
+        <p:nvSpPr>
+          <p:cNvPr id="20" name="TextBox 19"/>
+          <p:cNvSpPr txBox="1"/>
+          <p:nvPr/>
+        </p:nvSpPr>
+        <p:spPr>
+          <a:xfrm>
+            <a:off x="9292590" y="3474720"/>
+            <a:ext cx="2000250" cy="1280160"/>
+          </a:xfrm>
+          <a:prstGeom prst="rect">
+            <a:avLst/>
+          </a:prstGeom>
+          <a:noFill/>
+        </p:spPr>
+        <p:txBody>
+          <a:bodyPr wrap="square" anchor="ctr">
+            <a:spAutoFit/>
+          </a:bodyPr>
+          <a:lstStyle/>
+          <a:p>
+            <a:pPr algn="ctr">
+              <a:spcAft>
+                <a:spcPts val="600"/>
+              </a:spcAft>
+            </a:pPr>
+            <a:r>
+              <a:rPr sz="1900" b="1">
+                <a:solidFill>
+                  <a:srgbClr val="6D2E46"/>
+                </a:solidFill>
+                <a:latin typeface="Calibri"/>
+              </a:rPr>
+              <a:t>Checkpoint</a:t>
+            </a:r>
+          </a:p>
+          <a:p>
+            <a:pPr algn="ctr">
+              <a:spcAft>
+                <a:spcPts val="600"/>
+              </a:spcAft>
+            </a:pPr>
+            <a:r>
+              <a:rPr sz="1400" b="0">
+                <a:solidFill>
+                  <a:srgbClr val="6F645B"/>
+                </a:solidFill>
+                <a:latin typeface="Calibri"/>
+              </a:rPr>
+              <a:t>guardar</a:t>
+            </a:r>
+          </a:p>
+        </p:txBody>
+      </p:sp>
+      <p:sp>
+        <p:nvSpPr>
+          <p:cNvPr id="21" name="TextBox 20"/>
+          <p:cNvSpPr txBox="1"/>
+          <p:nvPr/>
+        </p:nvSpPr>
+        <p:spPr>
+          <a:xfrm>
+            <a:off x="868680" y="5394960"/>
+            <a:ext cx="10424160" cy="731520"/>
+          </a:xfrm>
+          <a:prstGeom prst="rect">
+            <a:avLst/>
+          </a:prstGeom>
+          <a:noFill/>
+        </p:spPr>
+        <p:txBody>
+          <a:bodyPr wrap="square" anchor="t">
+            <a:spAutoFit/>
+          </a:bodyPr>
+          <a:lstStyle/>
+          <a:p>
+            <a:pPr algn="l">
+              <a:spcAft>
+                <a:spcPts val="600"/>
+              </a:spcAft>
+            </a:pPr>
+            <a:r>
+              <a:rPr sz="1700" b="0">
+                <a:solidFill>
+                  <a:srgbClr val="2B2B2B"/>
+                </a:solidFill>
+                <a:latin typeface="Calibri"/>
+              </a:rPr>
+              <a:t>Es un ciclo: revisas la vista previa, pides un cambio a la vez y guardas checkpoints. View diff te muestra qué cambió; regla de los 2 strikes si algo se atora.</a:t>
+            </a:r>
+          </a:p>
+        </p:txBody>
+      </p:sp>
+    </p:spTree>
+  </p:cSld>
+  <p:clrMapOvr>
+    <a:masterClrMapping/>
+  </p:clrMapOvr>
+</p:sld>
+</file>
+
+<file path=ppt/slides/slide12.xml><?xml version="1.0" encoding="utf-8"?>
+<p:sld xmlns:a="http://schemas.openxmlformats.org/drawingml/2006/main" xmlns:p="http://schemas.openxmlformats.org/presentationml/2006/main" xmlns:r="http://schemas.openxmlformats.org/officeDocument/2006/relationships">
+  <p:cSld>
+    <p:bg>
+      <p:bgPr>
+        <a:solidFill>
+          <a:srgbClr val="FDF6EC"/>
+        </a:solidFill>
+        <a:effectLst/>
+      </p:bgPr>
+    </p:bg>
+    <p:spTree>
+      <p:nvGrpSpPr>
+        <p:cNvPr id="1" name=""/>
+        <p:cNvGrpSpPr/>
+        <p:nvPr/>
+      </p:nvGrpSpPr>
+      <p:grpSpPr/>
+      <p:sp>
+        <p:nvSpPr>
+          <p:cNvPr id="2" name="Rectangle 1"/>
+          <p:cNvSpPr/>
+          <p:nvPr/>
+        </p:nvSpPr>
+        <p:spPr>
+          <a:xfrm>
+            <a:off x="0" y="0"/>
+            <a:ext cx="12191695" cy="146304"/>
+          </a:xfrm>
+          <a:prstGeom prst="rect">
+            <a:avLst/>
+          </a:prstGeom>
+          <a:solidFill>
+            <a:srgbClr val="3A6B7E"/>
+          </a:solidFill>
+          <a:ln>
+            <a:noFill/>
+          </a:ln>
+          <a:effectLst/>
+        </p:spPr>
+        <p:style>
+          <a:lnRef idx="1">
+            <a:schemeClr val="accent1"/>
+          </a:lnRef>
+          <a:fillRef idx="3">
+            <a:schemeClr val="accent1"/>
+          </a:fillRef>
+          <a:effectRef idx="2">
+            <a:schemeClr val="accent1"/>
+          </a:effectRef>
+          <a:fontRef idx="minor">
+            <a:schemeClr val="lt1"/>
+          </a:fontRef>
+        </p:style>
+        <p:txBody>
+          <a:bodyPr rtlCol="0" anchor="ctr"/>
+          <a:lstStyle/>
+          <a:p>
+            <a:pPr algn="ctr"/>
+          </a:p>
+        </p:txBody>
+      </p:sp>
+      <p:sp>
+        <p:nvSpPr>
+          <p:cNvPr id="3" name="TextBox 2"/>
+          <p:cNvSpPr txBox="1"/>
+          <p:nvPr/>
+        </p:nvSpPr>
+        <p:spPr>
+          <a:xfrm>
+            <a:off x="822960" y="457200"/>
+            <a:ext cx="10515600" cy="457200"/>
+          </a:xfrm>
+          <a:prstGeom prst="rect">
+            <a:avLst/>
+          </a:prstGeom>
+          <a:noFill/>
+        </p:spPr>
+        <p:txBody>
+          <a:bodyPr wrap="square" anchor="t">
+            <a:spAutoFit/>
+          </a:bodyPr>
+          <a:lstStyle/>
+          <a:p>
+            <a:pPr algn="l">
+              <a:spcAft>
+                <a:spcPts val="600"/>
+              </a:spcAft>
+            </a:pPr>
+            <a:r>
+              <a:rPr sz="1800" b="1">
+                <a:solidFill>
+                  <a:srgbClr val="C84B31"/>
+                </a:solidFill>
+                <a:latin typeface="Calibri"/>
+              </a:rPr>
+              <a:t>LOS DATOS</a:t>
+            </a:r>
+          </a:p>
+        </p:txBody>
+      </p:sp>
+      <p:sp>
+        <p:nvSpPr>
+          <p:cNvPr id="4" name="TextBox 3"/>
+          <p:cNvSpPr txBox="1"/>
+          <p:nvPr/>
+        </p:nvSpPr>
+        <p:spPr>
+          <a:xfrm>
+            <a:off x="822960" y="914400"/>
+            <a:ext cx="10607040" cy="1005840"/>
+          </a:xfrm>
+          <a:prstGeom prst="rect">
+            <a:avLst/>
+          </a:prstGeom>
+          <a:noFill/>
+        </p:spPr>
+        <p:txBody>
+          <a:bodyPr wrap="square" anchor="t">
+            <a:spAutoFit/>
+          </a:bodyPr>
+          <a:lstStyle/>
+          <a:p>
+            <a:pPr algn="l">
+              <a:spcAft>
+                <a:spcPts val="600"/>
+              </a:spcAft>
+            </a:pPr>
+            <a:r>
+              <a:rPr sz="3800" b="1">
+                <a:solidFill>
+                  <a:srgbClr val="6D2E46"/>
+                </a:solidFill>
+                <a:latin typeface="Calibri"/>
+              </a:rPr>
+              <a:t>Por qué móvil y por qué ahora</a:t>
+            </a:r>
+          </a:p>
+        </p:txBody>
+      </p:sp>
+      <p:sp>
+        <p:nvSpPr>
+          <p:cNvPr id="5" name="Rectangle 4"/>
+          <p:cNvSpPr/>
+          <p:nvPr/>
+        </p:nvSpPr>
+        <p:spPr>
+          <a:xfrm>
+            <a:off x="868680" y="1783080"/>
+            <a:ext cx="1554480" cy="64008"/>
+          </a:xfrm>
+          <a:prstGeom prst="rect">
+            <a:avLst/>
+          </a:prstGeom>
+          <a:solidFill>
+            <a:srgbClr val="E3B23C"/>
+          </a:solidFill>
+          <a:ln>
+            <a:noFill/>
+          </a:ln>
+          <a:effectLst/>
+        </p:spPr>
+        <p:style>
+          <a:lnRef idx="1">
+            <a:schemeClr val="accent1"/>
+          </a:lnRef>
+          <a:fillRef idx="3">
+            <a:schemeClr val="accent1"/>
+          </a:fillRef>
+          <a:effectRef idx="2">
+            <a:schemeClr val="accent1"/>
+          </a:effectRef>
+          <a:fontRef idx="minor">
+            <a:schemeClr val="lt1"/>
+          </a:fontRef>
+        </p:style>
+        <p:txBody>
+          <a:bodyPr rtlCol="0" anchor="ctr"/>
+          <a:lstStyle/>
+          <a:p>
+            <a:pPr algn="ctr"/>
+          </a:p>
+        </p:txBody>
+      </p:sp>
+      <p:sp>
+        <p:nvSpPr>
+          <p:cNvPr id="6" name="Rounded Rectangle 5"/>
+          <p:cNvSpPr/>
+          <p:nvPr/>
+        </p:nvSpPr>
+        <p:spPr>
+          <a:xfrm>
+            <a:off x="868680" y="2057400"/>
+            <a:ext cx="5061204" cy="2084831"/>
+          </a:xfrm>
+          <a:prstGeom prst="roundRect">
+            <a:avLst/>
+          </a:prstGeom>
+          <a:solidFill>
+            <a:srgbClr val="FFFFFF"/>
+          </a:solidFill>
+          <a:ln w="15240">
+            <a:solidFill>
+              <a:srgbClr val="EADDC8"/>
+            </a:solidFill>
+          </a:ln>
+          <a:effectLst/>
+        </p:spPr>
+        <p:style>
+          <a:lnRef idx="1">
+            <a:schemeClr val="accent1"/>
+          </a:lnRef>
+          <a:fillRef idx="3">
+            <a:schemeClr val="accent1"/>
+          </a:fillRef>
+          <a:effectRef idx="2">
+            <a:schemeClr val="accent1"/>
+          </a:effectRef>
+          <a:fontRef idx="minor">
+            <a:schemeClr val="lt1"/>
+          </a:fontRef>
+        </p:style>
+        <p:txBody>
+          <a:bodyPr rtlCol="0" anchor="ctr"/>
+          <a:lstStyle/>
+          <a:p>
+            <a:pPr algn="ctr"/>
+          </a:p>
+        </p:txBody>
+      </p:sp>
+      <p:sp>
+        <p:nvSpPr>
+          <p:cNvPr id="7" name="Rectangle 6"/>
+          <p:cNvSpPr/>
+          <p:nvPr/>
+        </p:nvSpPr>
+        <p:spPr>
+          <a:xfrm>
+            <a:off x="868680" y="2057400"/>
+            <a:ext cx="118872" cy="2084831"/>
+          </a:xfrm>
+          <a:prstGeom prst="rect">
+            <a:avLst/>
+          </a:prstGeom>
+          <a:solidFill>
+            <a:srgbClr val="C84B31"/>
+          </a:solidFill>
+          <a:ln>
+            <a:noFill/>
+          </a:ln>
+          <a:effectLst/>
+        </p:spPr>
+        <p:style>
+          <a:lnRef idx="1">
+            <a:schemeClr val="accent1"/>
+          </a:lnRef>
+          <a:fillRef idx="3">
+            <a:schemeClr val="accent1"/>
+          </a:fillRef>
+          <a:effectRef idx="2">
+            <a:schemeClr val="accent1"/>
+          </a:effectRef>
+          <a:fontRef idx="minor">
+            <a:schemeClr val="lt1"/>
+          </a:fontRef>
+        </p:style>
+        <p:txBody>
+          <a:bodyPr rtlCol="0" anchor="ctr"/>
+          <a:lstStyle/>
+          <a:p>
+            <a:pPr algn="ctr"/>
+          </a:p>
+        </p:txBody>
+      </p:sp>
+      <p:sp>
+        <p:nvSpPr>
+          <p:cNvPr id="8" name="TextBox 7"/>
+          <p:cNvSpPr txBox="1"/>
+          <p:nvPr/>
+        </p:nvSpPr>
+        <p:spPr>
+          <a:xfrm>
+            <a:off x="1216152" y="2203704"/>
+            <a:ext cx="4466844" cy="822960"/>
+          </a:xfrm>
+          <a:prstGeom prst="rect">
+            <a:avLst/>
+          </a:prstGeom>
+          <a:noFill/>
+        </p:spPr>
+        <p:txBody>
+          <a:bodyPr wrap="square" anchor="t">
+            <a:spAutoFit/>
+          </a:bodyPr>
+          <a:lstStyle/>
+          <a:p>
+            <a:pPr algn="l">
+              <a:spcAft>
+                <a:spcPts val="600"/>
+              </a:spcAft>
+            </a:pPr>
+            <a:r>
+              <a:rPr sz="4400" b="1">
+                <a:solidFill>
+                  <a:srgbClr val="C84B31"/>
+                </a:solidFill>
+                <a:latin typeface="Calibri"/>
+              </a:rPr>
+              <a:t>51.6%</a:t>
+            </a:r>
+          </a:p>
+        </p:txBody>
+      </p:sp>
+      <p:sp>
+        <p:nvSpPr>
+          <p:cNvPr id="9" name="TextBox 8"/>
+          <p:cNvSpPr txBox="1"/>
+          <p:nvPr/>
+        </p:nvSpPr>
+        <p:spPr>
+          <a:xfrm>
+            <a:off x="1216152" y="2990088"/>
+            <a:ext cx="4466844" cy="713231"/>
+          </a:xfrm>
+          <a:prstGeom prst="rect">
+            <a:avLst/>
+          </a:prstGeom>
+          <a:noFill/>
+        </p:spPr>
+        <p:txBody>
+          <a:bodyPr wrap="square" anchor="t">
+            <a:spAutoFit/>
+          </a:bodyPr>
+          <a:lstStyle/>
+          <a:p>
+            <a:pPr algn="l">
+              <a:spcAft>
+                <a:spcPts val="600"/>
+              </a:spcAft>
+            </a:pPr>
+            <a:r>
+              <a:rPr sz="1600" b="1">
+                <a:solidFill>
+                  <a:srgbClr val="2B2B2B"/>
+                </a:solidFill>
+                <a:latin typeface="Calibri"/>
+              </a:rPr>
+              <a:t>del tráfico web mundial ya viene de teléfonos móviles</a:t>
+            </a:r>
+          </a:p>
+        </p:txBody>
+      </p:sp>
+      <p:sp>
+        <p:nvSpPr>
+          <p:cNvPr id="10" name="TextBox 9"/>
+          <p:cNvSpPr txBox="1"/>
+          <p:nvPr/>
+        </p:nvSpPr>
+        <p:spPr>
+          <a:xfrm>
+            <a:off x="1216152" y="3758183"/>
+            <a:ext cx="4466844" cy="329184"/>
+          </a:xfrm>
+          <a:prstGeom prst="rect">
+            <a:avLst/>
+          </a:prstGeom>
+          <a:noFill/>
+        </p:spPr>
+        <p:txBody>
+          <a:bodyPr wrap="square" anchor="t">
+            <a:spAutoFit/>
+          </a:bodyPr>
+          <a:lstStyle/>
+          <a:p>
+            <a:pPr algn="l">
+              <a:spcAft>
+                <a:spcPts val="600"/>
+              </a:spcAft>
+            </a:pPr>
+            <a:r>
+              <a:rPr sz="1050" b="0">
+                <a:solidFill>
+                  <a:srgbClr val="6F645B"/>
+                </a:solidFill>
+                <a:latin typeface="Calibri"/>
+              </a:rPr>
+              <a:t>Fuente: DataReportal, Digital 2025 Global Overview</a:t>
+            </a:r>
+          </a:p>
+        </p:txBody>
+      </p:sp>
+      <p:sp>
+        <p:nvSpPr>
+          <p:cNvPr id="11" name="Rounded Rectangle 10"/>
+          <p:cNvSpPr/>
+          <p:nvPr/>
+        </p:nvSpPr>
+        <p:spPr>
+          <a:xfrm>
+            <a:off x="6277356" y="2057400"/>
+            <a:ext cx="5061204" cy="2084831"/>
+          </a:xfrm>
+          <a:prstGeom prst="roundRect">
+            <a:avLst/>
+          </a:prstGeom>
+          <a:solidFill>
+            <a:srgbClr val="FFFFFF"/>
+          </a:solidFill>
+          <a:ln w="15240">
+            <a:solidFill>
+              <a:srgbClr val="EADDC8"/>
+            </a:solidFill>
+          </a:ln>
+          <a:effectLst/>
+        </p:spPr>
+        <p:style>
+          <a:lnRef idx="1">
+            <a:schemeClr val="accent1"/>
+          </a:lnRef>
+          <a:fillRef idx="3">
+            <a:schemeClr val="accent1"/>
+          </a:fillRef>
+          <a:effectRef idx="2">
+            <a:schemeClr val="accent1"/>
+          </a:effectRef>
+          <a:fontRef idx="minor">
+            <a:schemeClr val="lt1"/>
+          </a:fontRef>
+        </p:style>
+        <p:txBody>
+          <a:bodyPr rtlCol="0" anchor="ctr"/>
+          <a:lstStyle/>
+          <a:p>
+            <a:pPr algn="ctr"/>
+          </a:p>
+        </p:txBody>
+      </p:sp>
+      <p:sp>
+        <p:nvSpPr>
+          <p:cNvPr id="12" name="Rectangle 11"/>
+          <p:cNvSpPr/>
+          <p:nvPr/>
+        </p:nvSpPr>
+        <p:spPr>
+          <a:xfrm>
+            <a:off x="6277356" y="2057400"/>
+            <a:ext cx="118872" cy="2084831"/>
+          </a:xfrm>
+          <a:prstGeom prst="rect">
+            <a:avLst/>
+          </a:prstGeom>
+          <a:solidFill>
+            <a:srgbClr val="6D2E46"/>
+          </a:solidFill>
+          <a:ln>
+            <a:noFill/>
+          </a:ln>
+          <a:effectLst/>
+        </p:spPr>
+        <p:style>
+          <a:lnRef idx="1">
+            <a:schemeClr val="accent1"/>
+          </a:lnRef>
+          <a:fillRef idx="3">
+            <a:schemeClr val="accent1"/>
+          </a:fillRef>
+          <a:effectRef idx="2">
+            <a:schemeClr val="accent1"/>
+          </a:effectRef>
+          <a:fontRef idx="minor">
+            <a:schemeClr val="lt1"/>
+          </a:fontRef>
+        </p:style>
+        <p:txBody>
+          <a:bodyPr rtlCol="0" anchor="ctr"/>
+          <a:lstStyle/>
+          <a:p>
+            <a:pPr algn="ctr"/>
+          </a:p>
+        </p:txBody>
+      </p:sp>
+      <p:sp>
+        <p:nvSpPr>
+          <p:cNvPr id="13" name="TextBox 12"/>
+          <p:cNvSpPr txBox="1"/>
+          <p:nvPr/>
+        </p:nvSpPr>
+        <p:spPr>
+          <a:xfrm>
+            <a:off x="6624828" y="2203704"/>
+            <a:ext cx="4466844" cy="822960"/>
+          </a:xfrm>
+          <a:prstGeom prst="rect">
+            <a:avLst/>
+          </a:prstGeom>
+          <a:noFill/>
+        </p:spPr>
+        <p:txBody>
+          <a:bodyPr wrap="square" anchor="t">
+            <a:spAutoFit/>
+          </a:bodyPr>
+          <a:lstStyle/>
+          <a:p>
+            <a:pPr algn="l">
+              <a:spcAft>
+                <a:spcPts val="600"/>
+              </a:spcAft>
+            </a:pPr>
+            <a:r>
+              <a:rPr sz="4400" b="1">
+                <a:solidFill>
+                  <a:srgbClr val="6D2E46"/>
+                </a:solidFill>
+                <a:latin typeface="Calibri"/>
+              </a:rPr>
+              <a:t>20.4 M</a:t>
+            </a:r>
+          </a:p>
+        </p:txBody>
+      </p:sp>
+      <p:sp>
+        <p:nvSpPr>
+          <p:cNvPr id="14" name="TextBox 13"/>
+          <p:cNvSpPr txBox="1"/>
+          <p:nvPr/>
+        </p:nvSpPr>
+        <p:spPr>
+          <a:xfrm>
+            <a:off x="6624828" y="2990088"/>
+            <a:ext cx="4466844" cy="713231"/>
+          </a:xfrm>
+          <a:prstGeom prst="rect">
+            <a:avLst/>
+          </a:prstGeom>
+          <a:noFill/>
+        </p:spPr>
+        <p:txBody>
+          <a:bodyPr wrap="square" anchor="t">
+            <a:spAutoFit/>
+          </a:bodyPr>
+          <a:lstStyle/>
+          <a:p>
+            <a:pPr algn="l">
+              <a:spcAft>
+                <a:spcPts val="600"/>
+              </a:spcAft>
+            </a:pPr>
+            <a:r>
+              <a:rPr sz="1600" b="1">
+                <a:solidFill>
+                  <a:srgbClr val="2B2B2B"/>
+                </a:solidFill>
+                <a:latin typeface="Calibri"/>
+              </a:rPr>
+              <a:t>conexiones móviles en Guatemala (≈110% de la población)</a:t>
+            </a:r>
+          </a:p>
+        </p:txBody>
+      </p:sp>
+      <p:sp>
+        <p:nvSpPr>
+          <p:cNvPr id="15" name="TextBox 14"/>
+          <p:cNvSpPr txBox="1"/>
+          <p:nvPr/>
+        </p:nvSpPr>
+        <p:spPr>
+          <a:xfrm>
+            <a:off x="6624828" y="3758183"/>
+            <a:ext cx="4466844" cy="329184"/>
+          </a:xfrm>
+          <a:prstGeom prst="rect">
+            <a:avLst/>
+          </a:prstGeom>
+          <a:noFill/>
+        </p:spPr>
+        <p:txBody>
+          <a:bodyPr wrap="square" anchor="t">
+            <a:spAutoFit/>
+          </a:bodyPr>
+          <a:lstStyle/>
+          <a:p>
+            <a:pPr algn="l">
+              <a:spcAft>
+                <a:spcPts val="600"/>
+              </a:spcAft>
+            </a:pPr>
+            <a:r>
+              <a:rPr sz="1050" b="0">
+                <a:solidFill>
+                  <a:srgbClr val="6F645B"/>
+                </a:solidFill>
+                <a:latin typeface="Calibri"/>
+              </a:rPr>
+              <a:t>Fuente: DataReportal, Digital 2025 Guatemala</a:t>
+            </a:r>
+          </a:p>
+        </p:txBody>
+      </p:sp>
+      <p:sp>
+        <p:nvSpPr>
+          <p:cNvPr id="16" name="Rounded Rectangle 15"/>
+          <p:cNvSpPr/>
+          <p:nvPr/>
+        </p:nvSpPr>
+        <p:spPr>
+          <a:xfrm>
+            <a:off x="868680" y="4489703"/>
+            <a:ext cx="5061204" cy="2084831"/>
+          </a:xfrm>
+          <a:prstGeom prst="roundRect">
+            <a:avLst/>
+          </a:prstGeom>
+          <a:solidFill>
+            <a:srgbClr val="FFFFFF"/>
+          </a:solidFill>
+          <a:ln w="15240">
+            <a:solidFill>
+              <a:srgbClr val="EADDC8"/>
+            </a:solidFill>
+          </a:ln>
+          <a:effectLst/>
+        </p:spPr>
+        <p:style>
+          <a:lnRef idx="1">
+            <a:schemeClr val="accent1"/>
+          </a:lnRef>
+          <a:fillRef idx="3">
+            <a:schemeClr val="accent1"/>
+          </a:fillRef>
+          <a:effectRef idx="2">
+            <a:schemeClr val="accent1"/>
+          </a:effectRef>
+          <a:fontRef idx="minor">
+            <a:schemeClr val="lt1"/>
+          </a:fontRef>
+        </p:style>
+        <p:txBody>
+          <a:bodyPr rtlCol="0" anchor="ctr"/>
+          <a:lstStyle/>
+          <a:p>
+            <a:pPr algn="ctr"/>
+          </a:p>
+        </p:txBody>
+      </p:sp>
+      <p:sp>
+        <p:nvSpPr>
+          <p:cNvPr id="17" name="Rectangle 16"/>
+          <p:cNvSpPr/>
+          <p:nvPr/>
+        </p:nvSpPr>
+        <p:spPr>
+          <a:xfrm>
+            <a:off x="868680" y="4489703"/>
+            <a:ext cx="118872" cy="2084831"/>
+          </a:xfrm>
+          <a:prstGeom prst="rect">
+            <a:avLst/>
+          </a:prstGeom>
+          <a:solidFill>
+            <a:srgbClr val="4F772D"/>
+          </a:solidFill>
+          <a:ln>
+            <a:noFill/>
+          </a:ln>
+          <a:effectLst/>
+        </p:spPr>
+        <p:style>
+          <a:lnRef idx="1">
+            <a:schemeClr val="accent1"/>
+          </a:lnRef>
+          <a:fillRef idx="3">
+            <a:schemeClr val="accent1"/>
+          </a:fillRef>
+          <a:effectRef idx="2">
+            <a:schemeClr val="accent1"/>
+          </a:effectRef>
+          <a:fontRef idx="minor">
+            <a:schemeClr val="lt1"/>
+          </a:fontRef>
+        </p:style>
+        <p:txBody>
+          <a:bodyPr rtlCol="0" anchor="ctr"/>
+          <a:lstStyle/>
+          <a:p>
+            <a:pPr algn="ctr"/>
+          </a:p>
+        </p:txBody>
+      </p:sp>
+      <p:sp>
+        <p:nvSpPr>
+          <p:cNvPr id="18" name="TextBox 17"/>
+          <p:cNvSpPr txBox="1"/>
+          <p:nvPr/>
+        </p:nvSpPr>
+        <p:spPr>
+          <a:xfrm>
+            <a:off x="1216152" y="4636007"/>
+            <a:ext cx="4466844" cy="822960"/>
+          </a:xfrm>
+          <a:prstGeom prst="rect">
+            <a:avLst/>
+          </a:prstGeom>
+          <a:noFill/>
+        </p:spPr>
+        <p:txBody>
+          <a:bodyPr wrap="square" anchor="t">
+            <a:spAutoFit/>
+          </a:bodyPr>
+          <a:lstStyle/>
+          <a:p>
+            <a:pPr algn="l">
+              <a:spcAft>
+                <a:spcPts val="600"/>
+              </a:spcAft>
+            </a:pPr>
+            <a:r>
+              <a:rPr sz="4400" b="1">
+                <a:solidFill>
+                  <a:srgbClr val="4F772D"/>
+                </a:solidFill>
+                <a:latin typeface="Calibri"/>
+              </a:rPr>
+              <a:t>84%</a:t>
+            </a:r>
+          </a:p>
+        </p:txBody>
+      </p:sp>
+      <p:sp>
+        <p:nvSpPr>
+          <p:cNvPr id="19" name="TextBox 18"/>
+          <p:cNvSpPr txBox="1"/>
+          <p:nvPr/>
+        </p:nvSpPr>
+        <p:spPr>
+          <a:xfrm>
+            <a:off x="1216152" y="5422391"/>
+            <a:ext cx="4466844" cy="713231"/>
+          </a:xfrm>
+          <a:prstGeom prst="rect">
+            <a:avLst/>
+          </a:prstGeom>
+          <a:noFill/>
+        </p:spPr>
+        <p:txBody>
+          <a:bodyPr wrap="square" anchor="t">
+            <a:spAutoFit/>
+          </a:bodyPr>
+          <a:lstStyle/>
+          <a:p>
+            <a:pPr algn="l">
+              <a:spcAft>
+                <a:spcPts val="600"/>
+              </a:spcAft>
+            </a:pPr>
+            <a:r>
+              <a:rPr sz="1600" b="1">
+                <a:solidFill>
+                  <a:srgbClr val="2B2B2B"/>
+                </a:solidFill>
+                <a:latin typeface="Calibri"/>
+              </a:rPr>
+              <a:t>de desarrolladores ya usa o planea usar IA en su trabajo</a:t>
+            </a:r>
+          </a:p>
+        </p:txBody>
+      </p:sp>
+      <p:sp>
+        <p:nvSpPr>
+          <p:cNvPr id="20" name="TextBox 19"/>
+          <p:cNvSpPr txBox="1"/>
+          <p:nvPr/>
+        </p:nvSpPr>
+        <p:spPr>
+          <a:xfrm>
+            <a:off x="1216152" y="6190486"/>
+            <a:ext cx="4466844" cy="329184"/>
+          </a:xfrm>
+          <a:prstGeom prst="rect">
+            <a:avLst/>
+          </a:prstGeom>
+          <a:noFill/>
+        </p:spPr>
+        <p:txBody>
+          <a:bodyPr wrap="square" anchor="t">
+            <a:spAutoFit/>
+          </a:bodyPr>
+          <a:lstStyle/>
+          <a:p>
+            <a:pPr algn="l">
+              <a:spcAft>
+                <a:spcPts val="600"/>
+              </a:spcAft>
+            </a:pPr>
+            <a:r>
+              <a:rPr sz="1050" b="0">
+                <a:solidFill>
+                  <a:srgbClr val="6F645B"/>
+                </a:solidFill>
+                <a:latin typeface="Calibri"/>
+              </a:rPr>
+              <a:t>Fuente: Stack Overflow Developer Survey 2025</a:t>
+            </a:r>
+          </a:p>
+        </p:txBody>
+      </p:sp>
+      <p:sp>
+        <p:nvSpPr>
+          <p:cNvPr id="21" name="Rounded Rectangle 20"/>
+          <p:cNvSpPr/>
+          <p:nvPr/>
+        </p:nvSpPr>
+        <p:spPr>
+          <a:xfrm>
+            <a:off x="6277356" y="4489703"/>
+            <a:ext cx="5061204" cy="2084831"/>
+          </a:xfrm>
+          <a:prstGeom prst="roundRect">
+            <a:avLst/>
+          </a:prstGeom>
+          <a:solidFill>
+            <a:srgbClr val="FFFFFF"/>
+          </a:solidFill>
+          <a:ln w="15240">
+            <a:solidFill>
+              <a:srgbClr val="EADDC8"/>
+            </a:solidFill>
+          </a:ln>
+          <a:effectLst/>
+        </p:spPr>
+        <p:style>
+          <a:lnRef idx="1">
+            <a:schemeClr val="accent1"/>
+          </a:lnRef>
+          <a:fillRef idx="3">
+            <a:schemeClr val="accent1"/>
+          </a:fillRef>
+          <a:effectRef idx="2">
+            <a:schemeClr val="accent1"/>
+          </a:effectRef>
+          <a:fontRef idx="minor">
+            <a:schemeClr val="lt1"/>
+          </a:fontRef>
+        </p:style>
+        <p:txBody>
+          <a:bodyPr rtlCol="0" anchor="ctr"/>
+          <a:lstStyle/>
+          <a:p>
+            <a:pPr algn="ctr"/>
+          </a:p>
+        </p:txBody>
+      </p:sp>
+      <p:sp>
+        <p:nvSpPr>
+          <p:cNvPr id="22" name="Rectangle 21"/>
+          <p:cNvSpPr/>
+          <p:nvPr/>
+        </p:nvSpPr>
+        <p:spPr>
+          <a:xfrm>
+            <a:off x="6277356" y="4489703"/>
+            <a:ext cx="118872" cy="2084831"/>
+          </a:xfrm>
+          <a:prstGeom prst="rect">
+            <a:avLst/>
+          </a:prstGeom>
+          <a:solidFill>
+            <a:srgbClr val="3A6B7E"/>
+          </a:solidFill>
+          <a:ln>
+            <a:noFill/>
+          </a:ln>
+          <a:effectLst/>
+        </p:spPr>
+        <p:style>
+          <a:lnRef idx="1">
+            <a:schemeClr val="accent1"/>
+          </a:lnRef>
+          <a:fillRef idx="3">
+            <a:schemeClr val="accent1"/>
+          </a:fillRef>
+          <a:effectRef idx="2">
+            <a:schemeClr val="accent1"/>
+          </a:effectRef>
+          <a:fontRef idx="minor">
+            <a:schemeClr val="lt1"/>
+          </a:fontRef>
+        </p:style>
+        <p:txBody>
+          <a:bodyPr rtlCol="0" anchor="ctr"/>
+          <a:lstStyle/>
+          <a:p>
+            <a:pPr algn="ctr"/>
+          </a:p>
+        </p:txBody>
+      </p:sp>
+      <p:sp>
+        <p:nvSpPr>
+          <p:cNvPr id="23" name="TextBox 22"/>
+          <p:cNvSpPr txBox="1"/>
+          <p:nvPr/>
+        </p:nvSpPr>
+        <p:spPr>
+          <a:xfrm>
+            <a:off x="6624828" y="4636007"/>
+            <a:ext cx="4466844" cy="822960"/>
+          </a:xfrm>
+          <a:prstGeom prst="rect">
+            <a:avLst/>
+          </a:prstGeom>
+          <a:noFill/>
+        </p:spPr>
+        <p:txBody>
+          <a:bodyPr wrap="square" anchor="t">
+            <a:spAutoFit/>
+          </a:bodyPr>
+          <a:lstStyle/>
+          <a:p>
+            <a:pPr algn="l">
+              <a:spcAft>
+                <a:spcPts val="600"/>
+              </a:spcAft>
+            </a:pPr>
+            <a:r>
+              <a:rPr sz="4400" b="1">
+                <a:solidFill>
+                  <a:srgbClr val="3A6B7E"/>
+                </a:solidFill>
+                <a:latin typeface="Calibri"/>
+              </a:rPr>
+              <a:t>59%</a:t>
+            </a:r>
+          </a:p>
+        </p:txBody>
+      </p:sp>
+      <p:sp>
+        <p:nvSpPr>
+          <p:cNvPr id="24" name="TextBox 23"/>
+          <p:cNvSpPr txBox="1"/>
+          <p:nvPr/>
+        </p:nvSpPr>
+        <p:spPr>
+          <a:xfrm>
+            <a:off x="6624828" y="5422391"/>
+            <a:ext cx="4466844" cy="713231"/>
+          </a:xfrm>
+          <a:prstGeom prst="rect">
+            <a:avLst/>
+          </a:prstGeom>
+          <a:noFill/>
+        </p:spPr>
+        <p:txBody>
+          <a:bodyPr wrap="square" anchor="t">
+            <a:spAutoFit/>
+          </a:bodyPr>
+          <a:lstStyle/>
+          <a:p>
+            <a:pPr algn="l">
+              <a:spcAft>
+                <a:spcPts val="600"/>
+              </a:spcAft>
+            </a:pPr>
+            <a:r>
+              <a:rPr sz="1600" b="1">
+                <a:solidFill>
+                  <a:srgbClr val="2B2B2B"/>
+                </a:solidFill>
+                <a:latin typeface="Calibri"/>
+              </a:rPr>
+              <a:t>de diseñadores y desarrolladores ya usa IA en su flujo</a:t>
+            </a:r>
+          </a:p>
+        </p:txBody>
+      </p:sp>
+      <p:sp>
+        <p:nvSpPr>
+          <p:cNvPr id="25" name="TextBox 24"/>
+          <p:cNvSpPr txBox="1"/>
+          <p:nvPr/>
+        </p:nvSpPr>
+        <p:spPr>
+          <a:xfrm>
+            <a:off x="6624828" y="6190486"/>
+            <a:ext cx="4466844" cy="329184"/>
+          </a:xfrm>
+          <a:prstGeom prst="rect">
+            <a:avLst/>
+          </a:prstGeom>
+          <a:noFill/>
+        </p:spPr>
+        <p:txBody>
+          <a:bodyPr wrap="square" anchor="t">
+            <a:spAutoFit/>
+          </a:bodyPr>
+          <a:lstStyle/>
+          <a:p>
+            <a:pPr algn="l">
+              <a:spcAft>
+                <a:spcPts val="600"/>
+              </a:spcAft>
+            </a:pPr>
+            <a:r>
+              <a:rPr sz="1050" b="0">
+                <a:solidFill>
+                  <a:srgbClr val="6F645B"/>
+                </a:solidFill>
+                <a:latin typeface="Calibri"/>
+              </a:rPr>
+              <a:t>Fuente: Figma, AI Design Report 2024</a:t>
+            </a:r>
+          </a:p>
+        </p:txBody>
+      </p:sp>
+    </p:spTree>
+  </p:cSld>
+  <p:clrMapOvr>
+    <a:masterClrMapping/>
+  </p:clrMapOvr>
+</p:sld>
+</file>
+
+<file path=ppt/slides/slide13.xml><?xml version="1.0" encoding="utf-8"?>
+<p:sld xmlns:a="http://schemas.openxmlformats.org/drawingml/2006/main" xmlns:p="http://schemas.openxmlformats.org/presentationml/2006/main" xmlns:r="http://schemas.openxmlformats.org/officeDocument/2006/relationships">
+  <p:cSld>
+    <p:bg>
+      <p:bgPr>
+        <a:solidFill>
+          <a:srgbClr val="FDF6EC"/>
+        </a:solidFill>
+        <a:effectLst/>
+      </p:bgPr>
+    </p:bg>
+    <p:spTree>
+      <p:nvGrpSpPr>
+        <p:cNvPr id="1" name=""/>
+        <p:cNvGrpSpPr/>
+        <p:nvPr/>
+      </p:nvGrpSpPr>
+      <p:grpSpPr/>
+      <p:sp>
+        <p:nvSpPr>
+          <p:cNvPr id="2" name="Rectangle 1"/>
+          <p:cNvSpPr/>
+          <p:nvPr/>
+        </p:nvSpPr>
+        <p:spPr>
+          <a:xfrm>
+            <a:off x="0" y="0"/>
+            <a:ext cx="12191695" cy="146304"/>
+          </a:xfrm>
+          <a:prstGeom prst="rect">
+            <a:avLst/>
+          </a:prstGeom>
+          <a:solidFill>
+            <a:srgbClr val="C84B31"/>
+          </a:solidFill>
+          <a:ln>
+            <a:noFill/>
+          </a:ln>
+          <a:effectLst/>
+        </p:spPr>
+        <p:style>
+          <a:lnRef idx="1">
+            <a:schemeClr val="accent1"/>
+          </a:lnRef>
+          <a:fillRef idx="3">
+            <a:schemeClr val="accent1"/>
+          </a:fillRef>
+          <a:effectRef idx="2">
+            <a:schemeClr val="accent1"/>
+          </a:effectRef>
+          <a:fontRef idx="minor">
+            <a:schemeClr val="lt1"/>
+          </a:fontRef>
+        </p:style>
+        <p:txBody>
+          <a:bodyPr rtlCol="0" anchor="ctr"/>
+          <a:lstStyle/>
+          <a:p>
+            <a:pPr algn="ctr"/>
+          </a:p>
+        </p:txBody>
+      </p:sp>
+      <p:sp>
+        <p:nvSpPr>
+          <p:cNvPr id="3" name="TextBox 2"/>
+          <p:cNvSpPr txBox="1"/>
+          <p:nvPr/>
+        </p:nvSpPr>
+        <p:spPr>
+          <a:xfrm>
+            <a:off x="822960" y="457200"/>
+            <a:ext cx="10515600" cy="457200"/>
+          </a:xfrm>
+          <a:prstGeom prst="rect">
+            <a:avLst/>
+          </a:prstGeom>
+          <a:noFill/>
+        </p:spPr>
+        <p:txBody>
+          <a:bodyPr wrap="square" anchor="t">
+            <a:spAutoFit/>
+          </a:bodyPr>
+          <a:lstStyle/>
+          <a:p>
+            <a:pPr algn="l">
+              <a:spcAft>
+                <a:spcPts val="600"/>
+              </a:spcAft>
+            </a:pPr>
+            <a:r>
+              <a:rPr sz="1800" b="1">
+                <a:solidFill>
+                  <a:srgbClr val="C84B31"/>
+                </a:solidFill>
+                <a:latin typeface="Calibri"/>
+              </a:rPr>
+              <a:t>A DÓNDE LLEGAMOS HOY</a:t>
+            </a:r>
+          </a:p>
+        </p:txBody>
+      </p:sp>
+      <p:sp>
+        <p:nvSpPr>
+          <p:cNvPr id="4" name="TextBox 3"/>
+          <p:cNvSpPr txBox="1"/>
+          <p:nvPr/>
+        </p:nvSpPr>
+        <p:spPr>
+          <a:xfrm>
+            <a:off x="822960" y="914400"/>
+            <a:ext cx="10607040" cy="1005840"/>
+          </a:xfrm>
+          <a:prstGeom prst="rect">
+            <a:avLst/>
+          </a:prstGeom>
+          <a:noFill/>
+        </p:spPr>
+        <p:txBody>
+          <a:bodyPr wrap="square" anchor="t">
+            <a:spAutoFit/>
+          </a:bodyPr>
+          <a:lstStyle/>
+          <a:p>
+            <a:pPr algn="l">
+              <a:spcAft>
+                <a:spcPts val="600"/>
+              </a:spcAft>
+            </a:pPr>
+            <a:r>
+              <a:rPr sz="3800" b="1">
+                <a:solidFill>
+                  <a:srgbClr val="6D2E46"/>
+                </a:solidFill>
+                <a:latin typeface="Calibri"/>
+              </a:rPr>
+              <a:t>Tu primera app: Ruta del Café</a:t>
+            </a:r>
+          </a:p>
+        </p:txBody>
+      </p:sp>
+      <p:sp>
+        <p:nvSpPr>
+          <p:cNvPr id="5" name="Rectangle 4"/>
+          <p:cNvSpPr/>
+          <p:nvPr/>
+        </p:nvSpPr>
+        <p:spPr>
+          <a:xfrm>
+            <a:off x="868680" y="1783080"/>
+            <a:ext cx="1554480" cy="64008"/>
+          </a:xfrm>
+          <a:prstGeom prst="rect">
+            <a:avLst/>
+          </a:prstGeom>
+          <a:solidFill>
+            <a:srgbClr val="E3B23C"/>
+          </a:solidFill>
+          <a:ln>
+            <a:noFill/>
+          </a:ln>
+          <a:effectLst/>
+        </p:spPr>
+        <p:style>
+          <a:lnRef idx="1">
+            <a:schemeClr val="accent1"/>
+          </a:lnRef>
+          <a:fillRef idx="3">
+            <a:schemeClr val="accent1"/>
+          </a:fillRef>
+          <a:effectRef idx="2">
+            <a:schemeClr val="accent1"/>
+          </a:effectRef>
+          <a:fontRef idx="minor">
+            <a:schemeClr val="lt1"/>
+          </a:fontRef>
+        </p:style>
+        <p:txBody>
+          <a:bodyPr rtlCol="0" anchor="ctr"/>
+          <a:lstStyle/>
+          <a:p>
+            <a:pPr algn="ctr"/>
+          </a:p>
+        </p:txBody>
+      </p:sp>
+      <p:sp>
+        <p:nvSpPr>
+          <p:cNvPr id="6" name="Rounded Rectangle 5"/>
+          <p:cNvSpPr/>
+          <p:nvPr/>
+        </p:nvSpPr>
+        <p:spPr>
+          <a:xfrm>
+            <a:off x="9134856" y="1819655"/>
+            <a:ext cx="2053369" cy="4315968"/>
+          </a:xfrm>
+          <a:prstGeom prst="roundRect">
+            <a:avLst/>
+          </a:prstGeom>
+          <a:solidFill>
+            <a:srgbClr val="FFFFFF"/>
+          </a:solidFill>
+          <a:ln w="15240">
+            <a:solidFill>
+              <a:srgbClr val="6D2E46"/>
+            </a:solidFill>
+          </a:ln>
+          <a:effectLst/>
+        </p:spPr>
+        <p:style>
+          <a:lnRef idx="1">
+            <a:schemeClr val="accent1"/>
+          </a:lnRef>
+          <a:fillRef idx="3">
+            <a:schemeClr val="accent1"/>
+          </a:fillRef>
+          <a:effectRef idx="2">
+            <a:schemeClr val="accent1"/>
+          </a:effectRef>
+          <a:fontRef idx="minor">
+            <a:schemeClr val="lt1"/>
+          </a:fontRef>
+        </p:style>
+        <p:txBody>
+          <a:bodyPr rtlCol="0" anchor="ctr"/>
+          <a:lstStyle/>
+          <a:p>
+            <a:pPr algn="ctr"/>
+          </a:p>
+        </p:txBody>
+      </p:sp>
+      <p:pic>
+        <p:nvPicPr>
+          <p:cNvPr id="7" name="Picture 6" descr="ruta-home.png"/>
+          <p:cNvPicPr>
+            <a:picLocks noChangeAspect="1"/>
+          </p:cNvPicPr>
+          <p:nvPr/>
+        </p:nvPicPr>
+        <p:blipFill>
+          <a:blip r:embed="rId2"/>
+          <a:stretch>
+            <a:fillRect/>
+          </a:stretch>
+        </p:blipFill>
+        <p:spPr>
+          <a:xfrm>
+            <a:off x="9189720" y="1874519"/>
+            <a:ext cx="1943642" cy="4206240"/>
+          </a:xfrm>
+          <a:prstGeom prst="rect">
+            <a:avLst/>
+          </a:prstGeom>
+        </p:spPr>
+      </p:pic>
+      <p:sp>
+        <p:nvSpPr>
+          <p:cNvPr id="8" name="TextBox 7"/>
+          <p:cNvSpPr txBox="1"/>
+          <p:nvPr/>
+        </p:nvSpPr>
+        <p:spPr>
+          <a:xfrm>
+            <a:off x="8366760" y="6208775"/>
+            <a:ext cx="3589561" cy="457200"/>
+          </a:xfrm>
+          <a:prstGeom prst="rect">
+            <a:avLst/>
+          </a:prstGeom>
+          <a:noFill/>
+        </p:spPr>
+        <p:txBody>
+          <a:bodyPr wrap="square" anchor="t">
+            <a:spAutoFit/>
+          </a:bodyPr>
+          <a:lstStyle/>
+          <a:p>
+            <a:pPr algn="ctr">
+              <a:spcAft>
+                <a:spcPts val="600"/>
+              </a:spcAft>
+            </a:pPr>
+            <a:r>
+              <a:rPr sz="1300" b="1">
+                <a:solidFill>
+                  <a:srgbClr val="6D2E46"/>
+                </a:solidFill>
+                <a:latin typeface="Calibri"/>
+              </a:rPr>
+              <a:t>Pantalla principal: tarjetas y filtro</a:t>
+            </a:r>
+          </a:p>
+        </p:txBody>
+      </p:sp>
+      <p:sp>
+        <p:nvSpPr>
+          <p:cNvPr id="9" name="TextBox 8"/>
+          <p:cNvSpPr txBox="1"/>
+          <p:nvPr/>
+        </p:nvSpPr>
+        <p:spPr>
+          <a:xfrm>
+            <a:off x="896112" y="2286000"/>
+            <a:ext cx="7680960" cy="4023360"/>
+          </a:xfrm>
+          <a:prstGeom prst="rect">
+            <a:avLst/>
+          </a:prstGeom>
+          <a:noFill/>
+        </p:spPr>
+        <p:txBody>
+          <a:bodyPr wrap="square">
+            <a:spAutoFit/>
+          </a:bodyPr>
+          <a:lstStyle/>
+          <a:p>
+            <a:pPr>
+              <a:spcAft>
+                <a:spcPts val="1500"/>
+              </a:spcAft>
+            </a:pPr>
+            <a:r>
+              <a:rPr sz="2200">
+                <a:solidFill>
+                  <a:srgbClr val="2B2B2B"/>
+                </a:solidFill>
+                <a:latin typeface="Calibri"/>
+              </a:rPr>
+              <a:t>•  Con un solo prompt inicial detallado obtienes una app así</a:t>
+            </a:r>
+          </a:p>
+          <a:p>
+            <a:pPr>
+              <a:spcAft>
+                <a:spcPts val="1500"/>
+              </a:spcAft>
+            </a:pPr>
+            <a:r>
+              <a:rPr sz="2200">
+                <a:solidFill>
+                  <a:srgbClr val="2B2B2B"/>
+                </a:solidFill>
+                <a:latin typeface="Calibri"/>
+              </a:rPr>
+              <a:t>•  Encabezado, filtro por categoría y tarjetas (cards)</a:t>
+            </a:r>
+          </a:p>
+          <a:p>
+            <a:pPr>
+              <a:spcAft>
+                <a:spcPts val="1500"/>
+              </a:spcAft>
+            </a:pPr>
+            <a:r>
+              <a:rPr sz="2200">
+                <a:solidFill>
+                  <a:srgbClr val="2B2B2B"/>
+                </a:solidFill>
+                <a:latin typeface="Calibri"/>
+              </a:rPr>
+              <a:t>•  Cada tarjeta: imagen, nombre, zona y categoría</a:t>
+            </a:r>
+          </a:p>
+          <a:p>
+            <a:pPr>
+              <a:spcAft>
+                <a:spcPts val="1500"/>
+              </a:spcAft>
+            </a:pPr>
+            <a:r>
+              <a:rPr sz="2200">
+                <a:solidFill>
+                  <a:srgbClr val="2B2B2B"/>
+                </a:solidFill>
+                <a:latin typeface="Calibri"/>
+              </a:rPr>
+              <a:t>•  Hoy la construyes y aplicas tu primer refinamiento</a:t>
+            </a:r>
+          </a:p>
+        </p:txBody>
+      </p:sp>
+    </p:spTree>
+  </p:cSld>
+  <p:clrMapOvr>
+    <a:masterClrMapping/>
+  </p:clrMapOvr>
+</p:sld>
+</file>
+
+<file path=ppt/slides/slide14.xml><?xml version="1.0" encoding="utf-8"?>
+<p:sld xmlns:a="http://schemas.openxmlformats.org/drawingml/2006/main" xmlns:p="http://schemas.openxmlformats.org/presentationml/2006/main" xmlns:r="http://schemas.openxmlformats.org/officeDocument/2006/relationships">
+  <p:cSld>
+    <p:bg>
+      <p:bgPr>
+        <a:solidFill>
+          <a:srgbClr val="FDF6EC"/>
+        </a:solidFill>
+        <a:effectLst/>
+      </p:bgPr>
+    </p:bg>
+    <p:spTree>
+      <p:nvGrpSpPr>
+        <p:cNvPr id="1" name=""/>
+        <p:cNvGrpSpPr/>
+        <p:nvPr/>
+      </p:nvGrpSpPr>
+      <p:grpSpPr/>
+      <p:sp>
+        <p:nvSpPr>
+          <p:cNvPr id="2" name="Rectangle 1"/>
+          <p:cNvSpPr/>
+          <p:nvPr/>
+        </p:nvSpPr>
+        <p:spPr>
+          <a:xfrm>
+            <a:off x="0" y="0"/>
+            <a:ext cx="12191695" cy="146304"/>
+          </a:xfrm>
+          <a:prstGeom prst="rect">
+            <a:avLst/>
+          </a:prstGeom>
+          <a:solidFill>
+            <a:srgbClr val="E3B23C"/>
+          </a:solidFill>
+          <a:ln>
+            <a:noFill/>
+          </a:ln>
+          <a:effectLst/>
+        </p:spPr>
+        <p:style>
+          <a:lnRef idx="1">
+            <a:schemeClr val="accent1"/>
+          </a:lnRef>
+          <a:fillRef idx="3">
+            <a:schemeClr val="accent1"/>
+          </a:fillRef>
+          <a:effectRef idx="2">
+            <a:schemeClr val="accent1"/>
+          </a:effectRef>
+          <a:fontRef idx="minor">
+            <a:schemeClr val="lt1"/>
+          </a:fontRef>
+        </p:style>
+        <p:txBody>
+          <a:bodyPr rtlCol="0" anchor="ctr"/>
+          <a:lstStyle/>
+          <a:p>
+            <a:pPr algn="ctr"/>
+          </a:p>
+        </p:txBody>
+      </p:sp>
+      <p:sp>
+        <p:nvSpPr>
+          <p:cNvPr id="3" name="TextBox 2"/>
+          <p:cNvSpPr txBox="1"/>
+          <p:nvPr/>
+        </p:nvSpPr>
+        <p:spPr>
+          <a:xfrm>
+            <a:off x="822960" y="457200"/>
+            <a:ext cx="10515600" cy="457200"/>
+          </a:xfrm>
+          <a:prstGeom prst="rect">
+            <a:avLst/>
+          </a:prstGeom>
+          <a:noFill/>
+        </p:spPr>
+        <p:txBody>
+          <a:bodyPr wrap="square" anchor="t">
+            <a:spAutoFit/>
+          </a:bodyPr>
+          <a:lstStyle/>
+          <a:p>
+            <a:pPr algn="l">
+              <a:spcAft>
+                <a:spcPts val="600"/>
+              </a:spcAft>
+            </a:pPr>
+            <a:r>
+              <a:rPr sz="1800" b="1">
+                <a:solidFill>
+                  <a:srgbClr val="C84B31"/>
+                </a:solidFill>
+                <a:latin typeface="Calibri"/>
+              </a:rPr>
+              <a:t>META Y RESULTADO</a:t>
+            </a:r>
+          </a:p>
+        </p:txBody>
+      </p:sp>
+      <p:sp>
+        <p:nvSpPr>
+          <p:cNvPr id="4" name="TextBox 3"/>
+          <p:cNvSpPr txBox="1"/>
+          <p:nvPr/>
+        </p:nvSpPr>
+        <p:spPr>
+          <a:xfrm>
+            <a:off x="822960" y="914400"/>
+            <a:ext cx="10607040" cy="1005840"/>
+          </a:xfrm>
+          <a:prstGeom prst="rect">
+            <a:avLst/>
+          </a:prstGeom>
+          <a:noFill/>
+        </p:spPr>
+        <p:txBody>
+          <a:bodyPr wrap="square" anchor="t">
+            <a:spAutoFit/>
+          </a:bodyPr>
+          <a:lstStyle/>
+          <a:p>
+            <a:pPr algn="l">
+              <a:spcAft>
+                <a:spcPts val="600"/>
+              </a:spcAft>
+            </a:pPr>
+            <a:r>
+              <a:rPr sz="3800" b="1">
+                <a:solidFill>
+                  <a:srgbClr val="6D2E46"/>
+                </a:solidFill>
+                <a:latin typeface="Calibri"/>
+              </a:rPr>
+              <a:t>Ruta del Café: la meta y el resultado</a:t>
+            </a:r>
+          </a:p>
+        </p:txBody>
+      </p:sp>
+      <p:sp>
+        <p:nvSpPr>
+          <p:cNvPr id="5" name="Rectangle 4"/>
+          <p:cNvSpPr/>
+          <p:nvPr/>
+        </p:nvSpPr>
+        <p:spPr>
+          <a:xfrm>
+            <a:off x="868680" y="1783080"/>
+            <a:ext cx="1554480" cy="64008"/>
+          </a:xfrm>
+          <a:prstGeom prst="rect">
+            <a:avLst/>
+          </a:prstGeom>
+          <a:solidFill>
+            <a:srgbClr val="E3B23C"/>
+          </a:solidFill>
+          <a:ln>
+            <a:noFill/>
+          </a:ln>
+          <a:effectLst/>
+        </p:spPr>
+        <p:style>
+          <a:lnRef idx="1">
+            <a:schemeClr val="accent1"/>
+          </a:lnRef>
+          <a:fillRef idx="3">
+            <a:schemeClr val="accent1"/>
+          </a:fillRef>
+          <a:effectRef idx="2">
+            <a:schemeClr val="accent1"/>
+          </a:effectRef>
+          <a:fontRef idx="minor">
+            <a:schemeClr val="lt1"/>
+          </a:fontRef>
+        </p:style>
+        <p:txBody>
+          <a:bodyPr rtlCol="0" anchor="ctr"/>
+          <a:lstStyle/>
+          <a:p>
+            <a:pPr algn="ctr"/>
+          </a:p>
+        </p:txBody>
+      </p:sp>
+      <p:sp>
+        <p:nvSpPr>
+          <p:cNvPr id="6" name="Rounded Rectangle 5"/>
+          <p:cNvSpPr/>
+          <p:nvPr/>
+        </p:nvSpPr>
+        <p:spPr>
+          <a:xfrm>
+            <a:off x="658368" y="2011680"/>
+            <a:ext cx="5349240" cy="658368"/>
+          </a:xfrm>
+          <a:prstGeom prst="roundRect">
+            <a:avLst/>
+          </a:prstGeom>
+          <a:solidFill>
+            <a:srgbClr val="3A6B7E"/>
+          </a:solidFill>
+          <a:ln>
+            <a:noFill/>
+          </a:ln>
+          <a:effectLst/>
+        </p:spPr>
+        <p:style>
+          <a:lnRef idx="1">
+            <a:schemeClr val="accent1"/>
+          </a:lnRef>
+          <a:fillRef idx="3">
+            <a:schemeClr val="accent1"/>
+          </a:fillRef>
+          <a:effectRef idx="2">
+            <a:schemeClr val="accent1"/>
+          </a:effectRef>
+          <a:fontRef idx="minor">
+            <a:schemeClr val="lt1"/>
+          </a:fontRef>
+        </p:style>
+        <p:txBody>
+          <a:bodyPr rtlCol="0" anchor="ctr"/>
+          <a:lstStyle/>
+          <a:p>
+            <a:pPr algn="ctr"/>
+          </a:p>
+        </p:txBody>
+      </p:sp>
+      <p:sp>
+        <p:nvSpPr>
+          <p:cNvPr id="7" name="TextBox 6"/>
+          <p:cNvSpPr txBox="1"/>
+          <p:nvPr/>
+        </p:nvSpPr>
+        <p:spPr>
+          <a:xfrm>
+            <a:off x="914400" y="2057400"/>
+            <a:ext cx="4846320" cy="566928"/>
+          </a:xfrm>
+          <a:prstGeom prst="rect">
+            <a:avLst/>
+          </a:prstGeom>
+          <a:noFill/>
+        </p:spPr>
+        <p:txBody>
+          <a:bodyPr wrap="square" anchor="ctr">
+            <a:spAutoFit/>
+          </a:bodyPr>
+          <a:lstStyle/>
+          <a:p>
+            <a:pPr algn="l">
+              <a:spcAft>
+                <a:spcPts val="100"/>
+              </a:spcAft>
+            </a:pPr>
+            <a:r>
+              <a:rPr sz="1700" b="1">
+                <a:solidFill>
+                  <a:srgbClr val="FFFFFF"/>
+                </a:solidFill>
+                <a:latin typeface="Calibri"/>
+              </a:rPr>
+              <a:t>1 · Esto vamos a construir</a:t>
+            </a:r>
+          </a:p>
+          <a:p>
+            <a:pPr algn="l">
+              <a:spcAft>
+                <a:spcPts val="100"/>
+              </a:spcAft>
+            </a:pPr>
+            <a:r>
+              <a:rPr sz="1200" b="0">
+                <a:solidFill>
+                  <a:srgbClr val="FDF6EC"/>
+                </a:solidFill>
+                <a:latin typeface="Calibri"/>
+              </a:rPr>
+              <a:t>Mock-up de referencia</a:t>
+            </a:r>
+          </a:p>
+        </p:txBody>
+      </p:sp>
+      <p:sp>
+        <p:nvSpPr>
+          <p:cNvPr id="8" name="Rounded Rectangle 7"/>
+          <p:cNvSpPr/>
+          <p:nvPr/>
+        </p:nvSpPr>
+        <p:spPr>
+          <a:xfrm>
+            <a:off x="2505586" y="2788920"/>
+            <a:ext cx="1654803" cy="3474720"/>
+          </a:xfrm>
+          <a:prstGeom prst="roundRect">
+            <a:avLst/>
+          </a:prstGeom>
+          <a:solidFill>
+            <a:srgbClr val="FFFFFF"/>
+          </a:solidFill>
+          <a:ln w="15240">
+            <a:solidFill>
+              <a:srgbClr val="6D2E46"/>
+            </a:solidFill>
+          </a:ln>
+          <a:effectLst/>
+        </p:spPr>
+        <p:style>
+          <a:lnRef idx="1">
+            <a:schemeClr val="accent1"/>
+          </a:lnRef>
+          <a:fillRef idx="3">
+            <a:schemeClr val="accent1"/>
+          </a:fillRef>
+          <a:effectRef idx="2">
+            <a:schemeClr val="accent1"/>
+          </a:effectRef>
+          <a:fontRef idx="minor">
+            <a:schemeClr val="lt1"/>
+          </a:fontRef>
+        </p:style>
+        <p:txBody>
+          <a:bodyPr rtlCol="0" anchor="ctr"/>
+          <a:lstStyle/>
+          <a:p>
+            <a:pPr algn="ctr"/>
+          </a:p>
+        </p:txBody>
+      </p:sp>
+      <p:pic>
+        <p:nvPicPr>
+          <p:cNvPr id="9" name="Picture 8" descr="ruta-home.png"/>
+          <p:cNvPicPr>
+            <a:picLocks noChangeAspect="1"/>
+          </p:cNvPicPr>
+          <p:nvPr/>
+        </p:nvPicPr>
+        <p:blipFill>
+          <a:blip r:embed="rId2"/>
+          <a:stretch>
+            <a:fillRect/>
+          </a:stretch>
+        </p:blipFill>
+        <p:spPr>
+          <a:xfrm>
+            <a:off x="2551306" y="2834640"/>
+            <a:ext cx="1563363" cy="3383280"/>
+          </a:xfrm>
+          <a:prstGeom prst="rect">
+            <a:avLst/>
+          </a:prstGeom>
+        </p:spPr>
+      </p:pic>
+      <p:sp>
+        <p:nvSpPr>
+          <p:cNvPr id="10" name="TextBox 9"/>
+          <p:cNvSpPr txBox="1"/>
+          <p:nvPr/>
+        </p:nvSpPr>
+        <p:spPr>
+          <a:xfrm>
+            <a:off x="658368" y="6263640"/>
+            <a:ext cx="5349240" cy="457200"/>
+          </a:xfrm>
+          <a:prstGeom prst="rect">
+            <a:avLst/>
+          </a:prstGeom>
+          <a:noFill/>
+        </p:spPr>
+        <p:txBody>
+          <a:bodyPr wrap="square" anchor="t">
+            <a:spAutoFit/>
+          </a:bodyPr>
+          <a:lstStyle/>
+          <a:p>
+            <a:pPr algn="ctr">
+              <a:spcAft>
+                <a:spcPts val="600"/>
+              </a:spcAft>
+            </a:pPr>
+            <a:r>
+              <a:rPr sz="1300" b="1">
+                <a:solidFill>
+                  <a:srgbClr val="6D2E46"/>
+                </a:solidFill>
+                <a:latin typeface="Calibri"/>
+              </a:rPr>
+              <a:t>El mock-up de referencia (la guía)</a:t>
+            </a:r>
+          </a:p>
+        </p:txBody>
+      </p:sp>
+      <p:sp>
+        <p:nvSpPr>
+          <p:cNvPr id="11" name="Rounded Rectangle 10"/>
+          <p:cNvSpPr/>
+          <p:nvPr/>
+        </p:nvSpPr>
+        <p:spPr>
+          <a:xfrm>
+            <a:off x="6373368" y="2011680"/>
+            <a:ext cx="5349240" cy="658368"/>
+          </a:xfrm>
+          <a:prstGeom prst="roundRect">
+            <a:avLst/>
+          </a:prstGeom>
+          <a:solidFill>
+            <a:srgbClr val="6D2E46"/>
+          </a:solidFill>
+          <a:ln>
+            <a:noFill/>
+          </a:ln>
+          <a:effectLst/>
+        </p:spPr>
+        <p:style>
+          <a:lnRef idx="1">
+            <a:schemeClr val="accent1"/>
+          </a:lnRef>
+          <a:fillRef idx="3">
+            <a:schemeClr val="accent1"/>
+          </a:fillRef>
+          <a:effectRef idx="2">
+            <a:schemeClr val="accent1"/>
+          </a:effectRef>
+          <a:fontRef idx="minor">
+            <a:schemeClr val="lt1"/>
+          </a:fontRef>
+        </p:style>
+        <p:txBody>
+          <a:bodyPr rtlCol="0" anchor="ctr"/>
+          <a:lstStyle/>
+          <a:p>
+            <a:pPr algn="ctr"/>
+          </a:p>
+        </p:txBody>
+      </p:sp>
+      <p:sp>
+        <p:nvSpPr>
+          <p:cNvPr id="12" name="TextBox 11"/>
+          <p:cNvSpPr txBox="1"/>
+          <p:nvPr/>
+        </p:nvSpPr>
+        <p:spPr>
+          <a:xfrm>
+            <a:off x="6629400" y="2057400"/>
+            <a:ext cx="4846320" cy="566928"/>
+          </a:xfrm>
+          <a:prstGeom prst="rect">
+            <a:avLst/>
+          </a:prstGeom>
+          <a:noFill/>
+        </p:spPr>
+        <p:txBody>
+          <a:bodyPr wrap="square" anchor="ctr">
+            <a:spAutoFit/>
+          </a:bodyPr>
+          <a:lstStyle/>
+          <a:p>
+            <a:pPr algn="l">
+              <a:spcAft>
+                <a:spcPts val="100"/>
+              </a:spcAft>
+            </a:pPr>
+            <a:r>
+              <a:rPr sz="1700" b="1">
+                <a:solidFill>
+                  <a:srgbClr val="FFFFFF"/>
+                </a:solidFill>
+                <a:latin typeface="Calibri"/>
+              </a:rPr>
+              <a:t>2 · Así quedó, generado por la IA</a:t>
+            </a:r>
+          </a:p>
+          <a:p>
+            <a:pPr algn="l">
+              <a:spcAft>
+                <a:spcPts val="100"/>
+              </a:spcAft>
+            </a:pPr>
+            <a:r>
+              <a:rPr sz="1200" b="0">
+                <a:solidFill>
+                  <a:srgbClr val="FDF6EC"/>
+                </a:solidFill>
+                <a:latin typeface="Calibri"/>
+              </a:rPr>
+              <a:t>Captura real de la app</a:t>
+            </a:r>
+          </a:p>
+        </p:txBody>
+      </p:sp>
+      <p:sp>
+        <p:nvSpPr>
+          <p:cNvPr id="13" name="Rounded Rectangle 12"/>
+          <p:cNvSpPr/>
+          <p:nvPr/>
+        </p:nvSpPr>
+        <p:spPr>
+          <a:xfrm>
+            <a:off x="6327648" y="3011980"/>
+            <a:ext cx="5440680" cy="3028599"/>
+          </a:xfrm>
+          <a:prstGeom prst="roundRect">
+            <a:avLst/>
+          </a:prstGeom>
+          <a:solidFill>
+            <a:srgbClr val="FFFFFF"/>
+          </a:solidFill>
+          <a:ln w="15240">
+            <a:solidFill>
+              <a:srgbClr val="6D2E46"/>
+            </a:solidFill>
+          </a:ln>
+          <a:effectLst/>
+        </p:spPr>
+        <p:style>
+          <a:lnRef idx="1">
+            <a:schemeClr val="accent1"/>
+          </a:lnRef>
+          <a:fillRef idx="3">
+            <a:schemeClr val="accent1"/>
+          </a:fillRef>
+          <a:effectRef idx="2">
+            <a:schemeClr val="accent1"/>
+          </a:effectRef>
+          <a:fontRef idx="minor">
+            <a:schemeClr val="lt1"/>
+          </a:fontRef>
+        </p:style>
+        <p:txBody>
+          <a:bodyPr rtlCol="0" anchor="ctr"/>
+          <a:lstStyle/>
+          <a:p>
+            <a:pPr algn="ctr"/>
+          </a:p>
+        </p:txBody>
+      </p:sp>
+      <p:pic>
+        <p:nvPicPr>
+          <p:cNvPr id="14" name="Picture 13" descr="ruta-real.png"/>
+          <p:cNvPicPr>
+            <a:picLocks noChangeAspect="1"/>
+          </p:cNvPicPr>
+          <p:nvPr/>
+        </p:nvPicPr>
+        <p:blipFill>
+          <a:blip r:embed="rId3"/>
+          <a:stretch>
+            <a:fillRect/>
+          </a:stretch>
+        </p:blipFill>
+        <p:spPr>
+          <a:xfrm>
+            <a:off x="6373368" y="3057700"/>
+            <a:ext cx="5349240" cy="2937159"/>
+          </a:xfrm>
+          <a:prstGeom prst="rect">
+            <a:avLst/>
+          </a:prstGeom>
+        </p:spPr>
+      </p:pic>
+      <p:sp>
+        <p:nvSpPr>
+          <p:cNvPr id="15" name="TextBox 14"/>
+          <p:cNvSpPr txBox="1"/>
+          <p:nvPr/>
+        </p:nvSpPr>
+        <p:spPr>
+          <a:xfrm>
+            <a:off x="6373368" y="6263640"/>
+            <a:ext cx="5349240" cy="457200"/>
+          </a:xfrm>
+          <a:prstGeom prst="rect">
+            <a:avLst/>
+          </a:prstGeom>
+          <a:noFill/>
+        </p:spPr>
+        <p:txBody>
+          <a:bodyPr wrap="square" anchor="t">
+            <a:spAutoFit/>
+          </a:bodyPr>
+          <a:lstStyle/>
+          <a:p>
+            <a:pPr algn="ctr">
+              <a:spcAft>
+                <a:spcPts val="600"/>
+              </a:spcAft>
+            </a:pPr>
+            <a:r>
+              <a:rPr sz="1300" b="1">
+                <a:solidFill>
+                  <a:srgbClr val="6D2E46"/>
+                </a:solidFill>
+                <a:latin typeface="Calibri"/>
+              </a:rPr>
+              <a:t>La app generada por la IA en AI Studio</a:t>
+            </a:r>
+          </a:p>
+        </p:txBody>
+      </p:sp>
+    </p:spTree>
+  </p:cSld>
+  <p:clrMapOvr>
+    <a:masterClrMapping/>
+  </p:clrMapOvr>
+</p:sld>
+</file>
+
+<file path=ppt/slides/slide15.xml><?xml version="1.0" encoding="utf-8"?>
+<p:sld xmlns:a="http://schemas.openxmlformats.org/drawingml/2006/main" xmlns:p="http://schemas.openxmlformats.org/presentationml/2006/main" xmlns:r="http://schemas.openxmlformats.org/officeDocument/2006/relationships">
+  <p:cSld>
+    <p:bg>
+      <p:bgPr>
+        <a:solidFill>
+          <a:srgbClr val="FDF6EC"/>
+        </a:solidFill>
+        <a:effectLst/>
+      </p:bgPr>
+    </p:bg>
+    <p:spTree>
+      <p:nvGrpSpPr>
+        <p:cNvPr id="1" name=""/>
+        <p:cNvGrpSpPr/>
+        <p:nvPr/>
+      </p:nvGrpSpPr>
+      <p:grpSpPr/>
+      <p:sp>
+        <p:nvSpPr>
+          <p:cNvPr id="2" name="Rounded Rectangle 1"/>
+          <p:cNvSpPr/>
+          <p:nvPr/>
+        </p:nvSpPr>
+        <p:spPr>
+          <a:xfrm>
+            <a:off x="640080" y="640080"/>
+            <a:ext cx="10908792" cy="5577840"/>
+          </a:xfrm>
+          <a:prstGeom prst="roundRect">
+            <a:avLst/>
+          </a:prstGeom>
+          <a:solidFill>
+            <a:srgbClr val="FFFFFF"/>
+          </a:solidFill>
+          <a:ln w="15240">
+            <a:solidFill>
+              <a:srgbClr val="EADDC8"/>
+            </a:solidFill>
+          </a:ln>
+          <a:effectLst/>
+        </p:spPr>
+        <p:style>
+          <a:lnRef idx="1">
+            <a:schemeClr val="accent1"/>
+          </a:lnRef>
+          <a:fillRef idx="3">
+            <a:schemeClr val="accent1"/>
+          </a:fillRef>
+          <a:effectRef idx="2">
+            <a:schemeClr val="accent1"/>
+          </a:effectRef>
+          <a:fontRef idx="minor">
+            <a:schemeClr val="lt1"/>
+          </a:fontRef>
+        </p:style>
+        <p:txBody>
+          <a:bodyPr rtlCol="0" anchor="ctr"/>
+          <a:lstStyle/>
+          <a:p>
+            <a:pPr algn="ctr"/>
+          </a:p>
+        </p:txBody>
+      </p:sp>
+      <p:sp>
+        <p:nvSpPr>
+          <p:cNvPr id="3" name="Rectangle 2"/>
+          <p:cNvSpPr/>
+          <p:nvPr/>
+        </p:nvSpPr>
+        <p:spPr>
+          <a:xfrm>
+            <a:off x="640080" y="640080"/>
+            <a:ext cx="201168" cy="5577840"/>
+          </a:xfrm>
+          <a:prstGeom prst="rect">
+            <a:avLst/>
+          </a:prstGeom>
+          <a:solidFill>
+            <a:srgbClr val="E3B23C"/>
+          </a:solidFill>
+          <a:ln>
+            <a:noFill/>
+          </a:ln>
+          <a:effectLst/>
+        </p:spPr>
+        <p:style>
+          <a:lnRef idx="1">
+            <a:schemeClr val="accent1"/>
+          </a:lnRef>
+          <a:fillRef idx="3">
+            <a:schemeClr val="accent1"/>
+          </a:fillRef>
+          <a:effectRef idx="2">
+            <a:schemeClr val="accent1"/>
+          </a:effectRef>
+          <a:fontRef idx="minor">
+            <a:schemeClr val="lt1"/>
+          </a:fontRef>
+        </p:style>
+        <p:txBody>
+          <a:bodyPr rtlCol="0" anchor="ctr"/>
+          <a:lstStyle/>
+          <a:p>
+            <a:pPr algn="ctr"/>
+          </a:p>
+        </p:txBody>
+      </p:sp>
+      <p:sp>
+        <p:nvSpPr>
+          <p:cNvPr id="4" name="TextBox 3"/>
+          <p:cNvSpPr txBox="1"/>
+          <p:nvPr/>
+        </p:nvSpPr>
+        <p:spPr>
+          <a:xfrm>
+            <a:off x="1051560" y="960120"/>
+            <a:ext cx="10058400" cy="457200"/>
+          </a:xfrm>
+          <a:prstGeom prst="rect">
+            <a:avLst/>
+          </a:prstGeom>
+          <a:noFill/>
+        </p:spPr>
+        <p:txBody>
+          <a:bodyPr wrap="square" anchor="t">
+            <a:spAutoFit/>
+          </a:bodyPr>
+          <a:lstStyle/>
+          <a:p>
+            <a:pPr algn="l">
+              <a:spcAft>
+                <a:spcPts val="600"/>
+              </a:spcAft>
+            </a:pPr>
+            <a:r>
+              <a:rPr sz="2000" b="1">
+                <a:solidFill>
+                  <a:srgbClr val="C84B31"/>
+                </a:solidFill>
+                <a:latin typeface="Calibri"/>
+              </a:rPr>
+              <a:t>LABORATORIO DE HOY</a:t>
+            </a:r>
+          </a:p>
+        </p:txBody>
+      </p:sp>
+      <p:sp>
+        <p:nvSpPr>
+          <p:cNvPr id="5" name="TextBox 4"/>
+          <p:cNvSpPr txBox="1"/>
+          <p:nvPr/>
+        </p:nvSpPr>
+        <p:spPr>
+          <a:xfrm>
+            <a:off x="1051560" y="1463040"/>
+            <a:ext cx="10058400" cy="914400"/>
+          </a:xfrm>
+          <a:prstGeom prst="rect">
+            <a:avLst/>
+          </a:prstGeom>
+          <a:noFill/>
+        </p:spPr>
+        <p:txBody>
+          <a:bodyPr wrap="square" anchor="t">
+            <a:spAutoFit/>
+          </a:bodyPr>
+          <a:lstStyle/>
+          <a:p>
+            <a:pPr algn="l">
+              <a:spcAft>
+                <a:spcPts val="600"/>
+              </a:spcAft>
+            </a:pPr>
+            <a:r>
+              <a:rPr sz="3400" b="1">
+                <a:solidFill>
+                  <a:srgbClr val="6D2E46"/>
+                </a:solidFill>
+                <a:latin typeface="Calibri"/>
+              </a:rPr>
+              <a:t>Laboratorio 1 — Tu primera app en AI Studio</a:t>
+            </a:r>
+          </a:p>
+        </p:txBody>
+      </p:sp>
+      <p:sp>
+        <p:nvSpPr>
+          <p:cNvPr id="6" name="TextBox 5"/>
+          <p:cNvSpPr txBox="1"/>
+          <p:nvPr/>
+        </p:nvSpPr>
+        <p:spPr>
+          <a:xfrm>
+            <a:off x="1097280" y="2606040"/>
+            <a:ext cx="9875520" cy="3383280"/>
+          </a:xfrm>
+          <a:prstGeom prst="rect">
+            <a:avLst/>
+          </a:prstGeom>
+          <a:noFill/>
+        </p:spPr>
+        <p:txBody>
+          <a:bodyPr wrap="square">
+            <a:spAutoFit/>
+          </a:bodyPr>
+          <a:lstStyle/>
+          <a:p>
+            <a:pPr>
+              <a:spcAft>
+                <a:spcPts val="1500"/>
+              </a:spcAft>
+            </a:pPr>
+            <a:r>
+              <a:rPr sz="2300">
+                <a:solidFill>
+                  <a:srgbClr val="2B2B2B"/>
+                </a:solidFill>
+                <a:latin typeface="Calibri"/>
+              </a:rPr>
+              <a:t>•  Crea una app nueva en AI Studio (modo Build)</a:t>
+            </a:r>
+          </a:p>
+          <a:p>
+            <a:pPr>
+              <a:spcAft>
+                <a:spcPts val="1500"/>
+              </a:spcAft>
+            </a:pPr>
+            <a:r>
+              <a:rPr sz="2300">
+                <a:solidFill>
+                  <a:srgbClr val="2B2B2B"/>
+                </a:solidFill>
+                <a:latin typeface="Calibri"/>
+              </a:rPr>
+              <a:t>•  Pega el prompt inicial de "Ruta del Café"</a:t>
+            </a:r>
+          </a:p>
+          <a:p>
+            <a:pPr>
+              <a:spcAft>
+                <a:spcPts val="1500"/>
+              </a:spcAft>
+            </a:pPr>
+            <a:r>
+              <a:rPr sz="2300">
+                <a:solidFill>
+                  <a:srgbClr val="2B2B2B"/>
+                </a:solidFill>
+                <a:latin typeface="Calibri"/>
+              </a:rPr>
+              <a:t>•  Verifica el encabezado y las tarjetas de cafeterías</a:t>
+            </a:r>
+          </a:p>
+          <a:p>
+            <a:pPr>
+              <a:spcAft>
+                <a:spcPts val="1500"/>
+              </a:spcAft>
+            </a:pPr>
+            <a:r>
+              <a:rPr sz="2300">
+                <a:solidFill>
+                  <a:srgbClr val="2B2B2B"/>
+                </a:solidFill>
+                <a:latin typeface="Calibri"/>
+              </a:rPr>
+              <a:t>•  Crea un checkpoint y aplica el refinamiento de colores</a:t>
+            </a:r>
+          </a:p>
+          <a:p>
+            <a:pPr>
+              <a:spcAft>
+                <a:spcPts val="1500"/>
+              </a:spcAft>
+            </a:pPr>
+            <a:r>
+              <a:rPr sz="2300">
+                <a:solidFill>
+                  <a:srgbClr val="2B2B2B"/>
+                </a:solidFill>
+                <a:latin typeface="Calibri"/>
+              </a:rPr>
+              <a:t>•  Usa View diff para ver el cambio</a:t>
+            </a:r>
+          </a:p>
+        </p:txBody>
+      </p:sp>
+    </p:spTree>
+  </p:cSld>
+  <p:clrMapOvr>
+    <a:masterClrMapping/>
+  </p:clrMapOvr>
+</p:sld>
+</file>
+
+<file path=ppt/slides/slide16.xml><?xml version="1.0" encoding="utf-8"?>
+<p:sld xmlns:a="http://schemas.openxmlformats.org/drawingml/2006/main" xmlns:p="http://schemas.openxmlformats.org/presentationml/2006/main" xmlns:r="http://schemas.openxmlformats.org/officeDocument/2006/relationships">
+  <p:cSld>
+    <p:bg>
+      <p:bgPr>
+        <a:solidFill>
+          <a:srgbClr val="FDF6EC"/>
+        </a:solidFill>
+        <a:effectLst/>
+      </p:bgPr>
+    </p:bg>
+    <p:spTree>
+      <p:nvGrpSpPr>
+        <p:cNvPr id="1" name=""/>
+        <p:cNvGrpSpPr/>
+        <p:nvPr/>
+      </p:nvGrpSpPr>
+      <p:grpSpPr/>
+      <p:sp>
+        <p:nvSpPr>
+          <p:cNvPr id="2" name="Rectangle 1"/>
+          <p:cNvSpPr/>
+          <p:nvPr/>
+        </p:nvSpPr>
+        <p:spPr>
+          <a:xfrm>
+            <a:off x="0" y="0"/>
+            <a:ext cx="12191695" cy="146304"/>
+          </a:xfrm>
+          <a:prstGeom prst="rect">
+            <a:avLst/>
+          </a:prstGeom>
+          <a:solidFill>
             <a:srgbClr val="6D2E46"/>
           </a:solidFill>
           <a:ln>
@@ -5055,7 +8773,7 @@
                 </a:solidFill>
                 <a:latin typeface="Calibri"/>
               </a:rPr>
-              <a:t>•  Se evalúa en el Demo Day (sesión 10)</a:t>
+              <a:t>•  Se entrega y se muestra en el Demo Day (sesión 10)</a:t>
             </a:r>
           </a:p>
         </p:txBody>
@@ -5707,7 +9425,7 @@
             <a:avLst/>
           </a:prstGeom>
           <a:solidFill>
-            <a:srgbClr val="4F772D"/>
+            <a:srgbClr val="C84B31"/>
           </a:solidFill>
           <a:ln>
             <a:noFill/>
@@ -5770,7 +9488,7 @@
                 </a:solidFill>
                 <a:latin typeface="Calibri"/>
               </a:rPr>
-              <a:t>FLUJO DE TRABAJO</a:t>
+              <a:t>OPCIONAL Y MUY SIMPLE</a:t>
             </a:r>
           </a:p>
         </p:txBody>
@@ -5809,7 +9527,7 @@
                 </a:solidFill>
                 <a:latin typeface="Calibri"/>
               </a:rPr>
-              <a:t>Cómo se dirige a la IA</a:t>
+              <a:t>GitHub: guardar y compartir tu trabajo</a:t>
             </a:r>
           </a:p>
         </p:txBody>
@@ -5860,104 +9578,14 @@
       </p:sp>
       <p:sp>
         <p:nvSpPr>
-          <p:cNvPr id="6" name="Rounded Rectangle 5"/>
-          <p:cNvSpPr/>
-          <p:nvPr/>
-        </p:nvSpPr>
-        <p:spPr>
-          <a:xfrm>
-            <a:off x="822960" y="3017520"/>
-            <a:ext cx="2274570" cy="1920240"/>
-          </a:xfrm>
-          <a:prstGeom prst="roundRect">
-            <a:avLst/>
-          </a:prstGeom>
-          <a:solidFill>
-            <a:srgbClr val="FFFFFF"/>
-          </a:solidFill>
-          <a:ln w="15240">
-            <a:solidFill>
-              <a:srgbClr val="EADDC8"/>
-            </a:solidFill>
-          </a:ln>
-          <a:effectLst/>
-        </p:spPr>
-        <p:style>
-          <a:lnRef idx="1">
-            <a:schemeClr val="accent1"/>
-          </a:lnRef>
-          <a:fillRef idx="3">
-            <a:schemeClr val="accent1"/>
-          </a:fillRef>
-          <a:effectRef idx="2">
-            <a:schemeClr val="accent1"/>
-          </a:effectRef>
-          <a:fontRef idx="minor">
-            <a:schemeClr val="lt1"/>
-          </a:fontRef>
-        </p:style>
-        <p:txBody>
-          <a:bodyPr rtlCol="0" anchor="ctr"/>
-          <a:lstStyle/>
-          <a:p>
-            <a:pPr algn="ctr"/>
-          </a:p>
-        </p:txBody>
-      </p:sp>
-      <p:sp>
-        <p:nvSpPr>
-          <p:cNvPr id="7" name="Rectangle 6"/>
-          <p:cNvSpPr/>
-          <p:nvPr/>
-        </p:nvSpPr>
-        <p:spPr>
-          <a:xfrm>
-            <a:off x="822960" y="3017520"/>
-            <a:ext cx="2274570" cy="128016"/>
-          </a:xfrm>
-          <a:prstGeom prst="rect">
-            <a:avLst/>
-          </a:prstGeom>
-          <a:solidFill>
-            <a:srgbClr val="6D2E46"/>
-          </a:solidFill>
-          <a:ln>
-            <a:noFill/>
-          </a:ln>
-          <a:effectLst/>
-        </p:spPr>
-        <p:style>
-          <a:lnRef idx="1">
-            <a:schemeClr val="accent1"/>
-          </a:lnRef>
-          <a:fillRef idx="3">
-            <a:schemeClr val="accent1"/>
-          </a:fillRef>
-          <a:effectRef idx="2">
-            <a:schemeClr val="accent1"/>
-          </a:effectRef>
-          <a:fontRef idx="minor">
-            <a:schemeClr val="lt1"/>
-          </a:fontRef>
-        </p:style>
-        <p:txBody>
-          <a:bodyPr rtlCol="0" anchor="ctr"/>
-          <a:lstStyle/>
-          <a:p>
-            <a:pPr algn="ctr"/>
-          </a:p>
-        </p:txBody>
-      </p:sp>
-      <p:sp>
-        <p:nvSpPr>
-          <p:cNvPr id="8" name="TextBox 7"/>
+          <p:cNvPr id="6" name="TextBox 5"/>
           <p:cNvSpPr txBox="1"/>
           <p:nvPr/>
         </p:nvSpPr>
         <p:spPr>
           <a:xfrm>
-            <a:off x="960120" y="3474720"/>
-            <a:ext cx="2000250" cy="1280160"/>
+            <a:off x="896112" y="2103120"/>
+            <a:ext cx="10515600" cy="4480560"/>
           </a:xfrm>
           <a:prstGeom prst="rect">
             <a:avLst/>
@@ -5965,646 +9593,72 @@
           <a:noFill/>
         </p:spPr>
         <p:txBody>
-          <a:bodyPr wrap="square" anchor="ctr">
+          <a:bodyPr wrap="square">
             <a:spAutoFit/>
           </a:bodyPr>
           <a:lstStyle/>
           <a:p>
-            <a:pPr algn="ctr">
-              <a:spcAft>
-                <a:spcPts val="600"/>
-              </a:spcAft>
-            </a:pPr>
-            <a:r>
-              <a:rPr sz="1900" b="1">
-                <a:solidFill>
-                  <a:srgbClr val="6D2E46"/>
-                </a:solidFill>
-                <a:latin typeface="Calibri"/>
-              </a:rPr>
-              <a:t>Prompt inicial</a:t>
-            </a:r>
-          </a:p>
-          <a:p>
-            <a:pPr algn="ctr">
-              <a:spcAft>
-                <a:spcPts val="600"/>
-              </a:spcAft>
-            </a:pPr>
-            <a:r>
-              <a:rPr sz="1400" b="0">
-                <a:solidFill>
-                  <a:srgbClr val="8A7C70"/>
-                </a:solidFill>
-                <a:latin typeface="Calibri"/>
-              </a:rPr>
-              <a:t>detallado</a:t>
-            </a:r>
-          </a:p>
-        </p:txBody>
-      </p:sp>
-      <p:sp>
-        <p:nvSpPr>
-          <p:cNvPr id="9" name="Right Arrow 8"/>
-          <p:cNvSpPr/>
-          <p:nvPr/>
-        </p:nvSpPr>
-        <p:spPr>
-          <a:xfrm>
-            <a:off x="3152394" y="3776472"/>
-            <a:ext cx="393192" cy="402336"/>
-          </a:xfrm>
-          <a:prstGeom prst="rightArrow">
-            <a:avLst/>
-          </a:prstGeom>
-          <a:solidFill>
-            <a:srgbClr val="E3B23C"/>
-          </a:solidFill>
-          <a:ln>
-            <a:noFill/>
-          </a:ln>
-          <a:effectLst/>
-        </p:spPr>
-        <p:style>
-          <a:lnRef idx="1">
-            <a:schemeClr val="accent1"/>
-          </a:lnRef>
-          <a:fillRef idx="3">
-            <a:schemeClr val="accent1"/>
-          </a:fillRef>
-          <a:effectRef idx="2">
-            <a:schemeClr val="accent1"/>
-          </a:effectRef>
-          <a:fontRef idx="minor">
-            <a:schemeClr val="lt1"/>
-          </a:fontRef>
-        </p:style>
-        <p:txBody>
-          <a:bodyPr rtlCol="0" anchor="ctr"/>
-          <a:lstStyle/>
-          <a:p>
-            <a:pPr algn="ctr"/>
-          </a:p>
-        </p:txBody>
-      </p:sp>
-      <p:sp>
-        <p:nvSpPr>
-          <p:cNvPr id="10" name="Rounded Rectangle 9"/>
-          <p:cNvSpPr/>
-          <p:nvPr/>
-        </p:nvSpPr>
-        <p:spPr>
-          <a:xfrm>
-            <a:off x="3600450" y="3017520"/>
-            <a:ext cx="2274570" cy="1920240"/>
-          </a:xfrm>
-          <a:prstGeom prst="roundRect">
-            <a:avLst/>
-          </a:prstGeom>
-          <a:solidFill>
-            <a:srgbClr val="FFFFFF"/>
-          </a:solidFill>
-          <a:ln w="15240">
-            <a:solidFill>
-              <a:srgbClr val="EADDC8"/>
-            </a:solidFill>
-          </a:ln>
-          <a:effectLst/>
-        </p:spPr>
-        <p:style>
-          <a:lnRef idx="1">
-            <a:schemeClr val="accent1"/>
-          </a:lnRef>
-          <a:fillRef idx="3">
-            <a:schemeClr val="accent1"/>
-          </a:fillRef>
-          <a:effectRef idx="2">
-            <a:schemeClr val="accent1"/>
-          </a:effectRef>
-          <a:fontRef idx="minor">
-            <a:schemeClr val="lt1"/>
-          </a:fontRef>
-        </p:style>
-        <p:txBody>
-          <a:bodyPr rtlCol="0" anchor="ctr"/>
-          <a:lstStyle/>
-          <a:p>
-            <a:pPr algn="ctr"/>
-          </a:p>
-        </p:txBody>
-      </p:sp>
-      <p:sp>
-        <p:nvSpPr>
-          <p:cNvPr id="11" name="Rectangle 10"/>
-          <p:cNvSpPr/>
-          <p:nvPr/>
-        </p:nvSpPr>
-        <p:spPr>
-          <a:xfrm>
-            <a:off x="3600450" y="3017520"/>
-            <a:ext cx="2274570" cy="128016"/>
-          </a:xfrm>
-          <a:prstGeom prst="rect">
-            <a:avLst/>
-          </a:prstGeom>
-          <a:solidFill>
-            <a:srgbClr val="C84B31"/>
-          </a:solidFill>
-          <a:ln>
-            <a:noFill/>
-          </a:ln>
-          <a:effectLst/>
-        </p:spPr>
-        <p:style>
-          <a:lnRef idx="1">
-            <a:schemeClr val="accent1"/>
-          </a:lnRef>
-          <a:fillRef idx="3">
-            <a:schemeClr val="accent1"/>
-          </a:fillRef>
-          <a:effectRef idx="2">
-            <a:schemeClr val="accent1"/>
-          </a:effectRef>
-          <a:fontRef idx="minor">
-            <a:schemeClr val="lt1"/>
-          </a:fontRef>
-        </p:style>
-        <p:txBody>
-          <a:bodyPr rtlCol="0" anchor="ctr"/>
-          <a:lstStyle/>
-          <a:p>
-            <a:pPr algn="ctr"/>
-          </a:p>
-        </p:txBody>
-      </p:sp>
-      <p:sp>
-        <p:nvSpPr>
-          <p:cNvPr id="12" name="TextBox 11"/>
-          <p:cNvSpPr txBox="1"/>
-          <p:nvPr/>
-        </p:nvSpPr>
-        <p:spPr>
-          <a:xfrm>
-            <a:off x="3737610" y="3474720"/>
-            <a:ext cx="2000250" cy="1280160"/>
-          </a:xfrm>
-          <a:prstGeom prst="rect">
-            <a:avLst/>
-          </a:prstGeom>
-          <a:noFill/>
-        </p:spPr>
-        <p:txBody>
-          <a:bodyPr wrap="square" anchor="ctr">
-            <a:spAutoFit/>
-          </a:bodyPr>
-          <a:lstStyle/>
-          <a:p>
-            <a:pPr algn="ctr">
-              <a:spcAft>
-                <a:spcPts val="600"/>
-              </a:spcAft>
-            </a:pPr>
-            <a:r>
-              <a:rPr sz="1900" b="1">
-                <a:solidFill>
-                  <a:srgbClr val="6D2E46"/>
-                </a:solidFill>
-                <a:latin typeface="Calibri"/>
-              </a:rPr>
-              <a:t>Vista previa</a:t>
-            </a:r>
-          </a:p>
-          <a:p>
-            <a:pPr algn="ctr">
-              <a:spcAft>
-                <a:spcPts val="600"/>
-              </a:spcAft>
-            </a:pPr>
-            <a:r>
-              <a:rPr sz="1400" b="0">
-                <a:solidFill>
-                  <a:srgbClr val="8A7C70"/>
-                </a:solidFill>
-                <a:latin typeface="Calibri"/>
-              </a:rPr>
-              <a:t>revisar</a:t>
-            </a:r>
-          </a:p>
-        </p:txBody>
-      </p:sp>
-      <p:sp>
-        <p:nvSpPr>
-          <p:cNvPr id="13" name="Right Arrow 12"/>
-          <p:cNvSpPr/>
-          <p:nvPr/>
-        </p:nvSpPr>
-        <p:spPr>
-          <a:xfrm>
-            <a:off x="5929884" y="3776472"/>
-            <a:ext cx="393192" cy="402336"/>
-          </a:xfrm>
-          <a:prstGeom prst="rightArrow">
-            <a:avLst/>
-          </a:prstGeom>
-          <a:solidFill>
-            <a:srgbClr val="E3B23C"/>
-          </a:solidFill>
-          <a:ln>
-            <a:noFill/>
-          </a:ln>
-          <a:effectLst/>
-        </p:spPr>
-        <p:style>
-          <a:lnRef idx="1">
-            <a:schemeClr val="accent1"/>
-          </a:lnRef>
-          <a:fillRef idx="3">
-            <a:schemeClr val="accent1"/>
-          </a:fillRef>
-          <a:effectRef idx="2">
-            <a:schemeClr val="accent1"/>
-          </a:effectRef>
-          <a:fontRef idx="minor">
-            <a:schemeClr val="lt1"/>
-          </a:fontRef>
-        </p:style>
-        <p:txBody>
-          <a:bodyPr rtlCol="0" anchor="ctr"/>
-          <a:lstStyle/>
-          <a:p>
-            <a:pPr algn="ctr"/>
-          </a:p>
-        </p:txBody>
-      </p:sp>
-      <p:sp>
-        <p:nvSpPr>
-          <p:cNvPr id="14" name="Rounded Rectangle 13"/>
-          <p:cNvSpPr/>
-          <p:nvPr/>
-        </p:nvSpPr>
-        <p:spPr>
-          <a:xfrm>
-            <a:off x="6377940" y="3017520"/>
-            <a:ext cx="2274570" cy="1920240"/>
-          </a:xfrm>
-          <a:prstGeom prst="roundRect">
-            <a:avLst/>
-          </a:prstGeom>
-          <a:solidFill>
-            <a:srgbClr val="FFFFFF"/>
-          </a:solidFill>
-          <a:ln w="15240">
-            <a:solidFill>
-              <a:srgbClr val="EADDC8"/>
-            </a:solidFill>
-          </a:ln>
-          <a:effectLst/>
-        </p:spPr>
-        <p:style>
-          <a:lnRef idx="1">
-            <a:schemeClr val="accent1"/>
-          </a:lnRef>
-          <a:fillRef idx="3">
-            <a:schemeClr val="accent1"/>
-          </a:fillRef>
-          <a:effectRef idx="2">
-            <a:schemeClr val="accent1"/>
-          </a:effectRef>
-          <a:fontRef idx="minor">
-            <a:schemeClr val="lt1"/>
-          </a:fontRef>
-        </p:style>
-        <p:txBody>
-          <a:bodyPr rtlCol="0" anchor="ctr"/>
-          <a:lstStyle/>
-          <a:p>
-            <a:pPr algn="ctr"/>
-          </a:p>
-        </p:txBody>
-      </p:sp>
-      <p:sp>
-        <p:nvSpPr>
-          <p:cNvPr id="15" name="Rectangle 14"/>
-          <p:cNvSpPr/>
-          <p:nvPr/>
-        </p:nvSpPr>
-        <p:spPr>
-          <a:xfrm>
-            <a:off x="6377940" y="3017520"/>
-            <a:ext cx="2274570" cy="128016"/>
-          </a:xfrm>
-          <a:prstGeom prst="rect">
-            <a:avLst/>
-          </a:prstGeom>
-          <a:solidFill>
-            <a:srgbClr val="4F772D"/>
-          </a:solidFill>
-          <a:ln>
-            <a:noFill/>
-          </a:ln>
-          <a:effectLst/>
-        </p:spPr>
-        <p:style>
-          <a:lnRef idx="1">
-            <a:schemeClr val="accent1"/>
-          </a:lnRef>
-          <a:fillRef idx="3">
-            <a:schemeClr val="accent1"/>
-          </a:fillRef>
-          <a:effectRef idx="2">
-            <a:schemeClr val="accent1"/>
-          </a:effectRef>
-          <a:fontRef idx="minor">
-            <a:schemeClr val="lt1"/>
-          </a:fontRef>
-        </p:style>
-        <p:txBody>
-          <a:bodyPr rtlCol="0" anchor="ctr"/>
-          <a:lstStyle/>
-          <a:p>
-            <a:pPr algn="ctr"/>
-          </a:p>
-        </p:txBody>
-      </p:sp>
-      <p:sp>
-        <p:nvSpPr>
-          <p:cNvPr id="16" name="TextBox 15"/>
-          <p:cNvSpPr txBox="1"/>
-          <p:nvPr/>
-        </p:nvSpPr>
-        <p:spPr>
-          <a:xfrm>
-            <a:off x="6515100" y="3474720"/>
-            <a:ext cx="2000250" cy="1280160"/>
-          </a:xfrm>
-          <a:prstGeom prst="rect">
-            <a:avLst/>
-          </a:prstGeom>
-          <a:noFill/>
-        </p:spPr>
-        <p:txBody>
-          <a:bodyPr wrap="square" anchor="ctr">
-            <a:spAutoFit/>
-          </a:bodyPr>
-          <a:lstStyle/>
-          <a:p>
-            <a:pPr algn="ctr">
-              <a:spcAft>
-                <a:spcPts val="600"/>
-              </a:spcAft>
-            </a:pPr>
-            <a:r>
-              <a:rPr sz="1900" b="1">
-                <a:solidFill>
-                  <a:srgbClr val="6D2E46"/>
-                </a:solidFill>
-                <a:latin typeface="Calibri"/>
-              </a:rPr>
-              <a:t>Refinar</a:t>
-            </a:r>
-          </a:p>
-          <a:p>
-            <a:pPr algn="ctr">
-              <a:spcAft>
-                <a:spcPts val="600"/>
-              </a:spcAft>
-            </a:pPr>
-            <a:r>
-              <a:rPr sz="1400" b="0">
-                <a:solidFill>
-                  <a:srgbClr val="8A7C70"/>
-                </a:solidFill>
-                <a:latin typeface="Calibri"/>
-              </a:rPr>
-              <a:t>un cambio</a:t>
-            </a:r>
-          </a:p>
-        </p:txBody>
-      </p:sp>
-      <p:sp>
-        <p:nvSpPr>
-          <p:cNvPr id="17" name="Right Arrow 16"/>
-          <p:cNvSpPr/>
-          <p:nvPr/>
-        </p:nvSpPr>
-        <p:spPr>
-          <a:xfrm>
-            <a:off x="8707374" y="3776472"/>
-            <a:ext cx="393192" cy="402336"/>
-          </a:xfrm>
-          <a:prstGeom prst="rightArrow">
-            <a:avLst/>
-          </a:prstGeom>
-          <a:solidFill>
-            <a:srgbClr val="E3B23C"/>
-          </a:solidFill>
-          <a:ln>
-            <a:noFill/>
-          </a:ln>
-          <a:effectLst/>
-        </p:spPr>
-        <p:style>
-          <a:lnRef idx="1">
-            <a:schemeClr val="accent1"/>
-          </a:lnRef>
-          <a:fillRef idx="3">
-            <a:schemeClr val="accent1"/>
-          </a:fillRef>
-          <a:effectRef idx="2">
-            <a:schemeClr val="accent1"/>
-          </a:effectRef>
-          <a:fontRef idx="minor">
-            <a:schemeClr val="lt1"/>
-          </a:fontRef>
-        </p:style>
-        <p:txBody>
-          <a:bodyPr rtlCol="0" anchor="ctr"/>
-          <a:lstStyle/>
-          <a:p>
-            <a:pPr algn="ctr"/>
-          </a:p>
-        </p:txBody>
-      </p:sp>
-      <p:sp>
-        <p:nvSpPr>
-          <p:cNvPr id="18" name="Rounded Rectangle 17"/>
-          <p:cNvSpPr/>
-          <p:nvPr/>
-        </p:nvSpPr>
-        <p:spPr>
-          <a:xfrm>
-            <a:off x="9155430" y="3017520"/>
-            <a:ext cx="2274570" cy="1920240"/>
-          </a:xfrm>
-          <a:prstGeom prst="roundRect">
-            <a:avLst/>
-          </a:prstGeom>
-          <a:solidFill>
-            <a:srgbClr val="FFFFFF"/>
-          </a:solidFill>
-          <a:ln w="15240">
-            <a:solidFill>
-              <a:srgbClr val="EADDC8"/>
-            </a:solidFill>
-          </a:ln>
-          <a:effectLst/>
-        </p:spPr>
-        <p:style>
-          <a:lnRef idx="1">
-            <a:schemeClr val="accent1"/>
-          </a:lnRef>
-          <a:fillRef idx="3">
-            <a:schemeClr val="accent1"/>
-          </a:fillRef>
-          <a:effectRef idx="2">
-            <a:schemeClr val="accent1"/>
-          </a:effectRef>
-          <a:fontRef idx="minor">
-            <a:schemeClr val="lt1"/>
-          </a:fontRef>
-        </p:style>
-        <p:txBody>
-          <a:bodyPr rtlCol="0" anchor="ctr"/>
-          <a:lstStyle/>
-          <a:p>
-            <a:pPr algn="ctr"/>
-          </a:p>
-        </p:txBody>
-      </p:sp>
-      <p:sp>
-        <p:nvSpPr>
-          <p:cNvPr id="19" name="Rectangle 18"/>
-          <p:cNvSpPr/>
-          <p:nvPr/>
-        </p:nvSpPr>
-        <p:spPr>
-          <a:xfrm>
-            <a:off x="9155430" y="3017520"/>
-            <a:ext cx="2274570" cy="128016"/>
-          </a:xfrm>
-          <a:prstGeom prst="rect">
-            <a:avLst/>
-          </a:prstGeom>
-          <a:solidFill>
-            <a:srgbClr val="3A6B7E"/>
-          </a:solidFill>
-          <a:ln>
-            <a:noFill/>
-          </a:ln>
-          <a:effectLst/>
-        </p:spPr>
-        <p:style>
-          <a:lnRef idx="1">
-            <a:schemeClr val="accent1"/>
-          </a:lnRef>
-          <a:fillRef idx="3">
-            <a:schemeClr val="accent1"/>
-          </a:fillRef>
-          <a:effectRef idx="2">
-            <a:schemeClr val="accent1"/>
-          </a:effectRef>
-          <a:fontRef idx="minor">
-            <a:schemeClr val="lt1"/>
-          </a:fontRef>
-        </p:style>
-        <p:txBody>
-          <a:bodyPr rtlCol="0" anchor="ctr"/>
-          <a:lstStyle/>
-          <a:p>
-            <a:pPr algn="ctr"/>
-          </a:p>
-        </p:txBody>
-      </p:sp>
-      <p:sp>
-        <p:nvSpPr>
-          <p:cNvPr id="20" name="TextBox 19"/>
-          <p:cNvSpPr txBox="1"/>
-          <p:nvPr/>
-        </p:nvSpPr>
-        <p:spPr>
-          <a:xfrm>
-            <a:off x="9292590" y="3474720"/>
-            <a:ext cx="2000250" cy="1280160"/>
-          </a:xfrm>
-          <a:prstGeom prst="rect">
-            <a:avLst/>
-          </a:prstGeom>
-          <a:noFill/>
-        </p:spPr>
-        <p:txBody>
-          <a:bodyPr wrap="square" anchor="ctr">
-            <a:spAutoFit/>
-          </a:bodyPr>
-          <a:lstStyle/>
-          <a:p>
-            <a:pPr algn="ctr">
-              <a:spcAft>
-                <a:spcPts val="600"/>
-              </a:spcAft>
-            </a:pPr>
-            <a:r>
-              <a:rPr sz="1900" b="1">
-                <a:solidFill>
-                  <a:srgbClr val="6D2E46"/>
-                </a:solidFill>
-                <a:latin typeface="Calibri"/>
-              </a:rPr>
-              <a:t>Checkpoint</a:t>
-            </a:r>
-          </a:p>
-          <a:p>
-            <a:pPr algn="ctr">
-              <a:spcAft>
-                <a:spcPts val="600"/>
-              </a:spcAft>
-            </a:pPr>
-            <a:r>
-              <a:rPr sz="1400" b="0">
-                <a:solidFill>
-                  <a:srgbClr val="8A7C70"/>
-                </a:solidFill>
-                <a:latin typeface="Calibri"/>
-              </a:rPr>
-              <a:t>guardar</a:t>
-            </a:r>
-          </a:p>
-        </p:txBody>
-      </p:sp>
-      <p:sp>
-        <p:nvSpPr>
-          <p:cNvPr id="21" name="TextBox 20"/>
-          <p:cNvSpPr txBox="1"/>
-          <p:nvPr/>
-        </p:nvSpPr>
-        <p:spPr>
-          <a:xfrm>
-            <a:off x="868680" y="5394960"/>
-            <a:ext cx="10424160" cy="731520"/>
-          </a:xfrm>
-          <a:prstGeom prst="rect">
-            <a:avLst/>
-          </a:prstGeom>
-          <a:noFill/>
-        </p:spPr>
-        <p:txBody>
-          <a:bodyPr wrap="square" anchor="t">
-            <a:spAutoFit/>
-          </a:bodyPr>
-          <a:lstStyle/>
-          <a:p>
-            <a:pPr algn="l">
-              <a:spcAft>
-                <a:spcPts val="600"/>
-              </a:spcAft>
-            </a:pPr>
-            <a:r>
-              <a:rPr sz="1700" b="0">
+            <a:pPr>
+              <a:spcAft>
+                <a:spcPts val="1500"/>
+              </a:spcAft>
+            </a:pPr>
+            <a:r>
+              <a:rPr sz="2300">
                 <a:solidFill>
                   <a:srgbClr val="2B2B2B"/>
                 </a:solidFill>
                 <a:latin typeface="Calibri"/>
               </a:rPr>
-              <a:t>Es un ciclo: revisas la vista previa, pides un cambio a la vez y guardas checkpoints. View diff te muestra qué cambió; regla de los 2 strikes si algo se atora.</a:t>
+              <a:t>•  Un repositorio (repo) es como una carpeta en la nube con el historial de tu proyecto</a:t>
+            </a:r>
+          </a:p>
+          <a:p>
+            <a:pPr>
+              <a:spcAft>
+                <a:spcPts val="1500"/>
+              </a:spcAft>
+            </a:pPr>
+            <a:r>
+              <a:rPr sz="2300">
+                <a:solidFill>
+                  <a:srgbClr val="2B2B2B"/>
+                </a:solidFill>
+                <a:latin typeface="Calibri"/>
+              </a:rPr>
+              <a:t>•  Sirve para guardar versiones, no perder trabajo y compartir con otras personas</a:t>
+            </a:r>
+          </a:p>
+          <a:p>
+            <a:pPr>
+              <a:spcAft>
+                <a:spcPts val="1500"/>
+              </a:spcAft>
+            </a:pPr>
+            <a:r>
+              <a:rPr sz="2300">
+                <a:solidFill>
+                  <a:srgbClr val="2B2B2B"/>
+                </a:solidFill>
+                <a:latin typeface="Calibri"/>
+              </a:rPr>
+              <a:t>•  AI Studio puede exportar tu app a GitHub con un clic (opcional en el curso)</a:t>
+            </a:r>
+          </a:p>
+          <a:p>
+            <a:pPr>
+              <a:spcAft>
+                <a:spcPts val="1500"/>
+              </a:spcAft>
+            </a:pPr>
+            <a:r>
+              <a:rPr sz="2300">
+                <a:solidFill>
+                  <a:srgbClr val="2B2B2B"/>
+                </a:solidFill>
+                <a:latin typeface="Calibri"/>
+              </a:rPr>
+              <a:t>•  Piénsalo como tu portafolio de código: tu app vive ahí y la puedes mostrar</a:t>
             </a:r>
           </a:p>
         </p:txBody>
@@ -6650,7 +9704,7 @@
             <a:avLst/>
           </a:prstGeom>
           <a:solidFill>
-            <a:srgbClr val="3A6B7E"/>
+            <a:srgbClr val="4F772D"/>
           </a:solidFill>
           <a:ln>
             <a:noFill/>
@@ -6713,7 +9767,7 @@
                 </a:solidFill>
                 <a:latin typeface="Calibri"/>
               </a:rPr>
-              <a:t>LOS DATOS</a:t>
+              <a:t>DEMO DEL DOCENTE · EN VIVO</a:t>
             </a:r>
           </a:p>
         </p:txBody>
@@ -6752,7 +9806,7 @@
                 </a:solidFill>
                 <a:latin typeface="Calibri"/>
               </a:rPr>
-              <a:t>Por qué móvil y por qué ahora</a:t>
+              <a:t>Antojitos Chapines</a:t>
             </a:r>
           </a:p>
         </p:txBody>
@@ -6809,8 +9863,201 @@
         </p:nvSpPr>
         <p:spPr>
           <a:xfrm>
-            <a:off x="868680" y="2057400"/>
-            <a:ext cx="5061204" cy="2084831"/>
+            <a:off x="896112" y="2148840"/>
+            <a:ext cx="6583680" cy="566928"/>
+          </a:xfrm>
+          <a:prstGeom prst="roundRect">
+            <a:avLst/>
+          </a:prstGeom>
+          <a:solidFill>
+            <a:srgbClr val="F6ECDD"/>
+          </a:solidFill>
+          <a:ln>
+            <a:noFill/>
+          </a:ln>
+          <a:effectLst/>
+        </p:spPr>
+        <p:style>
+          <a:lnRef idx="1">
+            <a:schemeClr val="accent1"/>
+          </a:lnRef>
+          <a:fillRef idx="3">
+            <a:schemeClr val="accent1"/>
+          </a:fillRef>
+          <a:effectRef idx="2">
+            <a:schemeClr val="accent1"/>
+          </a:effectRef>
+          <a:fontRef idx="minor">
+            <a:schemeClr val="lt1"/>
+          </a:fontRef>
+        </p:style>
+        <p:txBody>
+          <a:bodyPr rtlCol="0" anchor="ctr"/>
+          <a:lstStyle/>
+          <a:p>
+            <a:pPr algn="ctr"/>
+          </a:p>
+        </p:txBody>
+      </p:sp>
+      <p:sp>
+        <p:nvSpPr>
+          <p:cNvPr id="7" name="TextBox 6"/>
+          <p:cNvSpPr txBox="1"/>
+          <p:nvPr/>
+        </p:nvSpPr>
+        <p:spPr>
+          <a:xfrm>
+            <a:off x="1170432" y="2240280"/>
+            <a:ext cx="6035040" cy="457200"/>
+          </a:xfrm>
+          <a:prstGeom prst="rect">
+            <a:avLst/>
+          </a:prstGeom>
+          <a:noFill/>
+        </p:spPr>
+        <p:txBody>
+          <a:bodyPr wrap="square" anchor="ctr">
+            <a:spAutoFit/>
+          </a:bodyPr>
+          <a:lstStyle/>
+          <a:p>
+            <a:pPr algn="l">
+              <a:spcAft>
+                <a:spcPts val="600"/>
+              </a:spcAft>
+            </a:pPr>
+            <a:r>
+              <a:rPr sz="1700" b="1">
+                <a:solidFill>
+                  <a:srgbClr val="6D2E46"/>
+                </a:solidFill>
+                <a:latin typeface="Calibri"/>
+              </a:rPr>
+              <a:t>El docente la construye en vivo — no es tu entrega</a:t>
+            </a:r>
+          </a:p>
+        </p:txBody>
+      </p:sp>
+      <p:sp>
+        <p:nvSpPr>
+          <p:cNvPr id="8" name="TextBox 7"/>
+          <p:cNvSpPr txBox="1"/>
+          <p:nvPr/>
+        </p:nvSpPr>
+        <p:spPr>
+          <a:xfrm>
+            <a:off x="896112" y="2971800"/>
+            <a:ext cx="6583680" cy="2103120"/>
+          </a:xfrm>
+          <a:prstGeom prst="rect">
+            <a:avLst/>
+          </a:prstGeom>
+          <a:noFill/>
+        </p:spPr>
+        <p:txBody>
+          <a:bodyPr wrap="square">
+            <a:spAutoFit/>
+          </a:bodyPr>
+          <a:lstStyle/>
+          <a:p>
+            <a:pPr>
+              <a:spcAft>
+                <a:spcPts val="1400"/>
+              </a:spcAft>
+            </a:pPr>
+            <a:r>
+              <a:rPr sz="2200">
+                <a:solidFill>
+                  <a:srgbClr val="2B2B2B"/>
+                </a:solidFill>
+                <a:latin typeface="Calibri"/>
+              </a:rPr>
+              <a:t>•  Catálogo de antojitos callejeros de Guatemala (PWA)</a:t>
+            </a:r>
+          </a:p>
+          <a:p>
+            <a:pPr>
+              <a:spcAft>
+                <a:spcPts val="1400"/>
+              </a:spcAft>
+            </a:pPr>
+            <a:r>
+              <a:rPr sz="2200">
+                <a:solidFill>
+                  <a:srgbClr val="2B2B2B"/>
+                </a:solidFill>
+                <a:latin typeface="Calibri"/>
+              </a:rPr>
+              <a:t>•  Mismo patrón que Ruta del Café: tarjetas, filtro y estética de marca</a:t>
+            </a:r>
+          </a:p>
+          <a:p>
+            <a:pPr>
+              <a:spcAft>
+                <a:spcPts val="1400"/>
+              </a:spcAft>
+            </a:pPr>
+            <a:r>
+              <a:rPr sz="2200">
+                <a:solidFill>
+                  <a:srgbClr val="2B2B2B"/>
+                </a:solidFill>
+                <a:latin typeface="Calibri"/>
+              </a:rPr>
+              <a:t>•  El docente la arma en vivo con un solo prompt inicial detallado</a:t>
+            </a:r>
+          </a:p>
+        </p:txBody>
+      </p:sp>
+      <p:sp>
+        <p:nvSpPr>
+          <p:cNvPr id="9" name="TextBox 8"/>
+          <p:cNvSpPr txBox="1"/>
+          <p:nvPr/>
+        </p:nvSpPr>
+        <p:spPr>
+          <a:xfrm>
+            <a:off x="896112" y="5257800"/>
+            <a:ext cx="6583680" cy="1188720"/>
+          </a:xfrm>
+          <a:prstGeom prst="rect">
+            <a:avLst/>
+          </a:prstGeom>
+          <a:noFill/>
+        </p:spPr>
+        <p:txBody>
+          <a:bodyPr wrap="square" anchor="t">
+            <a:spAutoFit/>
+          </a:bodyPr>
+          <a:lstStyle/>
+          <a:p>
+            <a:pPr algn="l">
+              <a:spcAft>
+                <a:spcPts val="600"/>
+              </a:spcAft>
+            </a:pPr>
+            <a:r>
+              <a:rPr sz="1500" b="0">
+                <a:solidFill>
+                  <a:srgbClr val="6F645B"/>
+                </a:solidFill>
+                <a:latin typeface="Calibri"/>
+              </a:rPr>
+              <a:t>Ilustra el concepto del día con una app distinta. Tu laboratorio sigue en la app insignia y en tu propia idea.</a:t>
+            </a:r>
+          </a:p>
+        </p:txBody>
+      </p:sp>
+      <p:sp>
+        <p:nvSpPr>
+          <p:cNvPr id="10" name="Rounded Rectangle 9"/>
+          <p:cNvSpPr/>
+          <p:nvPr/>
+        </p:nvSpPr>
+        <p:spPr>
+          <a:xfrm>
+            <a:off x="7772400" y="3202083"/>
+            <a:ext cx="3749040" cy="2099754"/>
           </a:xfrm>
           <a:prstGeom prst="roundRect">
             <a:avLst/>
@@ -6820,7 +10067,7 @@
           </a:solidFill>
           <a:ln w="15240">
             <a:solidFill>
-              <a:srgbClr val="EADDC8"/>
+              <a:srgbClr val="6D2E46"/>
             </a:solidFill>
           </a:ln>
           <a:effectLst/>
@@ -6847,60 +10094,40 @@
           </a:p>
         </p:txBody>
       </p:sp>
-      <p:sp>
-        <p:nvSpPr>
-          <p:cNvPr id="7" name="Rectangle 6"/>
-          <p:cNvSpPr/>
-          <p:nvPr/>
-        </p:nvSpPr>
-        <p:spPr>
-          <a:xfrm>
-            <a:off x="868680" y="2057400"/>
-            <a:ext cx="118872" cy="2084831"/>
-          </a:xfrm>
-          <a:prstGeom prst="rect">
-            <a:avLst/>
-          </a:prstGeom>
-          <a:solidFill>
-            <a:srgbClr val="C84B31"/>
-          </a:solidFill>
-          <a:ln>
-            <a:noFill/>
-          </a:ln>
-          <a:effectLst/>
-        </p:spPr>
-        <p:style>
-          <a:lnRef idx="1">
-            <a:schemeClr val="accent1"/>
-          </a:lnRef>
-          <a:fillRef idx="3">
-            <a:schemeClr val="accent1"/>
-          </a:fillRef>
-          <a:effectRef idx="2">
-            <a:schemeClr val="accent1"/>
-          </a:effectRef>
-          <a:fontRef idx="minor">
-            <a:schemeClr val="lt1"/>
-          </a:fontRef>
-        </p:style>
-        <p:txBody>
-          <a:bodyPr rtlCol="0" anchor="ctr"/>
-          <a:lstStyle/>
-          <a:p>
-            <a:pPr algn="ctr"/>
-          </a:p>
-        </p:txBody>
-      </p:sp>
-      <p:sp>
-        <p:nvSpPr>
-          <p:cNvPr id="8" name="TextBox 7"/>
+      <p:pic>
+        <p:nvPicPr>
+          <p:cNvPr id="11" name="Picture 10" descr="demo-antojitos.png"/>
+          <p:cNvPicPr>
+            <a:picLocks noChangeAspect="1"/>
+          </p:cNvPicPr>
+          <p:nvPr/>
+        </p:nvPicPr>
+        <p:blipFill>
+          <a:blip r:embed="rId2"/>
+          <a:stretch>
+            <a:fillRect/>
+          </a:stretch>
+        </p:blipFill>
+        <p:spPr>
+          <a:xfrm>
+            <a:off x="7818120" y="3247803"/>
+            <a:ext cx="3657600" cy="2008314"/>
+          </a:xfrm>
+          <a:prstGeom prst="rect">
+            <a:avLst/>
+          </a:prstGeom>
+        </p:spPr>
+      </p:pic>
+      <p:sp>
+        <p:nvSpPr>
+          <p:cNvPr id="12" name="TextBox 11"/>
           <p:cNvSpPr txBox="1"/>
           <p:nvPr/>
         </p:nvSpPr>
         <p:spPr>
           <a:xfrm>
-            <a:off x="1216152" y="2203704"/>
-            <a:ext cx="4466844" cy="822960"/>
+            <a:off x="7818120" y="6419088"/>
+            <a:ext cx="3657600" cy="365760"/>
           </a:xfrm>
           <a:prstGeom prst="rect">
             <a:avLst/>
@@ -6913,718 +10140,19 @@
           </a:bodyPr>
           <a:lstStyle/>
           <a:p>
-            <a:pPr algn="l">
+            <a:pPr algn="ctr">
               <a:spcAft>
                 <a:spcPts val="600"/>
               </a:spcAft>
             </a:pPr>
             <a:r>
-              <a:rPr sz="4400" b="1">
-                <a:solidFill>
-                  <a:srgbClr val="C84B31"/>
-                </a:solidFill>
-                <a:latin typeface="Calibri"/>
-              </a:rPr>
-              <a:t>51.6%</a:t>
-            </a:r>
-          </a:p>
-        </p:txBody>
-      </p:sp>
-      <p:sp>
-        <p:nvSpPr>
-          <p:cNvPr id="9" name="TextBox 8"/>
-          <p:cNvSpPr txBox="1"/>
-          <p:nvPr/>
-        </p:nvSpPr>
-        <p:spPr>
-          <a:xfrm>
-            <a:off x="1216152" y="2990088"/>
-            <a:ext cx="4466844" cy="713231"/>
-          </a:xfrm>
-          <a:prstGeom prst="rect">
-            <a:avLst/>
-          </a:prstGeom>
-          <a:noFill/>
-        </p:spPr>
-        <p:txBody>
-          <a:bodyPr wrap="square" anchor="t">
-            <a:spAutoFit/>
-          </a:bodyPr>
-          <a:lstStyle/>
-          <a:p>
-            <a:pPr algn="l">
-              <a:spcAft>
-                <a:spcPts val="600"/>
-              </a:spcAft>
-            </a:pPr>
-            <a:r>
-              <a:rPr sz="1600" b="1">
-                <a:solidFill>
-                  <a:srgbClr val="2B2B2B"/>
-                </a:solidFill>
-                <a:latin typeface="Calibri"/>
-              </a:rPr>
-              <a:t>del tráfico web mundial ya viene de teléfonos móviles</a:t>
-            </a:r>
-          </a:p>
-        </p:txBody>
-      </p:sp>
-      <p:sp>
-        <p:nvSpPr>
-          <p:cNvPr id="10" name="TextBox 9"/>
-          <p:cNvSpPr txBox="1"/>
-          <p:nvPr/>
-        </p:nvSpPr>
-        <p:spPr>
-          <a:xfrm>
-            <a:off x="1216152" y="3758183"/>
-            <a:ext cx="4466844" cy="329184"/>
-          </a:xfrm>
-          <a:prstGeom prst="rect">
-            <a:avLst/>
-          </a:prstGeom>
-          <a:noFill/>
-        </p:spPr>
-        <p:txBody>
-          <a:bodyPr wrap="square" anchor="t">
-            <a:spAutoFit/>
-          </a:bodyPr>
-          <a:lstStyle/>
-          <a:p>
-            <a:pPr algn="l">
-              <a:spcAft>
-                <a:spcPts val="600"/>
-              </a:spcAft>
-            </a:pPr>
-            <a:r>
-              <a:rPr sz="1050" b="0">
-                <a:solidFill>
-                  <a:srgbClr val="8A7C70"/>
-                </a:solidFill>
-                <a:latin typeface="Calibri"/>
-              </a:rPr>
-              <a:t>Fuente: DataReportal, Digital 2025 Global Overview</a:t>
-            </a:r>
-          </a:p>
-        </p:txBody>
-      </p:sp>
-      <p:sp>
-        <p:nvSpPr>
-          <p:cNvPr id="11" name="Rounded Rectangle 10"/>
-          <p:cNvSpPr/>
-          <p:nvPr/>
-        </p:nvSpPr>
-        <p:spPr>
-          <a:xfrm>
-            <a:off x="6277356" y="2057400"/>
-            <a:ext cx="5061204" cy="2084831"/>
-          </a:xfrm>
-          <a:prstGeom prst="roundRect">
-            <a:avLst/>
-          </a:prstGeom>
-          <a:solidFill>
-            <a:srgbClr val="FFFFFF"/>
-          </a:solidFill>
-          <a:ln w="15240">
-            <a:solidFill>
-              <a:srgbClr val="EADDC8"/>
-            </a:solidFill>
-          </a:ln>
-          <a:effectLst/>
-        </p:spPr>
-        <p:style>
-          <a:lnRef idx="1">
-            <a:schemeClr val="accent1"/>
-          </a:lnRef>
-          <a:fillRef idx="3">
-            <a:schemeClr val="accent1"/>
-          </a:fillRef>
-          <a:effectRef idx="2">
-            <a:schemeClr val="accent1"/>
-          </a:effectRef>
-          <a:fontRef idx="minor">
-            <a:schemeClr val="lt1"/>
-          </a:fontRef>
-        </p:style>
-        <p:txBody>
-          <a:bodyPr rtlCol="0" anchor="ctr"/>
-          <a:lstStyle/>
-          <a:p>
-            <a:pPr algn="ctr"/>
-          </a:p>
-        </p:txBody>
-      </p:sp>
-      <p:sp>
-        <p:nvSpPr>
-          <p:cNvPr id="12" name="Rectangle 11"/>
-          <p:cNvSpPr/>
-          <p:nvPr/>
-        </p:nvSpPr>
-        <p:spPr>
-          <a:xfrm>
-            <a:off x="6277356" y="2057400"/>
-            <a:ext cx="118872" cy="2084831"/>
-          </a:xfrm>
-          <a:prstGeom prst="rect">
-            <a:avLst/>
-          </a:prstGeom>
-          <a:solidFill>
-            <a:srgbClr val="6D2E46"/>
-          </a:solidFill>
-          <a:ln>
-            <a:noFill/>
-          </a:ln>
-          <a:effectLst/>
-        </p:spPr>
-        <p:style>
-          <a:lnRef idx="1">
-            <a:schemeClr val="accent1"/>
-          </a:lnRef>
-          <a:fillRef idx="3">
-            <a:schemeClr val="accent1"/>
-          </a:fillRef>
-          <a:effectRef idx="2">
-            <a:schemeClr val="accent1"/>
-          </a:effectRef>
-          <a:fontRef idx="minor">
-            <a:schemeClr val="lt1"/>
-          </a:fontRef>
-        </p:style>
-        <p:txBody>
-          <a:bodyPr rtlCol="0" anchor="ctr"/>
-          <a:lstStyle/>
-          <a:p>
-            <a:pPr algn="ctr"/>
-          </a:p>
-        </p:txBody>
-      </p:sp>
-      <p:sp>
-        <p:nvSpPr>
-          <p:cNvPr id="13" name="TextBox 12"/>
-          <p:cNvSpPr txBox="1"/>
-          <p:nvPr/>
-        </p:nvSpPr>
-        <p:spPr>
-          <a:xfrm>
-            <a:off x="6624828" y="2203704"/>
-            <a:ext cx="4466844" cy="822960"/>
-          </a:xfrm>
-          <a:prstGeom prst="rect">
-            <a:avLst/>
-          </a:prstGeom>
-          <a:noFill/>
-        </p:spPr>
-        <p:txBody>
-          <a:bodyPr wrap="square" anchor="t">
-            <a:spAutoFit/>
-          </a:bodyPr>
-          <a:lstStyle/>
-          <a:p>
-            <a:pPr algn="l">
-              <a:spcAft>
-                <a:spcPts val="600"/>
-              </a:spcAft>
-            </a:pPr>
-            <a:r>
-              <a:rPr sz="4400" b="1">
+              <a:rPr sz="1200" b="1">
                 <a:solidFill>
                   <a:srgbClr val="6D2E46"/>
                 </a:solidFill>
                 <a:latin typeface="Calibri"/>
               </a:rPr>
-              <a:t>20.4 M</a:t>
-            </a:r>
-          </a:p>
-        </p:txBody>
-      </p:sp>
-      <p:sp>
-        <p:nvSpPr>
-          <p:cNvPr id="14" name="TextBox 13"/>
-          <p:cNvSpPr txBox="1"/>
-          <p:nvPr/>
-        </p:nvSpPr>
-        <p:spPr>
-          <a:xfrm>
-            <a:off x="6624828" y="2990088"/>
-            <a:ext cx="4466844" cy="713231"/>
-          </a:xfrm>
-          <a:prstGeom prst="rect">
-            <a:avLst/>
-          </a:prstGeom>
-          <a:noFill/>
-        </p:spPr>
-        <p:txBody>
-          <a:bodyPr wrap="square" anchor="t">
-            <a:spAutoFit/>
-          </a:bodyPr>
-          <a:lstStyle/>
-          <a:p>
-            <a:pPr algn="l">
-              <a:spcAft>
-                <a:spcPts val="600"/>
-              </a:spcAft>
-            </a:pPr>
-            <a:r>
-              <a:rPr sz="1600" b="1">
-                <a:solidFill>
-                  <a:srgbClr val="2B2B2B"/>
-                </a:solidFill>
-                <a:latin typeface="Calibri"/>
-              </a:rPr>
-              <a:t>conexiones móviles en Guatemala (≈110% de la población)</a:t>
-            </a:r>
-          </a:p>
-        </p:txBody>
-      </p:sp>
-      <p:sp>
-        <p:nvSpPr>
-          <p:cNvPr id="15" name="TextBox 14"/>
-          <p:cNvSpPr txBox="1"/>
-          <p:nvPr/>
-        </p:nvSpPr>
-        <p:spPr>
-          <a:xfrm>
-            <a:off x="6624828" y="3758183"/>
-            <a:ext cx="4466844" cy="329184"/>
-          </a:xfrm>
-          <a:prstGeom prst="rect">
-            <a:avLst/>
-          </a:prstGeom>
-          <a:noFill/>
-        </p:spPr>
-        <p:txBody>
-          <a:bodyPr wrap="square" anchor="t">
-            <a:spAutoFit/>
-          </a:bodyPr>
-          <a:lstStyle/>
-          <a:p>
-            <a:pPr algn="l">
-              <a:spcAft>
-                <a:spcPts val="600"/>
-              </a:spcAft>
-            </a:pPr>
-            <a:r>
-              <a:rPr sz="1050" b="0">
-                <a:solidFill>
-                  <a:srgbClr val="8A7C70"/>
-                </a:solidFill>
-                <a:latin typeface="Calibri"/>
-              </a:rPr>
-              <a:t>Fuente: DataReportal, Digital 2025 Guatemala</a:t>
-            </a:r>
-          </a:p>
-        </p:txBody>
-      </p:sp>
-      <p:sp>
-        <p:nvSpPr>
-          <p:cNvPr id="16" name="Rounded Rectangle 15"/>
-          <p:cNvSpPr/>
-          <p:nvPr/>
-        </p:nvSpPr>
-        <p:spPr>
-          <a:xfrm>
-            <a:off x="868680" y="4489703"/>
-            <a:ext cx="5061204" cy="2084831"/>
-          </a:xfrm>
-          <a:prstGeom prst="roundRect">
-            <a:avLst/>
-          </a:prstGeom>
-          <a:solidFill>
-            <a:srgbClr val="FFFFFF"/>
-          </a:solidFill>
-          <a:ln w="15240">
-            <a:solidFill>
-              <a:srgbClr val="EADDC8"/>
-            </a:solidFill>
-          </a:ln>
-          <a:effectLst/>
-        </p:spPr>
-        <p:style>
-          <a:lnRef idx="1">
-            <a:schemeClr val="accent1"/>
-          </a:lnRef>
-          <a:fillRef idx="3">
-            <a:schemeClr val="accent1"/>
-          </a:fillRef>
-          <a:effectRef idx="2">
-            <a:schemeClr val="accent1"/>
-          </a:effectRef>
-          <a:fontRef idx="minor">
-            <a:schemeClr val="lt1"/>
-          </a:fontRef>
-        </p:style>
-        <p:txBody>
-          <a:bodyPr rtlCol="0" anchor="ctr"/>
-          <a:lstStyle/>
-          <a:p>
-            <a:pPr algn="ctr"/>
-          </a:p>
-        </p:txBody>
-      </p:sp>
-      <p:sp>
-        <p:nvSpPr>
-          <p:cNvPr id="17" name="Rectangle 16"/>
-          <p:cNvSpPr/>
-          <p:nvPr/>
-        </p:nvSpPr>
-        <p:spPr>
-          <a:xfrm>
-            <a:off x="868680" y="4489703"/>
-            <a:ext cx="118872" cy="2084831"/>
-          </a:xfrm>
-          <a:prstGeom prst="rect">
-            <a:avLst/>
-          </a:prstGeom>
-          <a:solidFill>
-            <a:srgbClr val="4F772D"/>
-          </a:solidFill>
-          <a:ln>
-            <a:noFill/>
-          </a:ln>
-          <a:effectLst/>
-        </p:spPr>
-        <p:style>
-          <a:lnRef idx="1">
-            <a:schemeClr val="accent1"/>
-          </a:lnRef>
-          <a:fillRef idx="3">
-            <a:schemeClr val="accent1"/>
-          </a:fillRef>
-          <a:effectRef idx="2">
-            <a:schemeClr val="accent1"/>
-          </a:effectRef>
-          <a:fontRef idx="minor">
-            <a:schemeClr val="lt1"/>
-          </a:fontRef>
-        </p:style>
-        <p:txBody>
-          <a:bodyPr rtlCol="0" anchor="ctr"/>
-          <a:lstStyle/>
-          <a:p>
-            <a:pPr algn="ctr"/>
-          </a:p>
-        </p:txBody>
-      </p:sp>
-      <p:sp>
-        <p:nvSpPr>
-          <p:cNvPr id="18" name="TextBox 17"/>
-          <p:cNvSpPr txBox="1"/>
-          <p:nvPr/>
-        </p:nvSpPr>
-        <p:spPr>
-          <a:xfrm>
-            <a:off x="1216152" y="4636007"/>
-            <a:ext cx="4466844" cy="822960"/>
-          </a:xfrm>
-          <a:prstGeom prst="rect">
-            <a:avLst/>
-          </a:prstGeom>
-          <a:noFill/>
-        </p:spPr>
-        <p:txBody>
-          <a:bodyPr wrap="square" anchor="t">
-            <a:spAutoFit/>
-          </a:bodyPr>
-          <a:lstStyle/>
-          <a:p>
-            <a:pPr algn="l">
-              <a:spcAft>
-                <a:spcPts val="600"/>
-              </a:spcAft>
-            </a:pPr>
-            <a:r>
-              <a:rPr sz="4400" b="1">
-                <a:solidFill>
-                  <a:srgbClr val="4F772D"/>
-                </a:solidFill>
-                <a:latin typeface="Calibri"/>
-              </a:rPr>
-              <a:t>84%</a:t>
-            </a:r>
-          </a:p>
-        </p:txBody>
-      </p:sp>
-      <p:sp>
-        <p:nvSpPr>
-          <p:cNvPr id="19" name="TextBox 18"/>
-          <p:cNvSpPr txBox="1"/>
-          <p:nvPr/>
-        </p:nvSpPr>
-        <p:spPr>
-          <a:xfrm>
-            <a:off x="1216152" y="5422391"/>
-            <a:ext cx="4466844" cy="713231"/>
-          </a:xfrm>
-          <a:prstGeom prst="rect">
-            <a:avLst/>
-          </a:prstGeom>
-          <a:noFill/>
-        </p:spPr>
-        <p:txBody>
-          <a:bodyPr wrap="square" anchor="t">
-            <a:spAutoFit/>
-          </a:bodyPr>
-          <a:lstStyle/>
-          <a:p>
-            <a:pPr algn="l">
-              <a:spcAft>
-                <a:spcPts val="600"/>
-              </a:spcAft>
-            </a:pPr>
-            <a:r>
-              <a:rPr sz="1600" b="1">
-                <a:solidFill>
-                  <a:srgbClr val="2B2B2B"/>
-                </a:solidFill>
-                <a:latin typeface="Calibri"/>
-              </a:rPr>
-              <a:t>de desarrolladores ya usa o planea usar IA en su trabajo</a:t>
-            </a:r>
-          </a:p>
-        </p:txBody>
-      </p:sp>
-      <p:sp>
-        <p:nvSpPr>
-          <p:cNvPr id="20" name="TextBox 19"/>
-          <p:cNvSpPr txBox="1"/>
-          <p:nvPr/>
-        </p:nvSpPr>
-        <p:spPr>
-          <a:xfrm>
-            <a:off x="1216152" y="6190486"/>
-            <a:ext cx="4466844" cy="329184"/>
-          </a:xfrm>
-          <a:prstGeom prst="rect">
-            <a:avLst/>
-          </a:prstGeom>
-          <a:noFill/>
-        </p:spPr>
-        <p:txBody>
-          <a:bodyPr wrap="square" anchor="t">
-            <a:spAutoFit/>
-          </a:bodyPr>
-          <a:lstStyle/>
-          <a:p>
-            <a:pPr algn="l">
-              <a:spcAft>
-                <a:spcPts val="600"/>
-              </a:spcAft>
-            </a:pPr>
-            <a:r>
-              <a:rPr sz="1050" b="0">
-                <a:solidFill>
-                  <a:srgbClr val="8A7C70"/>
-                </a:solidFill>
-                <a:latin typeface="Calibri"/>
-              </a:rPr>
-              <a:t>Fuente: Stack Overflow Developer Survey 2025</a:t>
-            </a:r>
-          </a:p>
-        </p:txBody>
-      </p:sp>
-      <p:sp>
-        <p:nvSpPr>
-          <p:cNvPr id="21" name="Rounded Rectangle 20"/>
-          <p:cNvSpPr/>
-          <p:nvPr/>
-        </p:nvSpPr>
-        <p:spPr>
-          <a:xfrm>
-            <a:off x="6277356" y="4489703"/>
-            <a:ext cx="5061204" cy="2084831"/>
-          </a:xfrm>
-          <a:prstGeom prst="roundRect">
-            <a:avLst/>
-          </a:prstGeom>
-          <a:solidFill>
-            <a:srgbClr val="FFFFFF"/>
-          </a:solidFill>
-          <a:ln w="15240">
-            <a:solidFill>
-              <a:srgbClr val="EADDC8"/>
-            </a:solidFill>
-          </a:ln>
-          <a:effectLst/>
-        </p:spPr>
-        <p:style>
-          <a:lnRef idx="1">
-            <a:schemeClr val="accent1"/>
-          </a:lnRef>
-          <a:fillRef idx="3">
-            <a:schemeClr val="accent1"/>
-          </a:fillRef>
-          <a:effectRef idx="2">
-            <a:schemeClr val="accent1"/>
-          </a:effectRef>
-          <a:fontRef idx="minor">
-            <a:schemeClr val="lt1"/>
-          </a:fontRef>
-        </p:style>
-        <p:txBody>
-          <a:bodyPr rtlCol="0" anchor="ctr"/>
-          <a:lstStyle/>
-          <a:p>
-            <a:pPr algn="ctr"/>
-          </a:p>
-        </p:txBody>
-      </p:sp>
-      <p:sp>
-        <p:nvSpPr>
-          <p:cNvPr id="22" name="Rectangle 21"/>
-          <p:cNvSpPr/>
-          <p:nvPr/>
-        </p:nvSpPr>
-        <p:spPr>
-          <a:xfrm>
-            <a:off x="6277356" y="4489703"/>
-            <a:ext cx="118872" cy="2084831"/>
-          </a:xfrm>
-          <a:prstGeom prst="rect">
-            <a:avLst/>
-          </a:prstGeom>
-          <a:solidFill>
-            <a:srgbClr val="3A6B7E"/>
-          </a:solidFill>
-          <a:ln>
-            <a:noFill/>
-          </a:ln>
-          <a:effectLst/>
-        </p:spPr>
-        <p:style>
-          <a:lnRef idx="1">
-            <a:schemeClr val="accent1"/>
-          </a:lnRef>
-          <a:fillRef idx="3">
-            <a:schemeClr val="accent1"/>
-          </a:fillRef>
-          <a:effectRef idx="2">
-            <a:schemeClr val="accent1"/>
-          </a:effectRef>
-          <a:fontRef idx="minor">
-            <a:schemeClr val="lt1"/>
-          </a:fontRef>
-        </p:style>
-        <p:txBody>
-          <a:bodyPr rtlCol="0" anchor="ctr"/>
-          <a:lstStyle/>
-          <a:p>
-            <a:pPr algn="ctr"/>
-          </a:p>
-        </p:txBody>
-      </p:sp>
-      <p:sp>
-        <p:nvSpPr>
-          <p:cNvPr id="23" name="TextBox 22"/>
-          <p:cNvSpPr txBox="1"/>
-          <p:nvPr/>
-        </p:nvSpPr>
-        <p:spPr>
-          <a:xfrm>
-            <a:off x="6624828" y="4636007"/>
-            <a:ext cx="4466844" cy="822960"/>
-          </a:xfrm>
-          <a:prstGeom prst="rect">
-            <a:avLst/>
-          </a:prstGeom>
-          <a:noFill/>
-        </p:spPr>
-        <p:txBody>
-          <a:bodyPr wrap="square" anchor="t">
-            <a:spAutoFit/>
-          </a:bodyPr>
-          <a:lstStyle/>
-          <a:p>
-            <a:pPr algn="l">
-              <a:spcAft>
-                <a:spcPts val="600"/>
-              </a:spcAft>
-            </a:pPr>
-            <a:r>
-              <a:rPr sz="4400" b="1">
-                <a:solidFill>
-                  <a:srgbClr val="3A6B7E"/>
-                </a:solidFill>
-                <a:latin typeface="Calibri"/>
-              </a:rPr>
-              <a:t>59%</a:t>
-            </a:r>
-          </a:p>
-        </p:txBody>
-      </p:sp>
-      <p:sp>
-        <p:nvSpPr>
-          <p:cNvPr id="24" name="TextBox 23"/>
-          <p:cNvSpPr txBox="1"/>
-          <p:nvPr/>
-        </p:nvSpPr>
-        <p:spPr>
-          <a:xfrm>
-            <a:off x="6624828" y="5422391"/>
-            <a:ext cx="4466844" cy="713231"/>
-          </a:xfrm>
-          <a:prstGeom prst="rect">
-            <a:avLst/>
-          </a:prstGeom>
-          <a:noFill/>
-        </p:spPr>
-        <p:txBody>
-          <a:bodyPr wrap="square" anchor="t">
-            <a:spAutoFit/>
-          </a:bodyPr>
-          <a:lstStyle/>
-          <a:p>
-            <a:pPr algn="l">
-              <a:spcAft>
-                <a:spcPts val="600"/>
-              </a:spcAft>
-            </a:pPr>
-            <a:r>
-              <a:rPr sz="1600" b="1">
-                <a:solidFill>
-                  <a:srgbClr val="2B2B2B"/>
-                </a:solidFill>
-                <a:latin typeface="Calibri"/>
-              </a:rPr>
-              <a:t>de diseñadores y desarrolladores ya usa IA en su flujo</a:t>
-            </a:r>
-          </a:p>
-        </p:txBody>
-      </p:sp>
-      <p:sp>
-        <p:nvSpPr>
-          <p:cNvPr id="25" name="TextBox 24"/>
-          <p:cNvSpPr txBox="1"/>
-          <p:nvPr/>
-        </p:nvSpPr>
-        <p:spPr>
-          <a:xfrm>
-            <a:off x="6624828" y="6190486"/>
-            <a:ext cx="4466844" cy="329184"/>
-          </a:xfrm>
-          <a:prstGeom prst="rect">
-            <a:avLst/>
-          </a:prstGeom>
-          <a:noFill/>
-        </p:spPr>
-        <p:txBody>
-          <a:bodyPr wrap="square" anchor="t">
-            <a:spAutoFit/>
-          </a:bodyPr>
-          <a:lstStyle/>
-          <a:p>
-            <a:pPr algn="l">
-              <a:spcAft>
-                <a:spcPts val="600"/>
-              </a:spcAft>
-            </a:pPr>
-            <a:r>
-              <a:rPr sz="1050" b="0">
-                <a:solidFill>
-                  <a:srgbClr val="8A7C70"/>
-                </a:solidFill>
-                <a:latin typeface="Calibri"/>
-              </a:rPr>
-              <a:t>Fuente: Figma, AI Design Report 2024</a:t>
+              <a:t>Captura real de la demo</a:t>
             </a:r>
           </a:p>
         </p:txBody>
@@ -7670,7 +10198,7 @@
             <a:avLst/>
           </a:prstGeom>
           <a:solidFill>
-            <a:srgbClr val="C84B31"/>
+            <a:srgbClr val="4F772D"/>
           </a:solidFill>
           <a:ln>
             <a:noFill/>
@@ -7733,7 +10261,7 @@
                 </a:solidFill>
                 <a:latin typeface="Calibri"/>
               </a:rPr>
-              <a:t>A DÓNDE LLEGAMOS HOY</a:t>
+              <a:t>VOCABULARIO PARA DISEÑO</a:t>
             </a:r>
           </a:p>
         </p:txBody>
@@ -7772,7 +10300,7 @@
                 </a:solidFill>
                 <a:latin typeface="Calibri"/>
               </a:rPr>
-              <a:t>Tu primera app: Ruta del Café</a:t>
+              <a:t>Glosario mínimo de IA generativa</a:t>
             </a:r>
           </a:p>
         </p:txBody>
@@ -7829,8 +10357,8 @@
         </p:nvSpPr>
         <p:spPr>
           <a:xfrm>
-            <a:off x="9134856" y="1819655"/>
-            <a:ext cx="2053369" cy="4315968"/>
+            <a:off x="658368" y="2011680"/>
+            <a:ext cx="5349240" cy="786384"/>
           </a:xfrm>
           <a:prstGeom prst="roundRect">
             <a:avLst/>
@@ -7840,7 +10368,7 @@
           </a:solidFill>
           <a:ln w="15240">
             <a:solidFill>
-              <a:srgbClr val="6D2E46"/>
+              <a:srgbClr val="EADDC8"/>
             </a:solidFill>
           </a:ln>
           <a:effectLst/>
@@ -7867,30 +10395,50 @@
           </a:p>
         </p:txBody>
       </p:sp>
-      <p:pic>
-        <p:nvPicPr>
-          <p:cNvPr id="7" name="Picture 6" descr="ruta-home.png"/>
-          <p:cNvPicPr>
-            <a:picLocks noChangeAspect="1"/>
-          </p:cNvPicPr>
-          <p:nvPr/>
-        </p:nvPicPr>
-        <p:blipFill>
-          <a:blip r:embed="rId2"/>
-          <a:stretch>
-            <a:fillRect/>
-          </a:stretch>
-        </p:blipFill>
-        <p:spPr>
-          <a:xfrm>
-            <a:off x="9189720" y="1874519"/>
-            <a:ext cx="1943642" cy="4206240"/>
-          </a:xfrm>
-          <a:prstGeom prst="rect">
-            <a:avLst/>
-          </a:prstGeom>
-        </p:spPr>
-      </p:pic>
+      <p:sp>
+        <p:nvSpPr>
+          <p:cNvPr id="7" name="Rectangle 6"/>
+          <p:cNvSpPr/>
+          <p:nvPr/>
+        </p:nvSpPr>
+        <p:spPr>
+          <a:xfrm>
+            <a:off x="658368" y="2011680"/>
+            <a:ext cx="91440" cy="786384"/>
+          </a:xfrm>
+          <a:prstGeom prst="rect">
+            <a:avLst/>
+          </a:prstGeom>
+          <a:solidFill>
+            <a:srgbClr val="E3B23C"/>
+          </a:solidFill>
+          <a:ln>
+            <a:noFill/>
+          </a:ln>
+          <a:effectLst/>
+        </p:spPr>
+        <p:style>
+          <a:lnRef idx="1">
+            <a:schemeClr val="accent1"/>
+          </a:lnRef>
+          <a:fillRef idx="3">
+            <a:schemeClr val="accent1"/>
+          </a:fillRef>
+          <a:effectRef idx="2">
+            <a:schemeClr val="accent1"/>
+          </a:effectRef>
+          <a:fontRef idx="minor">
+            <a:schemeClr val="lt1"/>
+          </a:fontRef>
+        </p:style>
+        <p:txBody>
+          <a:bodyPr rtlCol="0" anchor="ctr"/>
+          <a:lstStyle/>
+          <a:p>
+            <a:pPr algn="ctr"/>
+          </a:p>
+        </p:txBody>
+      </p:sp>
       <p:sp>
         <p:nvSpPr>
           <p:cNvPr id="8" name="TextBox 7"/>
@@ -7899,8 +10447,8 @@
         </p:nvSpPr>
         <p:spPr>
           <a:xfrm>
-            <a:off x="8366760" y="6208775"/>
-            <a:ext cx="3589561" cy="457200"/>
+            <a:off x="914400" y="2066544"/>
+            <a:ext cx="4892040" cy="676656"/>
           </a:xfrm>
           <a:prstGeom prst="rect">
             <a:avLst/>
@@ -7908,38 +10456,144 @@
           <a:noFill/>
         </p:spPr>
         <p:txBody>
-          <a:bodyPr wrap="square" anchor="t">
+          <a:bodyPr wrap="square" anchor="ctr">
             <a:spAutoFit/>
           </a:bodyPr>
           <a:lstStyle/>
           <a:p>
-            <a:pPr algn="ctr">
-              <a:spcAft>
-                <a:spcPts val="600"/>
-              </a:spcAft>
-            </a:pPr>
-            <a:r>
-              <a:rPr sz="1300" b="1">
+            <a:pPr algn="l">
+              <a:spcAft>
+                <a:spcPts val="100"/>
+              </a:spcAft>
+            </a:pPr>
+            <a:r>
+              <a:rPr sz="1500" b="1">
                 <a:solidFill>
                   <a:srgbClr val="6D2E46"/>
                 </a:solidFill>
                 <a:latin typeface="Calibri"/>
               </a:rPr>
-              <a:t>Pantalla principal: tarjetas y filtro</a:t>
-            </a:r>
-          </a:p>
-        </p:txBody>
-      </p:sp>
-      <p:sp>
-        <p:nvSpPr>
-          <p:cNvPr id="9" name="TextBox 8"/>
+              <a:t>Prompt</a:t>
+            </a:r>
+          </a:p>
+          <a:p>
+            <a:pPr algn="l">
+              <a:spcAft>
+                <a:spcPts val="100"/>
+              </a:spcAft>
+            </a:pPr>
+            <a:r>
+              <a:rPr sz="1250" b="0">
+                <a:solidFill>
+                  <a:srgbClr val="2B2B2B"/>
+                </a:solidFill>
+                <a:latin typeface="Calibri"/>
+              </a:rPr>
+              <a:t>La instrucción en español que le das a la IA para crear o cambiar algo.</a:t>
+            </a:r>
+          </a:p>
+        </p:txBody>
+      </p:sp>
+      <p:sp>
+        <p:nvSpPr>
+          <p:cNvPr id="9" name="Rounded Rectangle 8"/>
+          <p:cNvSpPr/>
+          <p:nvPr/>
+        </p:nvSpPr>
+        <p:spPr>
+          <a:xfrm>
+            <a:off x="658368" y="2898648"/>
+            <a:ext cx="5349240" cy="786384"/>
+          </a:xfrm>
+          <a:prstGeom prst="roundRect">
+            <a:avLst/>
+          </a:prstGeom>
+          <a:solidFill>
+            <a:srgbClr val="FFFFFF"/>
+          </a:solidFill>
+          <a:ln w="15240">
+            <a:solidFill>
+              <a:srgbClr val="EADDC8"/>
+            </a:solidFill>
+          </a:ln>
+          <a:effectLst/>
+        </p:spPr>
+        <p:style>
+          <a:lnRef idx="1">
+            <a:schemeClr val="accent1"/>
+          </a:lnRef>
+          <a:fillRef idx="3">
+            <a:schemeClr val="accent1"/>
+          </a:fillRef>
+          <a:effectRef idx="2">
+            <a:schemeClr val="accent1"/>
+          </a:effectRef>
+          <a:fontRef idx="minor">
+            <a:schemeClr val="lt1"/>
+          </a:fontRef>
+        </p:style>
+        <p:txBody>
+          <a:bodyPr rtlCol="0" anchor="ctr"/>
+          <a:lstStyle/>
+          <a:p>
+            <a:pPr algn="ctr"/>
+          </a:p>
+        </p:txBody>
+      </p:sp>
+      <p:sp>
+        <p:nvSpPr>
+          <p:cNvPr id="10" name="Rectangle 9"/>
+          <p:cNvSpPr/>
+          <p:nvPr/>
+        </p:nvSpPr>
+        <p:spPr>
+          <a:xfrm>
+            <a:off x="658368" y="2898648"/>
+            <a:ext cx="91440" cy="786384"/>
+          </a:xfrm>
+          <a:prstGeom prst="rect">
+            <a:avLst/>
+          </a:prstGeom>
+          <a:solidFill>
+            <a:srgbClr val="E3B23C"/>
+          </a:solidFill>
+          <a:ln>
+            <a:noFill/>
+          </a:ln>
+          <a:effectLst/>
+        </p:spPr>
+        <p:style>
+          <a:lnRef idx="1">
+            <a:schemeClr val="accent1"/>
+          </a:lnRef>
+          <a:fillRef idx="3">
+            <a:schemeClr val="accent1"/>
+          </a:fillRef>
+          <a:effectRef idx="2">
+            <a:schemeClr val="accent1"/>
+          </a:effectRef>
+          <a:fontRef idx="minor">
+            <a:schemeClr val="lt1"/>
+          </a:fontRef>
+        </p:style>
+        <p:txBody>
+          <a:bodyPr rtlCol="0" anchor="ctr"/>
+          <a:lstStyle/>
+          <a:p>
+            <a:pPr algn="ctr"/>
+          </a:p>
+        </p:txBody>
+      </p:sp>
+      <p:sp>
+        <p:nvSpPr>
+          <p:cNvPr id="11" name="TextBox 10"/>
           <p:cNvSpPr txBox="1"/>
           <p:nvPr/>
         </p:nvSpPr>
         <p:spPr>
           <a:xfrm>
-            <a:off x="896112" y="2286000"/>
-            <a:ext cx="7680960" cy="4023360"/>
+            <a:off x="914400" y="2953512"/>
+            <a:ext cx="4892040" cy="676656"/>
           </a:xfrm>
           <a:prstGeom prst="rect">
             <a:avLst/>
@@ -7947,72 +10601,1055 @@
           <a:noFill/>
         </p:spPr>
         <p:txBody>
-          <a:bodyPr wrap="square">
+          <a:bodyPr wrap="square" anchor="ctr">
             <a:spAutoFit/>
           </a:bodyPr>
           <a:lstStyle/>
           <a:p>
-            <a:pPr>
-              <a:spcAft>
-                <a:spcPts val="1500"/>
-              </a:spcAft>
-            </a:pPr>
-            <a:r>
-              <a:rPr sz="2200">
+            <a:pPr algn="l">
+              <a:spcAft>
+                <a:spcPts val="100"/>
+              </a:spcAft>
+            </a:pPr>
+            <a:r>
+              <a:rPr sz="1500" b="1">
+                <a:solidFill>
+                  <a:srgbClr val="6D2E46"/>
+                </a:solidFill>
+                <a:latin typeface="Calibri"/>
+              </a:rPr>
+              <a:t>Modelo (Gemini 3.5 Flash)</a:t>
+            </a:r>
+          </a:p>
+          <a:p>
+            <a:pPr algn="l">
+              <a:spcAft>
+                <a:spcPts val="100"/>
+              </a:spcAft>
+            </a:pPr>
+            <a:r>
+              <a:rPr sz="1250" b="0">
                 <a:solidFill>
                   <a:srgbClr val="2B2B2B"/>
                 </a:solidFill>
                 <a:latin typeface="Calibri"/>
               </a:rPr>
-              <a:t>•  Con un solo prompt inicial detallado obtienes una app así</a:t>
-            </a:r>
-          </a:p>
-          <a:p>
-            <a:pPr>
-              <a:spcAft>
-                <a:spcPts val="1500"/>
-              </a:spcAft>
-            </a:pPr>
-            <a:r>
-              <a:rPr sz="2200">
+              <a:t>El "cerebro" de IA que genera; el que usa AI Studio por defecto.</a:t>
+            </a:r>
+          </a:p>
+        </p:txBody>
+      </p:sp>
+      <p:sp>
+        <p:nvSpPr>
+          <p:cNvPr id="12" name="Rounded Rectangle 11"/>
+          <p:cNvSpPr/>
+          <p:nvPr/>
+        </p:nvSpPr>
+        <p:spPr>
+          <a:xfrm>
+            <a:off x="658368" y="3785616"/>
+            <a:ext cx="5349240" cy="786384"/>
+          </a:xfrm>
+          <a:prstGeom prst="roundRect">
+            <a:avLst/>
+          </a:prstGeom>
+          <a:solidFill>
+            <a:srgbClr val="FFFFFF"/>
+          </a:solidFill>
+          <a:ln w="15240">
+            <a:solidFill>
+              <a:srgbClr val="EADDC8"/>
+            </a:solidFill>
+          </a:ln>
+          <a:effectLst/>
+        </p:spPr>
+        <p:style>
+          <a:lnRef idx="1">
+            <a:schemeClr val="accent1"/>
+          </a:lnRef>
+          <a:fillRef idx="3">
+            <a:schemeClr val="accent1"/>
+          </a:fillRef>
+          <a:effectRef idx="2">
+            <a:schemeClr val="accent1"/>
+          </a:effectRef>
+          <a:fontRef idx="minor">
+            <a:schemeClr val="lt1"/>
+          </a:fontRef>
+        </p:style>
+        <p:txBody>
+          <a:bodyPr rtlCol="0" anchor="ctr"/>
+          <a:lstStyle/>
+          <a:p>
+            <a:pPr algn="ctr"/>
+          </a:p>
+        </p:txBody>
+      </p:sp>
+      <p:sp>
+        <p:nvSpPr>
+          <p:cNvPr id="13" name="Rectangle 12"/>
+          <p:cNvSpPr/>
+          <p:nvPr/>
+        </p:nvSpPr>
+        <p:spPr>
+          <a:xfrm>
+            <a:off x="658368" y="3785616"/>
+            <a:ext cx="91440" cy="786384"/>
+          </a:xfrm>
+          <a:prstGeom prst="rect">
+            <a:avLst/>
+          </a:prstGeom>
+          <a:solidFill>
+            <a:srgbClr val="E3B23C"/>
+          </a:solidFill>
+          <a:ln>
+            <a:noFill/>
+          </a:ln>
+          <a:effectLst/>
+        </p:spPr>
+        <p:style>
+          <a:lnRef idx="1">
+            <a:schemeClr val="accent1"/>
+          </a:lnRef>
+          <a:fillRef idx="3">
+            <a:schemeClr val="accent1"/>
+          </a:fillRef>
+          <a:effectRef idx="2">
+            <a:schemeClr val="accent1"/>
+          </a:effectRef>
+          <a:fontRef idx="minor">
+            <a:schemeClr val="lt1"/>
+          </a:fontRef>
+        </p:style>
+        <p:txBody>
+          <a:bodyPr rtlCol="0" anchor="ctr"/>
+          <a:lstStyle/>
+          <a:p>
+            <a:pPr algn="ctr"/>
+          </a:p>
+        </p:txBody>
+      </p:sp>
+      <p:sp>
+        <p:nvSpPr>
+          <p:cNvPr id="14" name="TextBox 13"/>
+          <p:cNvSpPr txBox="1"/>
+          <p:nvPr/>
+        </p:nvSpPr>
+        <p:spPr>
+          <a:xfrm>
+            <a:off x="914400" y="3840480"/>
+            <a:ext cx="4892040" cy="676656"/>
+          </a:xfrm>
+          <a:prstGeom prst="rect">
+            <a:avLst/>
+          </a:prstGeom>
+          <a:noFill/>
+        </p:spPr>
+        <p:txBody>
+          <a:bodyPr wrap="square" anchor="ctr">
+            <a:spAutoFit/>
+          </a:bodyPr>
+          <a:lstStyle/>
+          <a:p>
+            <a:pPr algn="l">
+              <a:spcAft>
+                <a:spcPts val="100"/>
+              </a:spcAft>
+            </a:pPr>
+            <a:r>
+              <a:rPr sz="1500" b="1">
+                <a:solidFill>
+                  <a:srgbClr val="6D2E46"/>
+                </a:solidFill>
+                <a:latin typeface="Calibri"/>
+              </a:rPr>
+              <a:t>Token</a:t>
+            </a:r>
+          </a:p>
+          <a:p>
+            <a:pPr algn="l">
+              <a:spcAft>
+                <a:spcPts val="100"/>
+              </a:spcAft>
+            </a:pPr>
+            <a:r>
+              <a:rPr sz="1250" b="0">
                 <a:solidFill>
                   <a:srgbClr val="2B2B2B"/>
                 </a:solidFill>
                 <a:latin typeface="Calibri"/>
               </a:rPr>
-              <a:t>•  Encabezado, filtro por categoría y tarjetas (cards)</a:t>
-            </a:r>
-          </a:p>
-          <a:p>
-            <a:pPr>
-              <a:spcAft>
-                <a:spcPts val="1500"/>
-              </a:spcAft>
-            </a:pPr>
-            <a:r>
-              <a:rPr sz="2200">
+              <a:t>La unidad mínima de texto que la IA procesa (trozos de palabras).</a:t>
+            </a:r>
+          </a:p>
+        </p:txBody>
+      </p:sp>
+      <p:sp>
+        <p:nvSpPr>
+          <p:cNvPr id="15" name="Rounded Rectangle 14"/>
+          <p:cNvSpPr/>
+          <p:nvPr/>
+        </p:nvSpPr>
+        <p:spPr>
+          <a:xfrm>
+            <a:off x="658368" y="4672584"/>
+            <a:ext cx="5349240" cy="786384"/>
+          </a:xfrm>
+          <a:prstGeom prst="roundRect">
+            <a:avLst/>
+          </a:prstGeom>
+          <a:solidFill>
+            <a:srgbClr val="FFFFFF"/>
+          </a:solidFill>
+          <a:ln w="15240">
+            <a:solidFill>
+              <a:srgbClr val="EADDC8"/>
+            </a:solidFill>
+          </a:ln>
+          <a:effectLst/>
+        </p:spPr>
+        <p:style>
+          <a:lnRef idx="1">
+            <a:schemeClr val="accent1"/>
+          </a:lnRef>
+          <a:fillRef idx="3">
+            <a:schemeClr val="accent1"/>
+          </a:fillRef>
+          <a:effectRef idx="2">
+            <a:schemeClr val="accent1"/>
+          </a:effectRef>
+          <a:fontRef idx="minor">
+            <a:schemeClr val="lt1"/>
+          </a:fontRef>
+        </p:style>
+        <p:txBody>
+          <a:bodyPr rtlCol="0" anchor="ctr"/>
+          <a:lstStyle/>
+          <a:p>
+            <a:pPr algn="ctr"/>
+          </a:p>
+        </p:txBody>
+      </p:sp>
+      <p:sp>
+        <p:nvSpPr>
+          <p:cNvPr id="16" name="Rectangle 15"/>
+          <p:cNvSpPr/>
+          <p:nvPr/>
+        </p:nvSpPr>
+        <p:spPr>
+          <a:xfrm>
+            <a:off x="658368" y="4672584"/>
+            <a:ext cx="91440" cy="786384"/>
+          </a:xfrm>
+          <a:prstGeom prst="rect">
+            <a:avLst/>
+          </a:prstGeom>
+          <a:solidFill>
+            <a:srgbClr val="E3B23C"/>
+          </a:solidFill>
+          <a:ln>
+            <a:noFill/>
+          </a:ln>
+          <a:effectLst/>
+        </p:spPr>
+        <p:style>
+          <a:lnRef idx="1">
+            <a:schemeClr val="accent1"/>
+          </a:lnRef>
+          <a:fillRef idx="3">
+            <a:schemeClr val="accent1"/>
+          </a:fillRef>
+          <a:effectRef idx="2">
+            <a:schemeClr val="accent1"/>
+          </a:effectRef>
+          <a:fontRef idx="minor">
+            <a:schemeClr val="lt1"/>
+          </a:fontRef>
+        </p:style>
+        <p:txBody>
+          <a:bodyPr rtlCol="0" anchor="ctr"/>
+          <a:lstStyle/>
+          <a:p>
+            <a:pPr algn="ctr"/>
+          </a:p>
+        </p:txBody>
+      </p:sp>
+      <p:sp>
+        <p:nvSpPr>
+          <p:cNvPr id="17" name="TextBox 16"/>
+          <p:cNvSpPr txBox="1"/>
+          <p:nvPr/>
+        </p:nvSpPr>
+        <p:spPr>
+          <a:xfrm>
+            <a:off x="914400" y="4727448"/>
+            <a:ext cx="4892040" cy="676656"/>
+          </a:xfrm>
+          <a:prstGeom prst="rect">
+            <a:avLst/>
+          </a:prstGeom>
+          <a:noFill/>
+        </p:spPr>
+        <p:txBody>
+          <a:bodyPr wrap="square" anchor="ctr">
+            <a:spAutoFit/>
+          </a:bodyPr>
+          <a:lstStyle/>
+          <a:p>
+            <a:pPr algn="l">
+              <a:spcAft>
+                <a:spcPts val="100"/>
+              </a:spcAft>
+            </a:pPr>
+            <a:r>
+              <a:rPr sz="1500" b="1">
+                <a:solidFill>
+                  <a:srgbClr val="6D2E46"/>
+                </a:solidFill>
+                <a:latin typeface="Calibri"/>
+              </a:rPr>
+              <a:t>Generar</a:t>
+            </a:r>
+          </a:p>
+          <a:p>
+            <a:pPr algn="l">
+              <a:spcAft>
+                <a:spcPts val="100"/>
+              </a:spcAft>
+            </a:pPr>
+            <a:r>
+              <a:rPr sz="1250" b="0">
                 <a:solidFill>
                   <a:srgbClr val="2B2B2B"/>
                 </a:solidFill>
                 <a:latin typeface="Calibri"/>
               </a:rPr>
-              <a:t>•  Cada tarjeta: imagen, nombre, zona y categoría</a:t>
-            </a:r>
-          </a:p>
-          <a:p>
-            <a:pPr>
-              <a:spcAft>
-                <a:spcPts val="1500"/>
-              </a:spcAft>
-            </a:pPr>
-            <a:r>
-              <a:rPr sz="2200">
+              <a:t>Cuando la IA produce el código y la app a partir de tu prompt.</a:t>
+            </a:r>
+          </a:p>
+        </p:txBody>
+      </p:sp>
+      <p:sp>
+        <p:nvSpPr>
+          <p:cNvPr id="18" name="Rounded Rectangle 17"/>
+          <p:cNvSpPr/>
+          <p:nvPr/>
+        </p:nvSpPr>
+        <p:spPr>
+          <a:xfrm>
+            <a:off x="658368" y="5559552"/>
+            <a:ext cx="5349240" cy="786384"/>
+          </a:xfrm>
+          <a:prstGeom prst="roundRect">
+            <a:avLst/>
+          </a:prstGeom>
+          <a:solidFill>
+            <a:srgbClr val="FFFFFF"/>
+          </a:solidFill>
+          <a:ln w="15240">
+            <a:solidFill>
+              <a:srgbClr val="EADDC8"/>
+            </a:solidFill>
+          </a:ln>
+          <a:effectLst/>
+        </p:spPr>
+        <p:style>
+          <a:lnRef idx="1">
+            <a:schemeClr val="accent1"/>
+          </a:lnRef>
+          <a:fillRef idx="3">
+            <a:schemeClr val="accent1"/>
+          </a:fillRef>
+          <a:effectRef idx="2">
+            <a:schemeClr val="accent1"/>
+          </a:effectRef>
+          <a:fontRef idx="minor">
+            <a:schemeClr val="lt1"/>
+          </a:fontRef>
+        </p:style>
+        <p:txBody>
+          <a:bodyPr rtlCol="0" anchor="ctr"/>
+          <a:lstStyle/>
+          <a:p>
+            <a:pPr algn="ctr"/>
+          </a:p>
+        </p:txBody>
+      </p:sp>
+      <p:sp>
+        <p:nvSpPr>
+          <p:cNvPr id="19" name="Rectangle 18"/>
+          <p:cNvSpPr/>
+          <p:nvPr/>
+        </p:nvSpPr>
+        <p:spPr>
+          <a:xfrm>
+            <a:off x="658368" y="5559552"/>
+            <a:ext cx="91440" cy="786384"/>
+          </a:xfrm>
+          <a:prstGeom prst="rect">
+            <a:avLst/>
+          </a:prstGeom>
+          <a:solidFill>
+            <a:srgbClr val="E3B23C"/>
+          </a:solidFill>
+          <a:ln>
+            <a:noFill/>
+          </a:ln>
+          <a:effectLst/>
+        </p:spPr>
+        <p:style>
+          <a:lnRef idx="1">
+            <a:schemeClr val="accent1"/>
+          </a:lnRef>
+          <a:fillRef idx="3">
+            <a:schemeClr val="accent1"/>
+          </a:fillRef>
+          <a:effectRef idx="2">
+            <a:schemeClr val="accent1"/>
+          </a:effectRef>
+          <a:fontRef idx="minor">
+            <a:schemeClr val="lt1"/>
+          </a:fontRef>
+        </p:style>
+        <p:txBody>
+          <a:bodyPr rtlCol="0" anchor="ctr"/>
+          <a:lstStyle/>
+          <a:p>
+            <a:pPr algn="ctr"/>
+          </a:p>
+        </p:txBody>
+      </p:sp>
+      <p:sp>
+        <p:nvSpPr>
+          <p:cNvPr id="20" name="TextBox 19"/>
+          <p:cNvSpPr txBox="1"/>
+          <p:nvPr/>
+        </p:nvSpPr>
+        <p:spPr>
+          <a:xfrm>
+            <a:off x="914400" y="5614416"/>
+            <a:ext cx="4892040" cy="676656"/>
+          </a:xfrm>
+          <a:prstGeom prst="rect">
+            <a:avLst/>
+          </a:prstGeom>
+          <a:noFill/>
+        </p:spPr>
+        <p:txBody>
+          <a:bodyPr wrap="square" anchor="ctr">
+            <a:spAutoFit/>
+          </a:bodyPr>
+          <a:lstStyle/>
+          <a:p>
+            <a:pPr algn="l">
+              <a:spcAft>
+                <a:spcPts val="100"/>
+              </a:spcAft>
+            </a:pPr>
+            <a:r>
+              <a:rPr sz="1500" b="1">
+                <a:solidFill>
+                  <a:srgbClr val="6D2E46"/>
+                </a:solidFill>
+                <a:latin typeface="Calibri"/>
+              </a:rPr>
+              <a:t>Iterar / refinar</a:t>
+            </a:r>
+          </a:p>
+          <a:p>
+            <a:pPr algn="l">
+              <a:spcAft>
+                <a:spcPts val="100"/>
+              </a:spcAft>
+            </a:pPr>
+            <a:r>
+              <a:rPr sz="1250" b="0">
                 <a:solidFill>
                   <a:srgbClr val="2B2B2B"/>
                 </a:solidFill>
                 <a:latin typeface="Calibri"/>
               </a:rPr>
-              <a:t>•  Hoy la construyes y aplicas tu primer refinamiento</a:t>
+              <a:t>Mejorar la app pidiendo un cambio a la vez.</a:t>
+            </a:r>
+          </a:p>
+        </p:txBody>
+      </p:sp>
+      <p:sp>
+        <p:nvSpPr>
+          <p:cNvPr id="21" name="Rounded Rectangle 20"/>
+          <p:cNvSpPr/>
+          <p:nvPr/>
+        </p:nvSpPr>
+        <p:spPr>
+          <a:xfrm>
+            <a:off x="6373368" y="2011680"/>
+            <a:ext cx="5349240" cy="786384"/>
+          </a:xfrm>
+          <a:prstGeom prst="roundRect">
+            <a:avLst/>
+          </a:prstGeom>
+          <a:solidFill>
+            <a:srgbClr val="FFFFFF"/>
+          </a:solidFill>
+          <a:ln w="15240">
+            <a:solidFill>
+              <a:srgbClr val="EADDC8"/>
+            </a:solidFill>
+          </a:ln>
+          <a:effectLst/>
+        </p:spPr>
+        <p:style>
+          <a:lnRef idx="1">
+            <a:schemeClr val="accent1"/>
+          </a:lnRef>
+          <a:fillRef idx="3">
+            <a:schemeClr val="accent1"/>
+          </a:fillRef>
+          <a:effectRef idx="2">
+            <a:schemeClr val="accent1"/>
+          </a:effectRef>
+          <a:fontRef idx="minor">
+            <a:schemeClr val="lt1"/>
+          </a:fontRef>
+        </p:style>
+        <p:txBody>
+          <a:bodyPr rtlCol="0" anchor="ctr"/>
+          <a:lstStyle/>
+          <a:p>
+            <a:pPr algn="ctr"/>
+          </a:p>
+        </p:txBody>
+      </p:sp>
+      <p:sp>
+        <p:nvSpPr>
+          <p:cNvPr id="22" name="Rectangle 21"/>
+          <p:cNvSpPr/>
+          <p:nvPr/>
+        </p:nvSpPr>
+        <p:spPr>
+          <a:xfrm>
+            <a:off x="6373368" y="2011680"/>
+            <a:ext cx="91440" cy="786384"/>
+          </a:xfrm>
+          <a:prstGeom prst="rect">
+            <a:avLst/>
+          </a:prstGeom>
+          <a:solidFill>
+            <a:srgbClr val="E3B23C"/>
+          </a:solidFill>
+          <a:ln>
+            <a:noFill/>
+          </a:ln>
+          <a:effectLst/>
+        </p:spPr>
+        <p:style>
+          <a:lnRef idx="1">
+            <a:schemeClr val="accent1"/>
+          </a:lnRef>
+          <a:fillRef idx="3">
+            <a:schemeClr val="accent1"/>
+          </a:fillRef>
+          <a:effectRef idx="2">
+            <a:schemeClr val="accent1"/>
+          </a:effectRef>
+          <a:fontRef idx="minor">
+            <a:schemeClr val="lt1"/>
+          </a:fontRef>
+        </p:style>
+        <p:txBody>
+          <a:bodyPr rtlCol="0" anchor="ctr"/>
+          <a:lstStyle/>
+          <a:p>
+            <a:pPr algn="ctr"/>
+          </a:p>
+        </p:txBody>
+      </p:sp>
+      <p:sp>
+        <p:nvSpPr>
+          <p:cNvPr id="23" name="TextBox 22"/>
+          <p:cNvSpPr txBox="1"/>
+          <p:nvPr/>
+        </p:nvSpPr>
+        <p:spPr>
+          <a:xfrm>
+            <a:off x="6629400" y="2066544"/>
+            <a:ext cx="4892040" cy="676656"/>
+          </a:xfrm>
+          <a:prstGeom prst="rect">
+            <a:avLst/>
+          </a:prstGeom>
+          <a:noFill/>
+        </p:spPr>
+        <p:txBody>
+          <a:bodyPr wrap="square" anchor="ctr">
+            <a:spAutoFit/>
+          </a:bodyPr>
+          <a:lstStyle/>
+          <a:p>
+            <a:pPr algn="l">
+              <a:spcAft>
+                <a:spcPts val="100"/>
+              </a:spcAft>
+            </a:pPr>
+            <a:r>
+              <a:rPr sz="1500" b="1">
+                <a:solidFill>
+                  <a:srgbClr val="6D2E46"/>
+                </a:solidFill>
+                <a:latin typeface="Calibri"/>
+              </a:rPr>
+              <a:t>Checkpoint</a:t>
+            </a:r>
+          </a:p>
+          <a:p>
+            <a:pPr algn="l">
+              <a:spcAft>
+                <a:spcPts val="100"/>
+              </a:spcAft>
+            </a:pPr>
+            <a:r>
+              <a:rPr sz="1250" b="0">
+                <a:solidFill>
+                  <a:srgbClr val="2B2B2B"/>
+                </a:solidFill>
+                <a:latin typeface="Calibri"/>
+              </a:rPr>
+              <a:t>Un punto guardado al que puedes volver (como guardar la partida).</a:t>
+            </a:r>
+          </a:p>
+        </p:txBody>
+      </p:sp>
+      <p:sp>
+        <p:nvSpPr>
+          <p:cNvPr id="24" name="Rounded Rectangle 23"/>
+          <p:cNvSpPr/>
+          <p:nvPr/>
+        </p:nvSpPr>
+        <p:spPr>
+          <a:xfrm>
+            <a:off x="6373368" y="2898648"/>
+            <a:ext cx="5349240" cy="786384"/>
+          </a:xfrm>
+          <a:prstGeom prst="roundRect">
+            <a:avLst/>
+          </a:prstGeom>
+          <a:solidFill>
+            <a:srgbClr val="FFFFFF"/>
+          </a:solidFill>
+          <a:ln w="15240">
+            <a:solidFill>
+              <a:srgbClr val="EADDC8"/>
+            </a:solidFill>
+          </a:ln>
+          <a:effectLst/>
+        </p:spPr>
+        <p:style>
+          <a:lnRef idx="1">
+            <a:schemeClr val="accent1"/>
+          </a:lnRef>
+          <a:fillRef idx="3">
+            <a:schemeClr val="accent1"/>
+          </a:fillRef>
+          <a:effectRef idx="2">
+            <a:schemeClr val="accent1"/>
+          </a:effectRef>
+          <a:fontRef idx="minor">
+            <a:schemeClr val="lt1"/>
+          </a:fontRef>
+        </p:style>
+        <p:txBody>
+          <a:bodyPr rtlCol="0" anchor="ctr"/>
+          <a:lstStyle/>
+          <a:p>
+            <a:pPr algn="ctr"/>
+          </a:p>
+        </p:txBody>
+      </p:sp>
+      <p:sp>
+        <p:nvSpPr>
+          <p:cNvPr id="25" name="Rectangle 24"/>
+          <p:cNvSpPr/>
+          <p:nvPr/>
+        </p:nvSpPr>
+        <p:spPr>
+          <a:xfrm>
+            <a:off x="6373368" y="2898648"/>
+            <a:ext cx="91440" cy="786384"/>
+          </a:xfrm>
+          <a:prstGeom prst="rect">
+            <a:avLst/>
+          </a:prstGeom>
+          <a:solidFill>
+            <a:srgbClr val="E3B23C"/>
+          </a:solidFill>
+          <a:ln>
+            <a:noFill/>
+          </a:ln>
+          <a:effectLst/>
+        </p:spPr>
+        <p:style>
+          <a:lnRef idx="1">
+            <a:schemeClr val="accent1"/>
+          </a:lnRef>
+          <a:fillRef idx="3">
+            <a:schemeClr val="accent1"/>
+          </a:fillRef>
+          <a:effectRef idx="2">
+            <a:schemeClr val="accent1"/>
+          </a:effectRef>
+          <a:fontRef idx="minor">
+            <a:schemeClr val="lt1"/>
+          </a:fontRef>
+        </p:style>
+        <p:txBody>
+          <a:bodyPr rtlCol="0" anchor="ctr"/>
+          <a:lstStyle/>
+          <a:p>
+            <a:pPr algn="ctr"/>
+          </a:p>
+        </p:txBody>
+      </p:sp>
+      <p:sp>
+        <p:nvSpPr>
+          <p:cNvPr id="26" name="TextBox 25"/>
+          <p:cNvSpPr txBox="1"/>
+          <p:nvPr/>
+        </p:nvSpPr>
+        <p:spPr>
+          <a:xfrm>
+            <a:off x="6629400" y="2953512"/>
+            <a:ext cx="4892040" cy="676656"/>
+          </a:xfrm>
+          <a:prstGeom prst="rect">
+            <a:avLst/>
+          </a:prstGeom>
+          <a:noFill/>
+        </p:spPr>
+        <p:txBody>
+          <a:bodyPr wrap="square" anchor="ctr">
+            <a:spAutoFit/>
+          </a:bodyPr>
+          <a:lstStyle/>
+          <a:p>
+            <a:pPr algn="l">
+              <a:spcAft>
+                <a:spcPts val="100"/>
+              </a:spcAft>
+            </a:pPr>
+            <a:r>
+              <a:rPr sz="1500" b="1">
+                <a:solidFill>
+                  <a:srgbClr val="6D2E46"/>
+                </a:solidFill>
+                <a:latin typeface="Calibri"/>
+              </a:rPr>
+              <a:t>Alucinación</a:t>
+            </a:r>
+          </a:p>
+          <a:p>
+            <a:pPr algn="l">
+              <a:spcAft>
+                <a:spcPts val="100"/>
+              </a:spcAft>
+            </a:pPr>
+            <a:r>
+              <a:rPr sz="1250" b="0">
+                <a:solidFill>
+                  <a:srgbClr val="2B2B2B"/>
+                </a:solidFill>
+                <a:latin typeface="Calibri"/>
+              </a:rPr>
+              <a:t>Cuando la IA inventa algo incorrecto; siempre hay que verificar.</a:t>
+            </a:r>
+          </a:p>
+        </p:txBody>
+      </p:sp>
+      <p:sp>
+        <p:nvSpPr>
+          <p:cNvPr id="27" name="Rounded Rectangle 26"/>
+          <p:cNvSpPr/>
+          <p:nvPr/>
+        </p:nvSpPr>
+        <p:spPr>
+          <a:xfrm>
+            <a:off x="6373368" y="3785616"/>
+            <a:ext cx="5349240" cy="786384"/>
+          </a:xfrm>
+          <a:prstGeom prst="roundRect">
+            <a:avLst/>
+          </a:prstGeom>
+          <a:solidFill>
+            <a:srgbClr val="FFFFFF"/>
+          </a:solidFill>
+          <a:ln w="15240">
+            <a:solidFill>
+              <a:srgbClr val="EADDC8"/>
+            </a:solidFill>
+          </a:ln>
+          <a:effectLst/>
+        </p:spPr>
+        <p:style>
+          <a:lnRef idx="1">
+            <a:schemeClr val="accent1"/>
+          </a:lnRef>
+          <a:fillRef idx="3">
+            <a:schemeClr val="accent1"/>
+          </a:fillRef>
+          <a:effectRef idx="2">
+            <a:schemeClr val="accent1"/>
+          </a:effectRef>
+          <a:fontRef idx="minor">
+            <a:schemeClr val="lt1"/>
+          </a:fontRef>
+        </p:style>
+        <p:txBody>
+          <a:bodyPr rtlCol="0" anchor="ctr"/>
+          <a:lstStyle/>
+          <a:p>
+            <a:pPr algn="ctr"/>
+          </a:p>
+        </p:txBody>
+      </p:sp>
+      <p:sp>
+        <p:nvSpPr>
+          <p:cNvPr id="28" name="Rectangle 27"/>
+          <p:cNvSpPr/>
+          <p:nvPr/>
+        </p:nvSpPr>
+        <p:spPr>
+          <a:xfrm>
+            <a:off x="6373368" y="3785616"/>
+            <a:ext cx="91440" cy="786384"/>
+          </a:xfrm>
+          <a:prstGeom prst="rect">
+            <a:avLst/>
+          </a:prstGeom>
+          <a:solidFill>
+            <a:srgbClr val="E3B23C"/>
+          </a:solidFill>
+          <a:ln>
+            <a:noFill/>
+          </a:ln>
+          <a:effectLst/>
+        </p:spPr>
+        <p:style>
+          <a:lnRef idx="1">
+            <a:schemeClr val="accent1"/>
+          </a:lnRef>
+          <a:fillRef idx="3">
+            <a:schemeClr val="accent1"/>
+          </a:fillRef>
+          <a:effectRef idx="2">
+            <a:schemeClr val="accent1"/>
+          </a:effectRef>
+          <a:fontRef idx="minor">
+            <a:schemeClr val="lt1"/>
+          </a:fontRef>
+        </p:style>
+        <p:txBody>
+          <a:bodyPr rtlCol="0" anchor="ctr"/>
+          <a:lstStyle/>
+          <a:p>
+            <a:pPr algn="ctr"/>
+          </a:p>
+        </p:txBody>
+      </p:sp>
+      <p:sp>
+        <p:nvSpPr>
+          <p:cNvPr id="29" name="TextBox 28"/>
+          <p:cNvSpPr txBox="1"/>
+          <p:nvPr/>
+        </p:nvSpPr>
+        <p:spPr>
+          <a:xfrm>
+            <a:off x="6629400" y="3840480"/>
+            <a:ext cx="4892040" cy="676656"/>
+          </a:xfrm>
+          <a:prstGeom prst="rect">
+            <a:avLst/>
+          </a:prstGeom>
+          <a:noFill/>
+        </p:spPr>
+        <p:txBody>
+          <a:bodyPr wrap="square" anchor="ctr">
+            <a:spAutoFit/>
+          </a:bodyPr>
+          <a:lstStyle/>
+          <a:p>
+            <a:pPr algn="l">
+              <a:spcAft>
+                <a:spcPts val="100"/>
+              </a:spcAft>
+            </a:pPr>
+            <a:r>
+              <a:rPr sz="1500" b="1">
+                <a:solidFill>
+                  <a:srgbClr val="6D2E46"/>
+                </a:solidFill>
+                <a:latin typeface="Calibri"/>
+              </a:rPr>
+              <a:t>AI Chips (Nano Banana)</a:t>
+            </a:r>
+          </a:p>
+          <a:p>
+            <a:pPr algn="l">
+              <a:spcAft>
+                <a:spcPts val="100"/>
+              </a:spcAft>
+            </a:pPr>
+            <a:r>
+              <a:rPr sz="1250" b="0">
+                <a:solidFill>
+                  <a:srgbClr val="2B2B2B"/>
+                </a:solidFill>
+                <a:latin typeface="Calibri"/>
+              </a:rPr>
+              <a:t>Servicios de Google dentro de AI Studio; Nano Banana genera imágenes.</a:t>
+            </a:r>
+          </a:p>
+        </p:txBody>
+      </p:sp>
+      <p:sp>
+        <p:nvSpPr>
+          <p:cNvPr id="30" name="Rounded Rectangle 29"/>
+          <p:cNvSpPr/>
+          <p:nvPr/>
+        </p:nvSpPr>
+        <p:spPr>
+          <a:xfrm>
+            <a:off x="6373368" y="4672584"/>
+            <a:ext cx="5349240" cy="786384"/>
+          </a:xfrm>
+          <a:prstGeom prst="roundRect">
+            <a:avLst/>
+          </a:prstGeom>
+          <a:solidFill>
+            <a:srgbClr val="FFFFFF"/>
+          </a:solidFill>
+          <a:ln w="15240">
+            <a:solidFill>
+              <a:srgbClr val="EADDC8"/>
+            </a:solidFill>
+          </a:ln>
+          <a:effectLst/>
+        </p:spPr>
+        <p:style>
+          <a:lnRef idx="1">
+            <a:schemeClr val="accent1"/>
+          </a:lnRef>
+          <a:fillRef idx="3">
+            <a:schemeClr val="accent1"/>
+          </a:fillRef>
+          <a:effectRef idx="2">
+            <a:schemeClr val="accent1"/>
+          </a:effectRef>
+          <a:fontRef idx="minor">
+            <a:schemeClr val="lt1"/>
+          </a:fontRef>
+        </p:style>
+        <p:txBody>
+          <a:bodyPr rtlCol="0" anchor="ctr"/>
+          <a:lstStyle/>
+          <a:p>
+            <a:pPr algn="ctr"/>
+          </a:p>
+        </p:txBody>
+      </p:sp>
+      <p:sp>
+        <p:nvSpPr>
+          <p:cNvPr id="31" name="Rectangle 30"/>
+          <p:cNvSpPr/>
+          <p:nvPr/>
+        </p:nvSpPr>
+        <p:spPr>
+          <a:xfrm>
+            <a:off x="6373368" y="4672584"/>
+            <a:ext cx="91440" cy="786384"/>
+          </a:xfrm>
+          <a:prstGeom prst="rect">
+            <a:avLst/>
+          </a:prstGeom>
+          <a:solidFill>
+            <a:srgbClr val="E3B23C"/>
+          </a:solidFill>
+          <a:ln>
+            <a:noFill/>
+          </a:ln>
+          <a:effectLst/>
+        </p:spPr>
+        <p:style>
+          <a:lnRef idx="1">
+            <a:schemeClr val="accent1"/>
+          </a:lnRef>
+          <a:fillRef idx="3">
+            <a:schemeClr val="accent1"/>
+          </a:fillRef>
+          <a:effectRef idx="2">
+            <a:schemeClr val="accent1"/>
+          </a:effectRef>
+          <a:fontRef idx="minor">
+            <a:schemeClr val="lt1"/>
+          </a:fontRef>
+        </p:style>
+        <p:txBody>
+          <a:bodyPr rtlCol="0" anchor="ctr"/>
+          <a:lstStyle/>
+          <a:p>
+            <a:pPr algn="ctr"/>
+          </a:p>
+        </p:txBody>
+      </p:sp>
+      <p:sp>
+        <p:nvSpPr>
+          <p:cNvPr id="32" name="TextBox 31"/>
+          <p:cNvSpPr txBox="1"/>
+          <p:nvPr/>
+        </p:nvSpPr>
+        <p:spPr>
+          <a:xfrm>
+            <a:off x="6629400" y="4727448"/>
+            <a:ext cx="4892040" cy="676656"/>
+          </a:xfrm>
+          <a:prstGeom prst="rect">
+            <a:avLst/>
+          </a:prstGeom>
+          <a:noFill/>
+        </p:spPr>
+        <p:txBody>
+          <a:bodyPr wrap="square" anchor="ctr">
+            <a:spAutoFit/>
+          </a:bodyPr>
+          <a:lstStyle/>
+          <a:p>
+            <a:pPr algn="l">
+              <a:spcAft>
+                <a:spcPts val="100"/>
+              </a:spcAft>
+            </a:pPr>
+            <a:r>
+              <a:rPr sz="1500" b="1">
+                <a:solidFill>
+                  <a:srgbClr val="6D2E46"/>
+                </a:solidFill>
+                <a:latin typeface="Calibri"/>
+              </a:rPr>
+              <a:t>Firebase</a:t>
+            </a:r>
+          </a:p>
+          <a:p>
+            <a:pPr algn="l">
+              <a:spcAft>
+                <a:spcPts val="100"/>
+              </a:spcAft>
+            </a:pPr>
+            <a:r>
+              <a:rPr sz="1250" b="0">
+                <a:solidFill>
+                  <a:srgbClr val="2B2B2B"/>
+                </a:solidFill>
+                <a:latin typeface="Calibri"/>
+              </a:rPr>
+              <a:t>La nube de Google: datos (Firestore), login (Auth) y archivos (Storage).</a:t>
             </a:r>
           </a:p>
         </p:txBody>

--- a/slides/sesion-01.pptx
+++ b/slides/sesion-01.pptx
@@ -9068,7 +9068,7 @@
                 </a:solidFill>
                 <a:latin typeface="Calibri"/>
               </a:rPr>
-              <a:t>•  Cloud Run para publicar · AI Chips (Nano Banana)</a:t>
+              <a:t>•  Cloud Run para publicar · Nano Banana para imágenes (playground)</a:t>
             </a:r>
           </a:p>
           <a:p>
@@ -11488,7 +11488,7 @@
                 </a:solidFill>
                 <a:latin typeface="Calibri"/>
               </a:rPr>
-              <a:t>AI Chips (Nano Banana)</a:t>
+              <a:t>Nano Banana (playground)</a:t>
             </a:r>
           </a:p>
           <a:p>
@@ -11504,7 +11504,7 @@
                 </a:solidFill>
                 <a:latin typeface="Calibri"/>
               </a:rPr>
-              <a:t>Servicios de Google dentro de AI Studio; Nano Banana genera imágenes.</a:t>
+              <a:t>Modelo de imágenes de Google; se usa en el playground de AI Studio, aparte de Build.</a:t>
             </a:r>
           </a:p>
         </p:txBody>
